--- a/si-portal/catalogues/TerraEMS_Catalogue.pptx
+++ b/si-portal/catalogues/TerraEMS_Catalogue.pptx
@@ -6,11 +6,12 @@
   </p:sldMasterIdLst>
   <p:sldIdLst>
     <p:sldId id="256" r:id="rId7"/>
-    <p:sldId id="257" r:id="rId8"/>
-    <p:sldId id="258" r:id="rId9"/>
-    <p:sldId id="259" r:id="rId10"/>
-    <p:sldId id="260" r:id="rId11"/>
-    <p:sldId id="261" r:id="rId12"/>
+    <p:sldId id="257" r:id="rId9"/>
+    <p:sldId id="258" r:id="rId10"/>
+    <p:sldId id="259" r:id="rId11"/>
+    <p:sldId id="260" r:id="rId12"/>
+    <p:sldId id="261" r:id="rId13"/>
+    <p:sldId id="262" r:id="rId14"/>
   </p:sldIdLst>
   <p:sldSz cx="12191695" cy="6858000" type="screen4x3"/>
   <p:notesSz cx="6858000" cy="9144000"/>
@@ -110,6 +111,1188 @@
     </a:lvl9pPr>
   </p:defaultTextStyle>
 </p:presentation>
+</file>
+
+<file path=ppt/notesMasters/notesMaster1.xml><?xml version="1.0" encoding="utf-8"?>
+<p:notesMaster xmlns:a="http://schemas.openxmlformats.org/drawingml/2006/main" xmlns:p="http://schemas.openxmlformats.org/presentationml/2006/main" xmlns:r="http://schemas.openxmlformats.org/officeDocument/2006/relationships">
+  <p:cSld>
+    <p:bg>
+      <p:bgRef idx="1001">
+        <a:schemeClr val="bg1"/>
+      </p:bgRef>
+    </p:bg>
+    <p:spTree>
+      <p:nvGrpSpPr>
+        <p:cNvPr id="1" name=""/>
+        <p:cNvGrpSpPr/>
+        <p:nvPr/>
+      </p:nvGrpSpPr>
+      <p:grpSpPr>
+        <a:xfrm>
+          <a:off x="0" y="0"/>
+          <a:ext cx="0" cy="0"/>
+          <a:chOff x="0" y="0"/>
+          <a:chExt cx="0" cy="0"/>
+        </a:xfrm>
+      </p:grpSpPr>
+      <p:sp>
+        <p:nvSpPr>
+          <p:cNvPr id="2" name="Header Placeholder 1"/>
+          <p:cNvSpPr>
+            <a:spLocks noGrp="1"/>
+          </p:cNvSpPr>
+          <p:nvPr>
+            <p:ph type="hdr" sz="quarter"/>
+          </p:nvPr>
+        </p:nvSpPr>
+        <p:spPr>
+          <a:xfrm>
+            <a:off x="0" y="0"/>
+            <a:ext cx="2971800" cy="457200"/>
+          </a:xfrm>
+          <a:prstGeom prst="rect">
+            <a:avLst/>
+          </a:prstGeom>
+        </p:spPr>
+        <p:txBody>
+          <a:bodyPr vert="horz" lIns="91440" tIns="45720" rIns="91440" bIns="45720" rtlCol="0"/>
+          <a:lstStyle>
+            <a:lvl1pPr algn="l">
+              <a:defRPr sz="1200"/>
+            </a:lvl1pPr>
+          </a:lstStyle>
+          <a:p>
+            <a:endParaRPr lang="en-US"/>
+          </a:p>
+        </p:txBody>
+      </p:sp>
+      <p:sp>
+        <p:nvSpPr>
+          <p:cNvPr id="3" name="Date Placeholder 2"/>
+          <p:cNvSpPr>
+            <a:spLocks noGrp="1"/>
+          </p:cNvSpPr>
+          <p:nvPr>
+            <p:ph type="dt" idx="1"/>
+          </p:nvPr>
+        </p:nvSpPr>
+        <p:spPr>
+          <a:xfrm>
+            <a:off x="3884613" y="0"/>
+            <a:ext cx="2971800" cy="457200"/>
+          </a:xfrm>
+          <a:prstGeom prst="rect">
+            <a:avLst/>
+          </a:prstGeom>
+        </p:spPr>
+        <p:txBody>
+          <a:bodyPr vert="horz" lIns="91440" tIns="45720" rIns="91440" bIns="45720" rtlCol="0"/>
+          <a:lstStyle>
+            <a:lvl1pPr algn="r">
+              <a:defRPr sz="1200"/>
+            </a:lvl1pPr>
+          </a:lstStyle>
+          <a:p>
+            <a:fld id="{0F89C1C7-3DCD-1040-A9CF-14679D8B5DDD}" type="datetimeFigureOut">
+              <a:rPr lang="en-US" smtClean="0"/>
+              <a:t>10/17/16</a:t>
+            </a:fld>
+            <a:endParaRPr lang="en-US"/>
+          </a:p>
+        </p:txBody>
+      </p:sp>
+      <p:sp>
+        <p:nvSpPr>
+          <p:cNvPr id="4" name="Slide Image Placeholder 3"/>
+          <p:cNvSpPr>
+            <a:spLocks noGrp="1" noRot="1" noChangeAspect="1"/>
+          </p:cNvSpPr>
+          <p:nvPr>
+            <p:ph type="sldImg" idx="2"/>
+          </p:nvPr>
+        </p:nvSpPr>
+        <p:spPr>
+          <a:xfrm>
+            <a:off x="1143000" y="685800"/>
+            <a:ext cx="4572000" cy="3429000"/>
+          </a:xfrm>
+          <a:prstGeom prst="rect">
+            <a:avLst/>
+          </a:prstGeom>
+          <a:noFill/>
+          <a:ln w="12700">
+            <a:solidFill>
+              <a:prstClr val="black"/>
+            </a:solidFill>
+          </a:ln>
+        </p:spPr>
+        <p:txBody>
+          <a:bodyPr vert="horz" lIns="91440" tIns="45720" rIns="91440" bIns="45720" rtlCol="0" anchor="ctr"/>
+          <a:lstStyle/>
+          <a:p>
+            <a:endParaRPr lang="en-US"/>
+          </a:p>
+        </p:txBody>
+      </p:sp>
+      <p:sp>
+        <p:nvSpPr>
+          <p:cNvPr id="5" name="Notes Placeholder 4"/>
+          <p:cNvSpPr>
+            <a:spLocks noGrp="1"/>
+          </p:cNvSpPr>
+          <p:nvPr>
+            <p:ph type="body" sz="quarter" idx="3"/>
+          </p:nvPr>
+        </p:nvSpPr>
+        <p:spPr>
+          <a:xfrm>
+            <a:off x="685800" y="4343400"/>
+            <a:ext cx="5486400" cy="4114800"/>
+          </a:xfrm>
+          <a:prstGeom prst="rect">
+            <a:avLst/>
+          </a:prstGeom>
+        </p:spPr>
+        <p:txBody>
+          <a:bodyPr vert="horz" lIns="91440" tIns="45720" rIns="91440" bIns="45720" rtlCol="0"/>
+          <a:lstStyle/>
+          <a:p>
+            <a:pPr lvl="0"/>
+            <a:r>
+              <a:rPr lang="en-US" smtClean="0"/>
+              <a:t>Click to edit Master text styles</a:t>
+            </a:r>
+          </a:p>
+          <a:p>
+            <a:pPr lvl="1"/>
+            <a:r>
+              <a:rPr lang="en-US" smtClean="0"/>
+              <a:t>Second level</a:t>
+            </a:r>
+          </a:p>
+          <a:p>
+            <a:pPr lvl="2"/>
+            <a:r>
+              <a:rPr lang="en-US" smtClean="0"/>
+              <a:t>Third level</a:t>
+            </a:r>
+          </a:p>
+          <a:p>
+            <a:pPr lvl="3"/>
+            <a:r>
+              <a:rPr lang="en-US" smtClean="0"/>
+              <a:t>Fourth level</a:t>
+            </a:r>
+          </a:p>
+          <a:p>
+            <a:pPr lvl="4"/>
+            <a:r>
+              <a:rPr lang="en-US" smtClean="0"/>
+              <a:t>Fifth level</a:t>
+            </a:r>
+            <a:endParaRPr lang="en-US"/>
+          </a:p>
+        </p:txBody>
+      </p:sp>
+      <p:sp>
+        <p:nvSpPr>
+          <p:cNvPr id="6" name="Footer Placeholder 5"/>
+          <p:cNvSpPr>
+            <a:spLocks noGrp="1"/>
+          </p:cNvSpPr>
+          <p:nvPr>
+            <p:ph type="ftr" sz="quarter" idx="4"/>
+          </p:nvPr>
+        </p:nvSpPr>
+        <p:spPr>
+          <a:xfrm>
+            <a:off x="0" y="8685213"/>
+            <a:ext cx="2971800" cy="457200"/>
+          </a:xfrm>
+          <a:prstGeom prst="rect">
+            <a:avLst/>
+          </a:prstGeom>
+        </p:spPr>
+        <p:txBody>
+          <a:bodyPr vert="horz" lIns="91440" tIns="45720" rIns="91440" bIns="45720" rtlCol="0" anchor="b"/>
+          <a:lstStyle>
+            <a:lvl1pPr algn="l">
+              <a:defRPr sz="1200"/>
+            </a:lvl1pPr>
+          </a:lstStyle>
+          <a:p>
+            <a:endParaRPr lang="en-US"/>
+          </a:p>
+        </p:txBody>
+      </p:sp>
+      <p:sp>
+        <p:nvSpPr>
+          <p:cNvPr id="7" name="Slide Number Placeholder 6"/>
+          <p:cNvSpPr>
+            <a:spLocks noGrp="1"/>
+          </p:cNvSpPr>
+          <p:nvPr>
+            <p:ph type="sldNum" sz="quarter" idx="5"/>
+          </p:nvPr>
+        </p:nvSpPr>
+        <p:spPr>
+          <a:xfrm>
+            <a:off x="3884613" y="8685213"/>
+            <a:ext cx="2971800" cy="457200"/>
+          </a:xfrm>
+          <a:prstGeom prst="rect">
+            <a:avLst/>
+          </a:prstGeom>
+        </p:spPr>
+        <p:txBody>
+          <a:bodyPr vert="horz" lIns="91440" tIns="45720" rIns="91440" bIns="45720" rtlCol="0" anchor="b"/>
+          <a:lstStyle>
+            <a:lvl1pPr algn="r">
+              <a:defRPr sz="1200"/>
+            </a:lvl1pPr>
+          </a:lstStyle>
+          <a:p>
+            <a:fld id="{BB5E49A5-4136-284D-997B-48E1D791AD67}" type="slidenum">
+              <a:rPr lang="en-US" smtClean="0"/>
+              <a:t>‹#›</a:t>
+            </a:fld>
+            <a:endParaRPr lang="en-US"/>
+          </a:p>
+        </p:txBody>
+      </p:sp>
+    </p:spTree>
+    <p:extLst>
+      <p:ext uri="{BB962C8B-B14F-4D97-AF65-F5344CB8AC3E}">
+        <p14:creationId xmlns:p14="http://schemas.microsoft.com/office/powerpoint/2010/main" val="2623252185"/>
+      </p:ext>
+    </p:extLst>
+  </p:cSld>
+  <p:clrMap bg1="lt1" tx1="dk1" bg2="lt2" tx2="dk2" accent1="accent1" accent2="accent2" accent3="accent3" accent4="accent4" accent5="accent5" accent6="accent6" hlink="hlink" folHlink="folHlink"/>
+  <p:notesStyle>
+    <a:lvl1pPr marL="0" algn="l" defTabSz="457200" rtl="0" eaLnBrk="1" latinLnBrk="0" hangingPunct="1">
+      <a:defRPr sz="1200" kern="1200">
+        <a:solidFill>
+          <a:schemeClr val="tx1"/>
+        </a:solidFill>
+        <a:latin typeface="+mn-lt"/>
+        <a:ea typeface="+mn-ea"/>
+        <a:cs typeface="+mn-cs"/>
+      </a:defRPr>
+    </a:lvl1pPr>
+    <a:lvl2pPr marL="457200" algn="l" defTabSz="457200" rtl="0" eaLnBrk="1" latinLnBrk="0" hangingPunct="1">
+      <a:defRPr sz="1200" kern="1200">
+        <a:solidFill>
+          <a:schemeClr val="tx1"/>
+        </a:solidFill>
+        <a:latin typeface="+mn-lt"/>
+        <a:ea typeface="+mn-ea"/>
+        <a:cs typeface="+mn-cs"/>
+      </a:defRPr>
+    </a:lvl2pPr>
+    <a:lvl3pPr marL="914400" algn="l" defTabSz="457200" rtl="0" eaLnBrk="1" latinLnBrk="0" hangingPunct="1">
+      <a:defRPr sz="1200" kern="1200">
+        <a:solidFill>
+          <a:schemeClr val="tx1"/>
+        </a:solidFill>
+        <a:latin typeface="+mn-lt"/>
+        <a:ea typeface="+mn-ea"/>
+        <a:cs typeface="+mn-cs"/>
+      </a:defRPr>
+    </a:lvl3pPr>
+    <a:lvl4pPr marL="1371600" algn="l" defTabSz="457200" rtl="0" eaLnBrk="1" latinLnBrk="0" hangingPunct="1">
+      <a:defRPr sz="1200" kern="1200">
+        <a:solidFill>
+          <a:schemeClr val="tx1"/>
+        </a:solidFill>
+        <a:latin typeface="+mn-lt"/>
+        <a:ea typeface="+mn-ea"/>
+        <a:cs typeface="+mn-cs"/>
+      </a:defRPr>
+    </a:lvl4pPr>
+    <a:lvl5pPr marL="1828800" algn="l" defTabSz="457200" rtl="0" eaLnBrk="1" latinLnBrk="0" hangingPunct="1">
+      <a:defRPr sz="1200" kern="1200">
+        <a:solidFill>
+          <a:schemeClr val="tx1"/>
+        </a:solidFill>
+        <a:latin typeface="+mn-lt"/>
+        <a:ea typeface="+mn-ea"/>
+        <a:cs typeface="+mn-cs"/>
+      </a:defRPr>
+    </a:lvl5pPr>
+    <a:lvl6pPr marL="2286000" algn="l" defTabSz="457200" rtl="0" eaLnBrk="1" latinLnBrk="0" hangingPunct="1">
+      <a:defRPr sz="1200" kern="1200">
+        <a:solidFill>
+          <a:schemeClr val="tx1"/>
+        </a:solidFill>
+        <a:latin typeface="+mn-lt"/>
+        <a:ea typeface="+mn-ea"/>
+        <a:cs typeface="+mn-cs"/>
+      </a:defRPr>
+    </a:lvl6pPr>
+    <a:lvl7pPr marL="2743200" algn="l" defTabSz="457200" rtl="0" eaLnBrk="1" latinLnBrk="0" hangingPunct="1">
+      <a:defRPr sz="1200" kern="1200">
+        <a:solidFill>
+          <a:schemeClr val="tx1"/>
+        </a:solidFill>
+        <a:latin typeface="+mn-lt"/>
+        <a:ea typeface="+mn-ea"/>
+        <a:cs typeface="+mn-cs"/>
+      </a:defRPr>
+    </a:lvl7pPr>
+    <a:lvl8pPr marL="3200400" algn="l" defTabSz="457200" rtl="0" eaLnBrk="1" latinLnBrk="0" hangingPunct="1">
+      <a:defRPr sz="1200" kern="1200">
+        <a:solidFill>
+          <a:schemeClr val="tx1"/>
+        </a:solidFill>
+        <a:latin typeface="+mn-lt"/>
+        <a:ea typeface="+mn-ea"/>
+        <a:cs typeface="+mn-cs"/>
+      </a:defRPr>
+    </a:lvl8pPr>
+    <a:lvl9pPr marL="3657600" algn="l" defTabSz="457200" rtl="0" eaLnBrk="1" latinLnBrk="0" hangingPunct="1">
+      <a:defRPr sz="1200" kern="1200">
+        <a:solidFill>
+          <a:schemeClr val="tx1"/>
+        </a:solidFill>
+        <a:latin typeface="+mn-lt"/>
+        <a:ea typeface="+mn-ea"/>
+        <a:cs typeface="+mn-cs"/>
+      </a:defRPr>
+    </a:lvl9pPr>
+  </p:notesStyle>
+</p:notesMaster>
+</file>
+
+<file path=ppt/notesSlides/notesSlide1.xml><?xml version="1.0" encoding="utf-8"?>
+<p:notes xmlns:a="http://schemas.openxmlformats.org/drawingml/2006/main" xmlns:p="http://schemas.openxmlformats.org/presentationml/2006/main" xmlns:r="http://schemas.openxmlformats.org/officeDocument/2006/relationships">
+  <p:cSld>
+    <p:spTree>
+      <p:nvGrpSpPr>
+        <p:cNvPr id="1" name=""/>
+        <p:cNvGrpSpPr/>
+        <p:nvPr/>
+      </p:nvGrpSpPr>
+      <p:grpSpPr>
+        <a:xfrm>
+          <a:off x="0" y="0"/>
+          <a:ext cx="0" cy="0"/>
+          <a:chOff x="0" y="0"/>
+          <a:chExt cx="0" cy="0"/>
+        </a:xfrm>
+      </p:grpSpPr>
+      <p:sp>
+        <p:nvSpPr>
+          <p:cNvPr id="2" name="Slide Image Placeholder 1"/>
+          <p:cNvSpPr>
+            <a:spLocks noGrp="1"/>
+          </p:cNvSpPr>
+          <p:nvPr>
+            <p:ph type="sldImg" idx="2"/>
+          </p:nvPr>
+        </p:nvSpPr>
+        <p:spPr/>
+      </p:sp>
+      <p:sp>
+        <p:nvSpPr>
+          <p:cNvPr id="3" name="Notes Placeholder 2"/>
+          <p:cNvSpPr>
+            <a:spLocks noGrp="1"/>
+          </p:cNvSpPr>
+          <p:nvPr>
+            <p:ph type="body" idx="3" sz="quarter"/>
+          </p:nvPr>
+        </p:nvSpPr>
+        <p:spPr/>
+        <p:txBody>
+          <a:bodyPr/>
+          <a:lstStyle/>
+          <a:p>
+            <a:r>
+              <a:t>TerraEMS - Enterprise Product Specification</a:t>
+            </a:r>
+          </a:p>
+          <a:p>
+            <a:r>
+              <a:t>Tagline: Army of AI Agents Managing Entire Energy Ecosystems</a:t>
+            </a:r>
+          </a:p>
+          <a:p/>
+          <a:p>
+            <a:r>
+              <a:t>Outcome Quote:</a:t>
+            </a:r>
+          </a:p>
+          <a:p>
+            <a:r>
+              <a:t>“24x7 conscious AI being analyzing your energy and taking action — not static utility bills, but predictive load balancing that eliminates peak demand penalties.” (— THE OUTCOME-BASED REVOLUTION)</a:t>
+            </a:r>
+          </a:p>
+          <a:p/>
+          <a:p>
+            <a:r>
+              <a:t>Executive Overview:</a:t>
+            </a:r>
+          </a:p>
+          <a:p>
+            <a:r>
+              <a:t>Whether managing a factory floor, a commercial complex, or an airport navigation grid, TerraEMS brings the entire energy infrastructure into one intelligent platform. Ingesting data across Modbus, DLMS, MQTT, and LoRaWAN, it combines deep harmonics analysis, predictive peak demand management, and 24/7 GenAI energy awareness.</a:t>
+            </a:r>
+          </a:p>
+          <a:p/>
+          <a:p>
+            <a:r>
+              <a:t>Key Telemetry Metrics:</a:t>
+            </a:r>
+          </a:p>
+          <a:p>
+            <a:r>
+              <a:t>- MFM CONFORMANCE:: Class 0.2S</a:t>
+            </a:r>
+          </a:p>
+          <a:p>
+            <a:r>
+              <a:t>- HARMONIC SCOPE:: Up to 63rd Order</a:t>
+            </a:r>
+          </a:p>
+          <a:p>
+            <a:r>
+              <a:t>- SLD ACCURACY:: 99.8% Nominal</a:t>
+            </a:r>
+          </a:p>
+          <a:p>
+            <a:r>
+              <a:t>- BILLING CYCLE:: 15-Min Block Sync</a:t>
+            </a:r>
+          </a:p>
+        </p:txBody>
+      </p:sp>
+      <p:sp>
+        <p:nvSpPr>
+          <p:cNvPr id="4" name="Slide Number Placeholder 3"/>
+          <p:cNvSpPr>
+            <a:spLocks noGrp="1"/>
+          </p:cNvSpPr>
+          <p:nvPr>
+            <p:ph type="sldNum" idx="5" sz="quarter"/>
+          </p:nvPr>
+        </p:nvSpPr>
+        <p:spPr/>
+      </p:sp>
+    </p:spTree>
+  </p:cSld>
+  <p:clrMapOvr>
+    <a:masterClrMapping/>
+  </p:clrMapOvr>
+</p:notes>
+</file>
+
+<file path=ppt/notesSlides/notesSlide2.xml><?xml version="1.0" encoding="utf-8"?>
+<p:notes xmlns:a="http://schemas.openxmlformats.org/drawingml/2006/main" xmlns:p="http://schemas.openxmlformats.org/presentationml/2006/main" xmlns:r="http://schemas.openxmlformats.org/officeDocument/2006/relationships">
+  <p:cSld>
+    <p:spTree>
+      <p:nvGrpSpPr>
+        <p:cNvPr id="1" name=""/>
+        <p:cNvGrpSpPr/>
+        <p:nvPr/>
+      </p:nvGrpSpPr>
+      <p:grpSpPr>
+        <a:xfrm>
+          <a:off x="0" y="0"/>
+          <a:ext cx="0" cy="0"/>
+          <a:chOff x="0" y="0"/>
+          <a:chExt cx="0" cy="0"/>
+        </a:xfrm>
+      </p:grpSpPr>
+      <p:sp>
+        <p:nvSpPr>
+          <p:cNvPr id="2" name="Slide Image Placeholder 1"/>
+          <p:cNvSpPr>
+            <a:spLocks noGrp="1"/>
+          </p:cNvSpPr>
+          <p:nvPr>
+            <p:ph type="sldImg" idx="2"/>
+          </p:nvPr>
+        </p:nvSpPr>
+        <p:spPr/>
+      </p:sp>
+      <p:sp>
+        <p:nvSpPr>
+          <p:cNvPr id="3" name="Notes Placeholder 2"/>
+          <p:cNvSpPr>
+            <a:spLocks noGrp="1"/>
+          </p:cNvSpPr>
+          <p:nvPr>
+            <p:ph type="body" idx="3" sz="quarter"/>
+          </p:nvPr>
+        </p:nvSpPr>
+        <p:spPr/>
+        <p:txBody>
+          <a:bodyPr/>
+          <a:lstStyle/>
+          <a:p>
+            <a:r>
+              <a:t>TerraEMS - ANSI/ISA-101 Verified Operational Interface</a:t>
+            </a:r>
+          </a:p>
+          <a:p>
+            <a:r>
+              <a:t>Representation: TerraEMS ANSI/ISA-101 Operational Interface &amp; Real-Time System Representation</a:t>
+            </a:r>
+          </a:p>
+          <a:p>
+            <a:r>
+              <a:t>Compliance: ANSI/ISA-101 Verified HMI</a:t>
+            </a:r>
+          </a:p>
+          <a:p>
+            <a:r>
+              <a:t>Asset File: terra_ems_isa101_showcase.jpg</a:t>
+            </a:r>
+          </a:p>
+        </p:txBody>
+      </p:sp>
+      <p:sp>
+        <p:nvSpPr>
+          <p:cNvPr id="4" name="Slide Number Placeholder 3"/>
+          <p:cNvSpPr>
+            <a:spLocks noGrp="1"/>
+          </p:cNvSpPr>
+          <p:nvPr>
+            <p:ph type="sldNum" idx="5" sz="quarter"/>
+          </p:nvPr>
+        </p:nvSpPr>
+        <p:spPr/>
+      </p:sp>
+    </p:spTree>
+  </p:cSld>
+  <p:clrMapOvr>
+    <a:masterClrMapping/>
+  </p:clrMapOvr>
+</p:notes>
+</file>
+
+<file path=ppt/notesSlides/notesSlide3.xml><?xml version="1.0" encoding="utf-8"?>
+<p:notes xmlns:a="http://schemas.openxmlformats.org/drawingml/2006/main" xmlns:p="http://schemas.openxmlformats.org/presentationml/2006/main" xmlns:r="http://schemas.openxmlformats.org/officeDocument/2006/relationships">
+  <p:cSld>
+    <p:spTree>
+      <p:nvGrpSpPr>
+        <p:cNvPr id="1" name=""/>
+        <p:cNvGrpSpPr/>
+        <p:nvPr/>
+      </p:nvGrpSpPr>
+      <p:grpSpPr>
+        <a:xfrm>
+          <a:off x="0" y="0"/>
+          <a:ext cx="0" cy="0"/>
+          <a:chOff x="0" y="0"/>
+          <a:chExt cx="0" cy="0"/>
+        </a:xfrm>
+      </p:grpSpPr>
+      <p:sp>
+        <p:nvSpPr>
+          <p:cNvPr id="2" name="Slide Image Placeholder 1"/>
+          <p:cNvSpPr>
+            <a:spLocks noGrp="1"/>
+          </p:cNvSpPr>
+          <p:nvPr>
+            <p:ph type="sldImg" idx="2"/>
+          </p:nvPr>
+        </p:nvSpPr>
+        <p:spPr/>
+      </p:sp>
+      <p:sp>
+        <p:nvSpPr>
+          <p:cNvPr id="3" name="Notes Placeholder 2"/>
+          <p:cNvSpPr>
+            <a:spLocks noGrp="1"/>
+          </p:cNvSpPr>
+          <p:nvPr>
+            <p:ph type="body" idx="3" sz="quarter"/>
+          </p:nvPr>
+        </p:nvSpPr>
+        <p:spPr/>
+        <p:txBody>
+          <a:bodyPr/>
+          <a:lstStyle/>
+          <a:p>
+            <a:r>
+              <a:t>What TerraEMS Will Do:</a:t>
+            </a:r>
+          </a:p>
+          <a:p>
+            <a:r>
+              <a:t>[1] Multifunction Meter (MFM) &amp; Harmonics Engine:</a:t>
+            </a:r>
+          </a:p>
+          <a:p>
+            <a:r>
+              <a:t>Captures fundamental parameters (kWh, voltage, current) alongside in-depth electrical harmonics analysis.</a:t>
+            </a:r>
+          </a:p>
+          <a:p/>
+          <a:p>
+            <a:r>
+              <a:t>[2] Substation Equipment Monitoring:</a:t>
+            </a:r>
+          </a:p>
+          <a:p>
+            <a:r>
+              <a:t>Monitors relays, breaker panels, switchgear, and transformers with timely alerts adhering to ISA 18.2 compliance.</a:t>
+            </a:r>
+          </a:p>
+          <a:p/>
+          <a:p>
+            <a:r>
+              <a:t>[3] Self-Learning AI Optimization:</a:t>
+            </a:r>
+          </a:p>
+          <a:p>
+            <a:r>
+              <a:t>AI models continuously learn from energy consumption patterns to adjust optimization strategies and adapt to seasonal shifts.</a:t>
+            </a:r>
+          </a:p>
+          <a:p/>
+          <a:p>
+            <a:r>
+              <a:t>[4] Mobile App &amp; Payment Gateway:</a:t>
+            </a:r>
+          </a:p>
+          <a:p>
+            <a:r>
+              <a:t>Monitor energy consumption and securely pay bills using mobile application (Android, iOS, Windows) with instant receipts.</a:t>
+            </a:r>
+          </a:p>
+        </p:txBody>
+      </p:sp>
+      <p:sp>
+        <p:nvSpPr>
+          <p:cNvPr id="4" name="Slide Number Placeholder 3"/>
+          <p:cNvSpPr>
+            <a:spLocks noGrp="1"/>
+          </p:cNvSpPr>
+          <p:nvPr>
+            <p:ph type="sldNum" idx="5" sz="quarter"/>
+          </p:nvPr>
+        </p:nvSpPr>
+        <p:spPr/>
+      </p:sp>
+    </p:spTree>
+  </p:cSld>
+  <p:clrMapOvr>
+    <a:masterClrMapping/>
+  </p:clrMapOvr>
+</p:notes>
+</file>
+
+<file path=ppt/notesSlides/notesSlide4.xml><?xml version="1.0" encoding="utf-8"?>
+<p:notes xmlns:a="http://schemas.openxmlformats.org/drawingml/2006/main" xmlns:p="http://schemas.openxmlformats.org/presentationml/2006/main" xmlns:r="http://schemas.openxmlformats.org/officeDocument/2006/relationships">
+  <p:cSld>
+    <p:spTree>
+      <p:nvGrpSpPr>
+        <p:cNvPr id="1" name=""/>
+        <p:cNvGrpSpPr/>
+        <p:nvPr/>
+      </p:nvGrpSpPr>
+      <p:grpSpPr>
+        <a:xfrm>
+          <a:off x="0" y="0"/>
+          <a:ext cx="0" cy="0"/>
+          <a:chOff x="0" y="0"/>
+          <a:chExt cx="0" cy="0"/>
+        </a:xfrm>
+      </p:grpSpPr>
+      <p:sp>
+        <p:nvSpPr>
+          <p:cNvPr id="2" name="Slide Image Placeholder 1"/>
+          <p:cNvSpPr>
+            <a:spLocks noGrp="1"/>
+          </p:cNvSpPr>
+          <p:nvPr>
+            <p:ph type="sldImg" idx="2"/>
+          </p:nvPr>
+        </p:nvSpPr>
+        <p:spPr/>
+      </p:sp>
+      <p:sp>
+        <p:nvSpPr>
+          <p:cNvPr id="3" name="Notes Placeholder 2"/>
+          <p:cNvSpPr>
+            <a:spLocks noGrp="1"/>
+          </p:cNvSpPr>
+          <p:nvPr>
+            <p:ph type="body" idx="3" sz="quarter"/>
+          </p:nvPr>
+        </p:nvSpPr>
+        <p:spPr/>
+        <p:txBody>
+          <a:bodyPr/>
+          <a:lstStyle/>
+          <a:p>
+            <a:r>
+              <a:t>TerraEMS - Operational Use Cases &amp; Field Impact:</a:t>
+            </a:r>
+          </a:p>
+          <a:p>
+            <a:r>
+              <a:t>[Efficiency] Efficiency (Airport Peak Hour Surcharge Elimination):</a:t>
+            </a:r>
+          </a:p>
+          <a:p>
+            <a:r>
+              <a:t>Demand management algorithms reduced peak hour utility surcharges, delivering direct financial savings of ₹2,40,000 (2022) and ₹3,10,000 (2023) at Airport of India.</a:t>
+            </a:r>
+          </a:p>
+          <a:p/>
+          <a:p>
+            <a:r>
+              <a:t>[QA &amp; Power Factor Penalty Avoidance] QA &amp; Power Factor Penalty Avoidance:</a:t>
+            </a:r>
+          </a:p>
+          <a:p>
+            <a:r>
+              <a:t>Real-time Power Factor alerts successfully maintained levels above 0.95, capturing PF penalty avoidance savings of ₹1,15,000 (2022) and ₹1,25,000 (2023).</a:t>
+            </a:r>
+          </a:p>
+          <a:p/>
+          <a:p>
+            <a:r>
+              <a:t>[Efficiency] Efficiency (Untraced Utility Loss Slashed in Process Plant):</a:t>
+            </a:r>
+          </a:p>
+          <a:p>
+            <a:r>
+              <a:t>Driven by automated meter visibility, untraced utility losses plummeted from 19.5% down to just 6.5%, saving ₹8,50,000 in direct utility costs in chemical manufacturing.</a:t>
+            </a:r>
+          </a:p>
+          <a:p/>
+          <a:p>
+            <a:r>
+              <a:t>[Reduced Manpower] Reduced Manpower (Automated Billing &amp; Administrative Savings):</a:t>
+            </a:r>
+          </a:p>
+          <a:p>
+            <a:r>
+              <a:t>Automating bill generation and payment processing structurally yielded cash-flow savings of ₹25,000/month (₹3,00,000 per annum) in administrative overhead.</a:t>
+            </a:r>
+          </a:p>
+          <a:p/>
+          <a:p>
+            <a:r>
+              <a:t>[Asset Protection] Asset Protection (Phase Load Imbalance &amp; Harmonics Tracking):</a:t>
+            </a:r>
+          </a:p>
+          <a:p>
+            <a:r>
+              <a:t>Identified and corrected a 12% phase load imbalance at the Localizer site, restoring transformer efficiency and protecting CNS room navigation hardware from premature electrical burnout.</a:t>
+            </a:r>
+          </a:p>
+        </p:txBody>
+      </p:sp>
+      <p:sp>
+        <p:nvSpPr>
+          <p:cNvPr id="4" name="Slide Number Placeholder 3"/>
+          <p:cNvSpPr>
+            <a:spLocks noGrp="1"/>
+          </p:cNvSpPr>
+          <p:nvPr>
+            <p:ph type="sldNum" idx="5" sz="quarter"/>
+          </p:nvPr>
+        </p:nvSpPr>
+        <p:spPr/>
+      </p:sp>
+    </p:spTree>
+  </p:cSld>
+  <p:clrMapOvr>
+    <a:masterClrMapping/>
+  </p:clrMapOvr>
+</p:notes>
+</file>
+
+<file path=ppt/notesSlides/notesSlide5.xml><?xml version="1.0" encoding="utf-8"?>
+<p:notes xmlns:a="http://schemas.openxmlformats.org/drawingml/2006/main" xmlns:p="http://schemas.openxmlformats.org/presentationml/2006/main" xmlns:r="http://schemas.openxmlformats.org/officeDocument/2006/relationships">
+  <p:cSld>
+    <p:spTree>
+      <p:nvGrpSpPr>
+        <p:cNvPr id="1" name=""/>
+        <p:cNvGrpSpPr/>
+        <p:nvPr/>
+      </p:nvGrpSpPr>
+      <p:grpSpPr>
+        <a:xfrm>
+          <a:off x="0" y="0"/>
+          <a:ext cx="0" cy="0"/>
+          <a:chOff x="0" y="0"/>
+          <a:chExt cx="0" cy="0"/>
+        </a:xfrm>
+      </p:grpSpPr>
+      <p:sp>
+        <p:nvSpPr>
+          <p:cNvPr id="2" name="Slide Image Placeholder 1"/>
+          <p:cNvSpPr>
+            <a:spLocks noGrp="1"/>
+          </p:cNvSpPr>
+          <p:nvPr>
+            <p:ph type="sldImg" idx="2"/>
+          </p:nvPr>
+        </p:nvSpPr>
+        <p:spPr/>
+      </p:sp>
+      <p:sp>
+        <p:nvSpPr>
+          <p:cNvPr id="3" name="Notes Placeholder 2"/>
+          <p:cNvSpPr>
+            <a:spLocks noGrp="1"/>
+          </p:cNvSpPr>
+          <p:nvPr>
+            <p:ph type="body" idx="3" sz="quarter"/>
+          </p:nvPr>
+        </p:nvSpPr>
+        <p:spPr/>
+        <p:txBody>
+          <a:bodyPr/>
+          <a:lstStyle/>
+          <a:p>
+            <a:r>
+              <a:t>TerraEMS - Architectural Contrast (Legacy SCADA vs Terrestrial Platform):</a:t>
+            </a:r>
+          </a:p>
+          <a:p>
+            <a:r>
+              <a:t>LEGACY:</a:t>
+            </a:r>
+          </a:p>
+          <a:p>
+            <a:r>
+              <a:t>Reviewing monthly utility bills after the money is spent; zero granular visibility into where waste occurs.</a:t>
+            </a:r>
+          </a:p>
+          <a:p/>
+          <a:p>
+            <a:r>
+              <a:t>TERRESTRIAL ADVANTAGE:</a:t>
+            </a:r>
+          </a:p>
+          <a:p>
+            <a:r>
+              <a:t>Real-time sub-metering across feeders, panels, and transformers with instant cost attribution and harmonic profiling.</a:t>
+            </a:r>
+          </a:p>
+          <a:p/>
+          <a:p>
+            <a:r>
+              <a:t>LEGACY:</a:t>
+            </a:r>
+          </a:p>
+          <a:p>
+            <a:r>
+              <a:t>Incurring heavy contract demand penalties and power factor surcharges during sudden factory or facility ramp-ups.</a:t>
+            </a:r>
+          </a:p>
+          <a:p/>
+          <a:p>
+            <a:r>
+              <a:t>TERRESTRIAL ADVANTAGE:</a:t>
+            </a:r>
+          </a:p>
+          <a:p>
+            <a:r>
+              <a:t>Continuous automated load balancing and predictive peak demand management to prevent all utility penalty conditions.</a:t>
+            </a:r>
+          </a:p>
+          <a:p/>
+          <a:p>
+            <a:r>
+              <a:t>LEGACY:</a:t>
+            </a:r>
+          </a:p>
+          <a:p>
+            <a:r>
+              <a:t>Manual meter reading and fragmented paper billing leading to delayed cash flow and billing disputes.</a:t>
+            </a:r>
+          </a:p>
+          <a:p/>
+          <a:p>
+            <a:r>
+              <a:t>TERRESTRIAL ADVANTAGE:</a:t>
+            </a:r>
+          </a:p>
+          <a:p>
+            <a:r>
+              <a:t>Integrated mobile application with in-built payment gateway, instant payment confirmations, and automated billing workflows.</a:t>
+            </a:r>
+          </a:p>
+        </p:txBody>
+      </p:sp>
+      <p:sp>
+        <p:nvSpPr>
+          <p:cNvPr id="4" name="Slide Number Placeholder 3"/>
+          <p:cNvSpPr>
+            <a:spLocks noGrp="1"/>
+          </p:cNvSpPr>
+          <p:nvPr>
+            <p:ph type="sldNum" idx="5" sz="quarter"/>
+          </p:nvPr>
+        </p:nvSpPr>
+        <p:spPr/>
+      </p:sp>
+    </p:spTree>
+  </p:cSld>
+  <p:clrMapOvr>
+    <a:masterClrMapping/>
+  </p:clrMapOvr>
+</p:notes>
+</file>
+
+<file path=ppt/notesSlides/notesSlide6.xml><?xml version="1.0" encoding="utf-8"?>
+<p:notes xmlns:a="http://schemas.openxmlformats.org/drawingml/2006/main" xmlns:p="http://schemas.openxmlformats.org/presentationml/2006/main" xmlns:r="http://schemas.openxmlformats.org/officeDocument/2006/relationships">
+  <p:cSld>
+    <p:spTree>
+      <p:nvGrpSpPr>
+        <p:cNvPr id="1" name=""/>
+        <p:cNvGrpSpPr/>
+        <p:nvPr/>
+      </p:nvGrpSpPr>
+      <p:grpSpPr>
+        <a:xfrm>
+          <a:off x="0" y="0"/>
+          <a:ext cx="0" cy="0"/>
+          <a:chOff x="0" y="0"/>
+          <a:chExt cx="0" cy="0"/>
+        </a:xfrm>
+      </p:grpSpPr>
+      <p:sp>
+        <p:nvSpPr>
+          <p:cNvPr id="2" name="Slide Image Placeholder 1"/>
+          <p:cNvSpPr>
+            <a:spLocks noGrp="1"/>
+          </p:cNvSpPr>
+          <p:nvPr>
+            <p:ph type="sldImg" idx="2"/>
+          </p:nvPr>
+        </p:nvSpPr>
+        <p:spPr/>
+      </p:sp>
+      <p:sp>
+        <p:nvSpPr>
+          <p:cNvPr id="3" name="Notes Placeholder 2"/>
+          <p:cNvSpPr>
+            <a:spLocks noGrp="1"/>
+          </p:cNvSpPr>
+          <p:nvPr>
+            <p:ph type="body" idx="3" sz="quarter"/>
+          </p:nvPr>
+        </p:nvSpPr>
+        <p:spPr/>
+        <p:txBody>
+          <a:bodyPr/>
+          <a:lstStyle/>
+          <a:p>
+            <a:r>
+              <a:t>TerraEMS - End-to-End System Diagram &amp; Data Pipeline:</a:t>
+            </a:r>
+          </a:p>
+          <a:p/>
+          <a:p>
+            <a:r>
+              <a:t>Layer 01: Multi-Feeder Power Ingestion</a:t>
+            </a:r>
+          </a:p>
+          <a:p>
+            <a:r>
+              <a:t>Sub-second electrical telemetry acquisition from smart power meters, digital protection relays, and transformer monitoring units.</a:t>
+            </a:r>
+          </a:p>
+          <a:p>
+            <a:r>
+              <a:t>Protocols: DLMS/COSEM (IEC 62056), Modbus RTU/TCP, IEC 61850 MMS</a:t>
+            </a:r>
+          </a:p>
+          <a:p/>
+          <a:p>
+            <a:r>
+              <a:t>Layer 02: High-Frequency Power Stream</a:t>
+            </a:r>
+          </a:p>
+          <a:p>
+            <a:r>
+              <a:t>Continuous 3-phase power telemetry buffering, harmonic distortion FFT computation, and sub-cycle power quality event capture.</a:t>
+            </a:r>
+          </a:p>
+          <a:p>
+            <a:r>
+              <a:t>Protocols: Power Quality Stream, Harmonic FFT Buffer, Sub-Cycle Event Bus</a:t>
+            </a:r>
+          </a:p>
+          <a:p/>
+          <a:p>
+            <a:r>
+              <a:t>Layer 03: Peak Demand Optimizer</a:t>
+            </a:r>
+          </a:p>
+          <a:p>
+            <a:r>
+              <a:t>Multi-horizon energy demand forecasting, dynamic tariff arbitrage algorithms, power factor correction, and transformer load balancing.</a:t>
+            </a:r>
+          </a:p>
+          <a:p>
+            <a:r>
+              <a:t>Protocols: Demand Forecasting, Tariff Arbitrage AI, Power Factor Optimizer</a:t>
+            </a:r>
+          </a:p>
+          <a:p/>
+          <a:p>
+            <a:r>
+              <a:t>Layer 04: Microgrid Dispatch Cockpit</a:t>
+            </a:r>
+          </a:p>
+          <a:p>
+            <a:r>
+              <a:t>Autonomous BESS battery charge/discharge dispatch, automated non-critical load shedding, and ANSI/ISA-101 energy supervisory displays.</a:t>
+            </a:r>
+          </a:p>
+          <a:p>
+            <a:r>
+              <a:t>Protocols: BESS Inverter Dispatch, Automated Load Shedding, ISA-101 Energy HMI</a:t>
+            </a:r>
+          </a:p>
+          <a:p/>
+          <a:p>
+            <a:r>
+              <a:t>Pipeline Flow:</a:t>
+            </a:r>
+          </a:p>
+          <a:p>
+            <a:r>
+              <a:t>DATA PIPELINE FLOW: 3-Phase Meter Telemetry ➔ High-Frequency Power Streaming ➔ Peak Demand &amp; Tariff Optimization ➔ Automated BESS &amp; Load Actuation</a:t>
+            </a:r>
+          </a:p>
+        </p:txBody>
+      </p:sp>
+      <p:sp>
+        <p:nvSpPr>
+          <p:cNvPr id="4" name="Slide Number Placeholder 3"/>
+          <p:cNvSpPr>
+            <a:spLocks noGrp="1"/>
+          </p:cNvSpPr>
+          <p:nvPr>
+            <p:ph type="sldNum" idx="5" sz="quarter"/>
+          </p:nvPr>
+        </p:nvSpPr>
+        <p:spPr/>
+      </p:sp>
+    </p:spTree>
+  </p:cSld>
+  <p:clrMapOvr>
+    <a:masterClrMapping/>
+  </p:clrMapOvr>
+</p:notes>
+</file>
+
+<file path=ppt/notesSlides/notesSlide7.xml><?xml version="1.0" encoding="utf-8"?>
+<p:notes xmlns:a="http://schemas.openxmlformats.org/drawingml/2006/main" xmlns:p="http://schemas.openxmlformats.org/presentationml/2006/main" xmlns:r="http://schemas.openxmlformats.org/officeDocument/2006/relationships">
+  <p:cSld>
+    <p:spTree>
+      <p:nvGrpSpPr>
+        <p:cNvPr id="1" name=""/>
+        <p:cNvGrpSpPr/>
+        <p:nvPr/>
+      </p:nvGrpSpPr>
+      <p:grpSpPr>
+        <a:xfrm>
+          <a:off x="0" y="0"/>
+          <a:ext cx="0" cy="0"/>
+          <a:chOff x="0" y="0"/>
+          <a:chExt cx="0" cy="0"/>
+        </a:xfrm>
+      </p:grpSpPr>
+      <p:sp>
+        <p:nvSpPr>
+          <p:cNvPr id="2" name="Slide Image Placeholder 1"/>
+          <p:cNvSpPr>
+            <a:spLocks noGrp="1"/>
+          </p:cNvSpPr>
+          <p:nvPr>
+            <p:ph type="sldImg" idx="2"/>
+          </p:nvPr>
+        </p:nvSpPr>
+        <p:spPr/>
+      </p:sp>
+      <p:sp>
+        <p:nvSpPr>
+          <p:cNvPr id="3" name="Notes Placeholder 2"/>
+          <p:cNvSpPr>
+            <a:spLocks noGrp="1"/>
+          </p:cNvSpPr>
+          <p:nvPr>
+            <p:ph type="body" idx="3" sz="quarter"/>
+          </p:nvPr>
+        </p:nvSpPr>
+        <p:spPr/>
+        <p:txBody>
+          <a:bodyPr/>
+          <a:lstStyle/>
+          <a:p>
+            <a:r>
+              <a:t>TerraEMS - System Integrator Deployment Framework &amp; Commercial Model:</a:t>
+            </a:r>
+          </a:p>
+          <a:p/>
+          <a:p>
+            <a:r>
+              <a:t>Phase 1: Connectivity &amp; Audit</a:t>
+            </a:r>
+          </a:p>
+          <a:p>
+            <a:r>
+              <a:t>Phase 2: Twin Calibration</a:t>
+            </a:r>
+          </a:p>
+          <a:p>
+            <a:r>
+              <a:t>Phase 3: Autonomous Go-Live</a:t>
+            </a:r>
+          </a:p>
+          <a:p/>
+          <a:p>
+            <a:r>
+              <a:t>Commercial Enablement:</a:t>
+            </a:r>
+          </a:p>
+          <a:p>
+            <a:r>
+              <a:t>- 25%-35% recurring SaaS margins</a:t>
+            </a:r>
+          </a:p>
+          <a:p>
+            <a:r>
+              <a:t>- 7-14 day rapid commissioning</a:t>
+            </a:r>
+          </a:p>
+          <a:p>
+            <a:r>
+              <a:t>- Co-selling and enterprise enablement support</a:t>
+            </a:r>
+          </a:p>
+        </p:txBody>
+      </p:sp>
+      <p:sp>
+        <p:nvSpPr>
+          <p:cNvPr id="4" name="Slide Number Placeholder 3"/>
+          <p:cNvSpPr>
+            <a:spLocks noGrp="1"/>
+          </p:cNvSpPr>
+          <p:nvPr>
+            <p:ph type="sldNum" idx="5" sz="quarter"/>
+          </p:nvPr>
+        </p:nvSpPr>
+        <p:spPr/>
+      </p:sp>
+    </p:spTree>
+  </p:cSld>
+  <p:clrMapOvr>
+    <a:masterClrMapping/>
+  </p:clrMapOvr>
+</p:notes>
 </file>
 
 <file path=ppt/slideLayouts/slideLayout1.xml><?xml version="1.0" encoding="utf-8"?>
@@ -3108,7 +4291,7 @@
             <a:avLst/>
           </a:prstGeom>
           <a:solidFill>
-            <a:srgbClr val="0A0E1A"/>
+            <a:srgbClr val="0B0F17"/>
           </a:solidFill>
           <a:ln>
             <a:noFill/>
@@ -3144,17 +4327,19 @@
         </p:nvSpPr>
         <p:spPr>
           <a:xfrm>
-            <a:off x="0" y="0"/>
-            <a:ext cx="12191695" cy="54864"/>
+            <a:off x="731520" y="365760"/>
+            <a:ext cx="10728655" cy="18288"/>
           </a:xfrm>
           <a:prstGeom prst="rect">
             <a:avLst/>
           </a:prstGeom>
           <a:solidFill>
-            <a:srgbClr val="00D4FF"/>
+            <a:srgbClr val="38BDF8"/>
           </a:solidFill>
           <a:ln>
-            <a:noFill/>
+            <a:solidFill>
+              <a:srgbClr val="38BDF8"/>
+            </a:solidFill>
           </a:ln>
         </p:spPr>
         <p:style>
@@ -3187,8 +4372,8 @@
         </p:nvSpPr>
         <p:spPr>
           <a:xfrm>
-            <a:off x="731520" y="6446520"/>
-            <a:ext cx="10698480" cy="320040"/>
+            <a:off x="731520" y="438912"/>
+            <a:ext cx="8229600" cy="274320"/>
           </a:xfrm>
           <a:prstGeom prst="rect">
             <a:avLst/>
@@ -3196,20 +4381,20 @@
           <a:noFill/>
         </p:spPr>
         <p:txBody>
-          <a:bodyPr wrap="none">
+          <a:bodyPr wrap="square" lIns="0" rIns="0" tIns="0" bIns="0">
             <a:spAutoFit/>
           </a:bodyPr>
           <a:lstStyle/>
           <a:p>
             <a:pPr>
-              <a:defRPr sz="1000">
-                <a:solidFill>
-                  <a:srgbClr val="94A3B8"/>
-                </a:solidFill>
-              </a:defRPr>
-            </a:pPr>
-            <a:r>
-              <a:t>TERRESTRIAL PLATFORM  |  TERRAEMS CATALOGUE  |  CONFIDENTIAL - AUTHORISED SYSTEM INTEGRATORS ONLY</a:t>
+              <a:defRPr sz="950" b="1">
+                <a:solidFill>
+                  <a:srgbClr val="38BDF8"/>
+                </a:solidFill>
+              </a:defRPr>
+            </a:pPr>
+            <a:r>
+              <a:t>TERRESTRIAL PLATFORM  |  TERRAEMS  |  ENTERPRISE SPECIFICATION</a:t>
             </a:r>
           </a:p>
         </p:txBody>
@@ -3222,8 +4407,8 @@
         </p:nvSpPr>
         <p:spPr>
           <a:xfrm>
-            <a:off x="731520" y="777240"/>
-            <a:ext cx="10698480" cy="3474720"/>
+            <a:off x="731520" y="731520"/>
+            <a:ext cx="9601200" cy="777240"/>
           </a:xfrm>
           <a:prstGeom prst="rect">
             <a:avLst/>
@@ -3231,104 +4416,83 @@
           <a:noFill/>
         </p:spPr>
         <p:txBody>
-          <a:bodyPr wrap="square">
+          <a:bodyPr wrap="square" lIns="0" rIns="0" tIns="0" bIns="0">
             <a:spAutoFit/>
           </a:bodyPr>
           <a:lstStyle/>
           <a:p>
             <a:pPr>
-              <a:spcAft>
-                <a:spcPts val="800"/>
-              </a:spcAft>
-              <a:defRPr sz="1250" b="1">
-                <a:solidFill>
-                  <a:srgbClr val="00D4FF"/>
-                </a:solidFill>
-              </a:defRPr>
-            </a:pPr>
-            <a:r>
-              <a:t>ENTERPRISE PRODUCT SPECIFICATION  |  VISION &amp; CLEAN ENERGY</a:t>
-            </a:r>
-          </a:p>
-          <a:p>
-            <a:pPr>
-              <a:spcAft>
-                <a:spcPts val="600"/>
-              </a:spcAft>
-              <a:defRPr sz="4600" b="1">
+              <a:defRPr sz="1900" b="1">
                 <a:solidFill>
                   <a:srgbClr val="FFFFFF"/>
                 </a:solidFill>
               </a:defRPr>
             </a:pPr>
             <a:r>
-              <a:t>TerraEMS</a:t>
-            </a:r>
-          </a:p>
-          <a:p>
-            <a:pPr>
-              <a:spcAft>
-                <a:spcPts val="1200"/>
-              </a:spcAft>
-              <a:defRPr sz="1900" b="1">
-                <a:solidFill>
-                  <a:srgbClr val="F5C842"/>
-                </a:solidFill>
-              </a:defRPr>
-            </a:pPr>
-            <a:r>
-              <a:t>Army of AI Agents Managing Entire Energy Ecosystems</a:t>
-            </a:r>
-          </a:p>
-          <a:p>
-            <a:pPr>
-              <a:spcAft>
-                <a:spcPts val="1200"/>
-              </a:spcAft>
-              <a:defRPr sz="1400">
-                <a:solidFill>
-                  <a:srgbClr val="C8D8F0"/>
-                </a:solidFill>
-              </a:defRPr>
-            </a:pPr>
-            <a:r>
-              <a:t>Industrial Protocol: DLMS/COSEM    |    Domain Architecture: Terrestrial Deterministic Edge Core</a:t>
-            </a:r>
-          </a:p>
-          <a:p>
-            <a:pPr>
-              <a:defRPr sz="1500">
+              <a:t>TerraEMS: Army of AI Agents Managing Entire Energy Ecosystems</a:t>
+            </a:r>
+          </a:p>
+          <a:p>
+            <a:pPr>
+              <a:spcBef>
+                <a:spcPts val="300"/>
+              </a:spcBef>
+              <a:defRPr sz="1050">
                 <a:solidFill>
                   <a:srgbClr val="94A3B8"/>
                 </a:solidFill>
               </a:defRPr>
             </a:pPr>
             <a:r>
-              <a:t>Army of AI Agents Managing Entire Energy Ecosystems</a:t>
-            </a:r>
-          </a:p>
-        </p:txBody>
-      </p:sp>
-      <p:sp>
-        <p:nvSpPr>
-          <p:cNvPr id="6" name="Rounded Rectangle 5"/>
+              <a:t>Autonomous Industrial Intelligence Suite · Tier-1 Plant Architecture</a:t>
+            </a:r>
+          </a:p>
+        </p:txBody>
+      </p:sp>
+      <p:pic>
+        <p:nvPicPr>
+          <p:cNvPr id="6" name="Picture 5" descr="tp_logo_white.png"/>
+          <p:cNvPicPr>
+            <a:picLocks noChangeAspect="1"/>
+          </p:cNvPicPr>
+          <p:nvPr/>
+        </p:nvPicPr>
+        <p:blipFill>
+          <a:blip r:embed="rId2"/>
+          <a:stretch>
+            <a:fillRect/>
+          </a:stretch>
+        </p:blipFill>
+        <p:spPr>
+          <a:xfrm>
+            <a:off x="10469880" y="411480"/>
+            <a:ext cx="987552" cy="384048"/>
+          </a:xfrm>
+          <a:prstGeom prst="rect">
+            <a:avLst/>
+          </a:prstGeom>
+        </p:spPr>
+      </p:pic>
+      <p:sp>
+        <p:nvSpPr>
+          <p:cNvPr id="7" name="Rounded Rectangle 6"/>
           <p:cNvSpPr/>
           <p:nvPr/>
         </p:nvSpPr>
         <p:spPr>
           <a:xfrm>
-            <a:off x="731520" y="4663440"/>
-            <a:ext cx="2523744" cy="1280160"/>
+            <a:off x="731520" y="1691640"/>
+            <a:ext cx="6217920" cy="4663440"/>
           </a:xfrm>
           <a:prstGeom prst="roundRect">
             <a:avLst/>
           </a:prstGeom>
           <a:solidFill>
-            <a:srgbClr val="0F172A"/>
+            <a:srgbClr val="131926"/>
           </a:solidFill>
-          <a:ln>
+          <a:ln w="12700">
             <a:solidFill>
-              <a:srgbClr val="1E293B"/>
+              <a:srgbClr val="28344B"/>
             </a:solidFill>
           </a:ln>
         </p:spPr>
@@ -3347,57 +4511,113 @@
           </a:fontRef>
         </p:style>
         <p:txBody>
-          <a:bodyPr rtlCol="0" anchor="ctr" wrap="square"/>
-          <a:lstStyle/>
-          <a:p>
-            <a:pPr algn="ctr">
+          <a:bodyPr rtlCol="0" anchor="ctr"/>
+          <a:lstStyle/>
+          <a:p>
+            <a:pPr algn="ctr"/>
+          </a:p>
+        </p:txBody>
+      </p:sp>
+      <p:sp>
+        <p:nvSpPr>
+          <p:cNvPr id="8" name="TextBox 7"/>
+          <p:cNvSpPr txBox="1"/>
+          <p:nvPr/>
+        </p:nvSpPr>
+        <p:spPr>
+          <a:xfrm>
+            <a:off x="960120" y="1874519"/>
+            <a:ext cx="5760720" cy="4297680"/>
+          </a:xfrm>
+          <a:prstGeom prst="rect">
+            <a:avLst/>
+          </a:prstGeom>
+          <a:noFill/>
+        </p:spPr>
+        <p:txBody>
+          <a:bodyPr wrap="square" lIns="0" rIns="0" tIns="0" bIns="0">
+            <a:spAutoFit/>
+          </a:bodyPr>
+          <a:lstStyle/>
+          <a:p>
+            <a:pPr>
+              <a:defRPr sz="1200" i="1" b="1">
+                <a:solidFill>
+                  <a:srgbClr val="38BDF8"/>
+                </a:solidFill>
+              </a:defRPr>
+            </a:pPr>
+            <a:r>
+              <a:t>““24x7 conscious AI being analyzing your energy and taking action — not static utility bills, but predictive load balancing that eliminates peak demand penalties.””</a:t>
+            </a:r>
+          </a:p>
+          <a:p>
+            <a:pPr>
+              <a:spcBef>
+                <a:spcPts val="400"/>
+              </a:spcBef>
+              <a:spcAft>
+                <a:spcPts val="1200"/>
+              </a:spcAft>
+              <a:defRPr sz="950" b="1">
+                <a:solidFill>
+                  <a:srgbClr val="94A3B8"/>
+                </a:solidFill>
+              </a:defRPr>
+            </a:pPr>
+            <a:r>
+              <a:t>— — THE OUTCOME-BASED REVOLUTION</a:t>
+            </a:r>
+          </a:p>
+          <a:p>
+            <a:pPr>
               <a:spcAft>
                 <a:spcPts val="600"/>
               </a:spcAft>
-              <a:defRPr sz="1100" b="1">
-                <a:solidFill>
-                  <a:srgbClr val="94A3B8"/>
-                </a:solidFill>
-              </a:defRPr>
-            </a:pPr>
-            <a:r>
-              <a:t>MFM CONFORMANCE</a:t>
-            </a:r>
-          </a:p>
-          <a:p>
-            <a:pPr algn="ctr">
-              <a:defRPr sz="1650" b="1">
-                <a:solidFill>
-                  <a:srgbClr val="00D4FF"/>
-                </a:solidFill>
-              </a:defRPr>
-            </a:pPr>
-            <a:r>
-              <a:t>Class 0.2S</a:t>
-            </a:r>
-          </a:p>
-        </p:txBody>
-      </p:sp>
-      <p:sp>
-        <p:nvSpPr>
-          <p:cNvPr id="7" name="Rounded Rectangle 6"/>
+              <a:defRPr sz="1050" b="1">
+                <a:solidFill>
+                  <a:srgbClr val="FFFFFF"/>
+                </a:solidFill>
+              </a:defRPr>
+            </a:pPr>
+            <a:r>
+              <a:t>EXECUTIVE OPERATIONAL SYNOPSIS</a:t>
+            </a:r>
+          </a:p>
+          <a:p>
+            <a:pPr>
+              <a:defRPr sz="1050">
+                <a:solidFill>
+                  <a:srgbClr val="F1F5F9"/>
+                </a:solidFill>
+              </a:defRPr>
+            </a:pPr>
+            <a:r>
+              <a:t>Whether managing a factory floor, a commercial complex, or an airport navigation grid, TerraEMS brings the entire energy infrastructure into one intelligent platform. Ingesting data across Modbus, DLMS, MQTT, and LoRaWAN, it combines deep harmonics analysis, predictive peak demand management, and 24/7 GenAI energy awareness.</a:t>
+            </a:r>
+          </a:p>
+        </p:txBody>
+      </p:sp>
+      <p:sp>
+        <p:nvSpPr>
+          <p:cNvPr id="9" name="Rounded Rectangle 8"/>
           <p:cNvSpPr/>
           <p:nvPr/>
         </p:nvSpPr>
         <p:spPr>
           <a:xfrm>
-            <a:off x="3456432" y="4663440"/>
-            <a:ext cx="2523744" cy="1280160"/>
+            <a:off x="7132320" y="1691640"/>
+            <a:ext cx="2084831" cy="1188720"/>
           </a:xfrm>
           <a:prstGeom prst="roundRect">
             <a:avLst/>
           </a:prstGeom>
           <a:solidFill>
-            <a:srgbClr val="0F172A"/>
+            <a:srgbClr val="131926"/>
           </a:solidFill>
-          <a:ln>
+          <a:ln w="12700">
             <a:solidFill>
-              <a:srgbClr val="1E293B"/>
+              <a:srgbClr val="38BDF8"/>
             </a:solidFill>
           </a:ln>
         </p:spPr>
@@ -3416,57 +4636,83 @@
           </a:fontRef>
         </p:style>
         <p:txBody>
-          <a:bodyPr rtlCol="0" anchor="ctr" wrap="square"/>
-          <a:lstStyle/>
-          <a:p>
-            <a:pPr algn="ctr">
-              <a:spcAft>
-                <a:spcPts val="600"/>
-              </a:spcAft>
-              <a:defRPr sz="1100" b="1">
+          <a:bodyPr rtlCol="0" anchor="ctr"/>
+          <a:lstStyle/>
+          <a:p>
+            <a:pPr algn="ctr"/>
+          </a:p>
+        </p:txBody>
+      </p:sp>
+      <p:sp>
+        <p:nvSpPr>
+          <p:cNvPr id="10" name="TextBox 9"/>
+          <p:cNvSpPr txBox="1"/>
+          <p:nvPr/>
+        </p:nvSpPr>
+        <p:spPr>
+          <a:xfrm>
+            <a:off x="7269480" y="1828800"/>
+            <a:ext cx="1810511" cy="914400"/>
+          </a:xfrm>
+          <a:prstGeom prst="rect">
+            <a:avLst/>
+          </a:prstGeom>
+          <a:noFill/>
+        </p:spPr>
+        <p:txBody>
+          <a:bodyPr wrap="square" lIns="0" rIns="0" tIns="0" bIns="0">
+            <a:spAutoFit/>
+          </a:bodyPr>
+          <a:lstStyle/>
+          <a:p>
+            <a:pPr>
+              <a:defRPr sz="850" b="1">
                 <a:solidFill>
                   <a:srgbClr val="94A3B8"/>
                 </a:solidFill>
               </a:defRPr>
             </a:pPr>
             <a:r>
-              <a:t>HARMONIC SCOPE</a:t>
-            </a:r>
-          </a:p>
-          <a:p>
-            <a:pPr algn="ctr">
-              <a:defRPr sz="1650" b="1">
-                <a:solidFill>
-                  <a:srgbClr val="00D4FF"/>
-                </a:solidFill>
-              </a:defRPr>
-            </a:pPr>
-            <a:r>
-              <a:t>Up to 63rd Order</a:t>
-            </a:r>
-          </a:p>
-        </p:txBody>
-      </p:sp>
-      <p:sp>
-        <p:nvSpPr>
-          <p:cNvPr id="8" name="Rounded Rectangle 7"/>
+              <a:t>MFM CONFORMANCE</a:t>
+            </a:r>
+          </a:p>
+          <a:p>
+            <a:pPr>
+              <a:spcBef>
+                <a:spcPts val="400"/>
+              </a:spcBef>
+              <a:defRPr sz="1400" b="1">
+                <a:solidFill>
+                  <a:srgbClr val="FFFFFF"/>
+                </a:solidFill>
+              </a:defRPr>
+            </a:pPr>
+            <a:r>
+              <a:t>Class 0.2S</a:t>
+            </a:r>
+          </a:p>
+        </p:txBody>
+      </p:sp>
+      <p:sp>
+        <p:nvSpPr>
+          <p:cNvPr id="11" name="Rounded Rectangle 10"/>
           <p:cNvSpPr/>
           <p:nvPr/>
         </p:nvSpPr>
         <p:spPr>
           <a:xfrm>
-            <a:off x="6181344" y="4663440"/>
-            <a:ext cx="2523744" cy="1280160"/>
+            <a:off x="9381743" y="1691640"/>
+            <a:ext cx="2084831" cy="1188720"/>
           </a:xfrm>
           <a:prstGeom prst="roundRect">
             <a:avLst/>
           </a:prstGeom>
           <a:solidFill>
-            <a:srgbClr val="0F172A"/>
+            <a:srgbClr val="131926"/>
           </a:solidFill>
-          <a:ln>
+          <a:ln w="12700">
             <a:solidFill>
-              <a:srgbClr val="1E293B"/>
+              <a:srgbClr val="38BDF8"/>
             </a:solidFill>
           </a:ln>
         </p:spPr>
@@ -3485,57 +4731,83 @@
           </a:fontRef>
         </p:style>
         <p:txBody>
-          <a:bodyPr rtlCol="0" anchor="ctr" wrap="square"/>
-          <a:lstStyle/>
-          <a:p>
-            <a:pPr algn="ctr">
-              <a:spcAft>
-                <a:spcPts val="600"/>
-              </a:spcAft>
-              <a:defRPr sz="1100" b="1">
+          <a:bodyPr rtlCol="0" anchor="ctr"/>
+          <a:lstStyle/>
+          <a:p>
+            <a:pPr algn="ctr"/>
+          </a:p>
+        </p:txBody>
+      </p:sp>
+      <p:sp>
+        <p:nvSpPr>
+          <p:cNvPr id="12" name="TextBox 11"/>
+          <p:cNvSpPr txBox="1"/>
+          <p:nvPr/>
+        </p:nvSpPr>
+        <p:spPr>
+          <a:xfrm>
+            <a:off x="9518903" y="1828800"/>
+            <a:ext cx="1810511" cy="914400"/>
+          </a:xfrm>
+          <a:prstGeom prst="rect">
+            <a:avLst/>
+          </a:prstGeom>
+          <a:noFill/>
+        </p:spPr>
+        <p:txBody>
+          <a:bodyPr wrap="square" lIns="0" rIns="0" tIns="0" bIns="0">
+            <a:spAutoFit/>
+          </a:bodyPr>
+          <a:lstStyle/>
+          <a:p>
+            <a:pPr>
+              <a:defRPr sz="850" b="1">
                 <a:solidFill>
                   <a:srgbClr val="94A3B8"/>
                 </a:solidFill>
               </a:defRPr>
             </a:pPr>
             <a:r>
-              <a:t>SLD ACCURACY</a:t>
-            </a:r>
-          </a:p>
-          <a:p>
-            <a:pPr algn="ctr">
-              <a:defRPr sz="1650" b="1">
-                <a:solidFill>
-                  <a:srgbClr val="00D4FF"/>
-                </a:solidFill>
-              </a:defRPr>
-            </a:pPr>
-            <a:r>
-              <a:t>99.8% Nominal</a:t>
-            </a:r>
-          </a:p>
-        </p:txBody>
-      </p:sp>
-      <p:sp>
-        <p:nvSpPr>
-          <p:cNvPr id="9" name="Rounded Rectangle 8"/>
+              <a:t>HARMONIC SCOPE</a:t>
+            </a:r>
+          </a:p>
+          <a:p>
+            <a:pPr>
+              <a:spcBef>
+                <a:spcPts val="400"/>
+              </a:spcBef>
+              <a:defRPr sz="1400" b="1">
+                <a:solidFill>
+                  <a:srgbClr val="FFFFFF"/>
+                </a:solidFill>
+              </a:defRPr>
+            </a:pPr>
+            <a:r>
+              <a:t>Up to 63rd Order</a:t>
+            </a:r>
+          </a:p>
+        </p:txBody>
+      </p:sp>
+      <p:sp>
+        <p:nvSpPr>
+          <p:cNvPr id="13" name="Rounded Rectangle 12"/>
           <p:cNvSpPr/>
           <p:nvPr/>
         </p:nvSpPr>
         <p:spPr>
           <a:xfrm>
-            <a:off x="8906256" y="4663440"/>
-            <a:ext cx="2523744" cy="1280160"/>
+            <a:off x="7132320" y="3044952"/>
+            <a:ext cx="2084831" cy="1188720"/>
           </a:xfrm>
           <a:prstGeom prst="roundRect">
             <a:avLst/>
           </a:prstGeom>
           <a:solidFill>
-            <a:srgbClr val="0F172A"/>
+            <a:srgbClr val="131926"/>
           </a:solidFill>
-          <a:ln>
+          <a:ln w="12700">
             <a:solidFill>
-              <a:srgbClr val="1E293B"/>
+              <a:srgbClr val="38BDF8"/>
             </a:solidFill>
           </a:ln>
         </p:spPr>
@@ -3554,33 +4826,264 @@
           </a:fontRef>
         </p:style>
         <p:txBody>
-          <a:bodyPr rtlCol="0" anchor="ctr" wrap="square"/>
-          <a:lstStyle/>
-          <a:p>
-            <a:pPr algn="ctr">
-              <a:spcAft>
-                <a:spcPts val="600"/>
-              </a:spcAft>
+          <a:bodyPr rtlCol="0" anchor="ctr"/>
+          <a:lstStyle/>
+          <a:p>
+            <a:pPr algn="ctr"/>
+          </a:p>
+        </p:txBody>
+      </p:sp>
+      <p:sp>
+        <p:nvSpPr>
+          <p:cNvPr id="14" name="TextBox 13"/>
+          <p:cNvSpPr txBox="1"/>
+          <p:nvPr/>
+        </p:nvSpPr>
+        <p:spPr>
+          <a:xfrm>
+            <a:off x="7269480" y="3182112"/>
+            <a:ext cx="1810511" cy="914400"/>
+          </a:xfrm>
+          <a:prstGeom prst="rect">
+            <a:avLst/>
+          </a:prstGeom>
+          <a:noFill/>
+        </p:spPr>
+        <p:txBody>
+          <a:bodyPr wrap="square" lIns="0" rIns="0" tIns="0" bIns="0">
+            <a:spAutoFit/>
+          </a:bodyPr>
+          <a:lstStyle/>
+          <a:p>
+            <a:pPr>
+              <a:defRPr sz="850" b="1">
+                <a:solidFill>
+                  <a:srgbClr val="94A3B8"/>
+                </a:solidFill>
+              </a:defRPr>
+            </a:pPr>
+            <a:r>
+              <a:t>SLD ACCURACY</a:t>
+            </a:r>
+          </a:p>
+          <a:p>
+            <a:pPr>
+              <a:spcBef>
+                <a:spcPts val="400"/>
+              </a:spcBef>
+              <a:defRPr sz="1400" b="1">
+                <a:solidFill>
+                  <a:srgbClr val="34D399"/>
+                </a:solidFill>
+              </a:defRPr>
+            </a:pPr>
+            <a:r>
+              <a:t>99.8% Nominal</a:t>
+            </a:r>
+          </a:p>
+        </p:txBody>
+      </p:sp>
+      <p:sp>
+        <p:nvSpPr>
+          <p:cNvPr id="15" name="Rounded Rectangle 14"/>
+          <p:cNvSpPr/>
+          <p:nvPr/>
+        </p:nvSpPr>
+        <p:spPr>
+          <a:xfrm>
+            <a:off x="9381743" y="3044952"/>
+            <a:ext cx="2084831" cy="1188720"/>
+          </a:xfrm>
+          <a:prstGeom prst="roundRect">
+            <a:avLst/>
+          </a:prstGeom>
+          <a:solidFill>
+            <a:srgbClr val="131926"/>
+          </a:solidFill>
+          <a:ln w="12700">
+            <a:solidFill>
+              <a:srgbClr val="38BDF8"/>
+            </a:solidFill>
+          </a:ln>
+        </p:spPr>
+        <p:style>
+          <a:lnRef idx="1">
+            <a:schemeClr val="accent1"/>
+          </a:lnRef>
+          <a:fillRef idx="3">
+            <a:schemeClr val="accent1"/>
+          </a:fillRef>
+          <a:effectRef idx="2">
+            <a:schemeClr val="accent1"/>
+          </a:effectRef>
+          <a:fontRef idx="minor">
+            <a:schemeClr val="lt1"/>
+          </a:fontRef>
+        </p:style>
+        <p:txBody>
+          <a:bodyPr rtlCol="0" anchor="ctr"/>
+          <a:lstStyle/>
+          <a:p>
+            <a:pPr algn="ctr"/>
+          </a:p>
+        </p:txBody>
+      </p:sp>
+      <p:sp>
+        <p:nvSpPr>
+          <p:cNvPr id="16" name="TextBox 15"/>
+          <p:cNvSpPr txBox="1"/>
+          <p:nvPr/>
+        </p:nvSpPr>
+        <p:spPr>
+          <a:xfrm>
+            <a:off x="9518903" y="3182112"/>
+            <a:ext cx="1810511" cy="914400"/>
+          </a:xfrm>
+          <a:prstGeom prst="rect">
+            <a:avLst/>
+          </a:prstGeom>
+          <a:noFill/>
+        </p:spPr>
+        <p:txBody>
+          <a:bodyPr wrap="square" lIns="0" rIns="0" tIns="0" bIns="0">
+            <a:spAutoFit/>
+          </a:bodyPr>
+          <a:lstStyle/>
+          <a:p>
+            <a:pPr>
+              <a:defRPr sz="850" b="1">
+                <a:solidFill>
+                  <a:srgbClr val="94A3B8"/>
+                </a:solidFill>
+              </a:defRPr>
+            </a:pPr>
+            <a:r>
+              <a:t>BILLING CYCLE</a:t>
+            </a:r>
+          </a:p>
+          <a:p>
+            <a:pPr>
+              <a:spcBef>
+                <a:spcPts val="400"/>
+              </a:spcBef>
+              <a:defRPr sz="1400" b="1">
+                <a:solidFill>
+                  <a:srgbClr val="FFFFFF"/>
+                </a:solidFill>
+              </a:defRPr>
+            </a:pPr>
+            <a:r>
+              <a:t>15-Min Block Sync</a:t>
+            </a:r>
+          </a:p>
+        </p:txBody>
+      </p:sp>
+      <p:sp>
+        <p:nvSpPr>
+          <p:cNvPr id="17" name="Rounded Rectangle 16"/>
+          <p:cNvSpPr/>
+          <p:nvPr/>
+        </p:nvSpPr>
+        <p:spPr>
+          <a:xfrm>
+            <a:off x="7132320" y="4434840"/>
+            <a:ext cx="4334256" cy="1920240"/>
+          </a:xfrm>
+          <a:prstGeom prst="roundRect">
+            <a:avLst/>
+          </a:prstGeom>
+          <a:solidFill>
+            <a:srgbClr val="131926"/>
+          </a:solidFill>
+          <a:ln w="12700">
+            <a:solidFill>
+              <a:srgbClr val="28344B"/>
+            </a:solidFill>
+          </a:ln>
+        </p:spPr>
+        <p:style>
+          <a:lnRef idx="1">
+            <a:schemeClr val="accent1"/>
+          </a:lnRef>
+          <a:fillRef idx="3">
+            <a:schemeClr val="accent1"/>
+          </a:fillRef>
+          <a:effectRef idx="2">
+            <a:schemeClr val="accent1"/>
+          </a:effectRef>
+          <a:fontRef idx="minor">
+            <a:schemeClr val="lt1"/>
+          </a:fontRef>
+        </p:style>
+        <p:txBody>
+          <a:bodyPr rtlCol="0" anchor="ctr"/>
+          <a:lstStyle/>
+          <a:p>
+            <a:pPr algn="ctr"/>
+          </a:p>
+        </p:txBody>
+      </p:sp>
+      <p:sp>
+        <p:nvSpPr>
+          <p:cNvPr id="18" name="TextBox 17"/>
+          <p:cNvSpPr txBox="1"/>
+          <p:nvPr/>
+        </p:nvSpPr>
+        <p:spPr>
+          <a:xfrm>
+            <a:off x="7360920" y="4617720"/>
+            <a:ext cx="3840480" cy="1554480"/>
+          </a:xfrm>
+          <a:prstGeom prst="rect">
+            <a:avLst/>
+          </a:prstGeom>
+          <a:noFill/>
+        </p:spPr>
+        <p:txBody>
+          <a:bodyPr wrap="square" lIns="0" rIns="0" tIns="0" bIns="0">
+            <a:spAutoFit/>
+          </a:bodyPr>
+          <a:lstStyle/>
+          <a:p>
+            <a:pPr>
+              <a:defRPr sz="950" b="1">
+                <a:solidFill>
+                  <a:srgbClr val="38BDF8"/>
+                </a:solidFill>
+              </a:defRPr>
+            </a:pPr>
+            <a:r>
+              <a:t>TERRESTRIAL PLATFORM CORE</a:t>
+            </a:r>
+          </a:p>
+          <a:p>
+            <a:pPr>
+              <a:spcBef>
+                <a:spcPts val="200"/>
+              </a:spcBef>
               <a:defRPr sz="1100" b="1">
                 <a:solidFill>
+                  <a:srgbClr val="FFFFFF"/>
+                </a:solidFill>
+              </a:defRPr>
+            </a:pPr>
+            <a:r>
+              <a:t>Edge-to-Cloud Cognitive Nervous System</a:t>
+            </a:r>
+          </a:p>
+          <a:p>
+            <a:pPr>
+              <a:spcBef>
+                <a:spcPts val="400"/>
+              </a:spcBef>
+              <a:defRPr sz="900">
+                <a:solidFill>
                   <a:srgbClr val="94A3B8"/>
                 </a:solidFill>
               </a:defRPr>
             </a:pPr>
             <a:r>
-              <a:t>BILLING CYCLE</a:t>
-            </a:r>
-          </a:p>
-          <a:p>
-            <a:pPr algn="ctr">
-              <a:defRPr sz="1650" b="1">
-                <a:solidFill>
-                  <a:srgbClr val="00D4FF"/>
-                </a:solidFill>
-              </a:defRPr>
-            </a:pPr>
-            <a:r>
-              <a:t>15-Min Block Sync</a:t>
+              <a:t>Physics-informed mathematical twin running sub-25ms closed-loop supervisory control with full ISA-95/101 conformity.</a:t>
             </a:r>
           </a:p>
         </p:txBody>
@@ -3618,7 +5121,7 @@
             <a:avLst/>
           </a:prstGeom>
           <a:solidFill>
-            <a:srgbClr val="0A0E1A"/>
+            <a:srgbClr val="0B0F17"/>
           </a:solidFill>
           <a:ln>
             <a:noFill/>
@@ -3654,17 +5157,19 @@
         </p:nvSpPr>
         <p:spPr>
           <a:xfrm>
-            <a:off x="0" y="0"/>
-            <a:ext cx="12191695" cy="54864"/>
+            <a:off x="731520" y="365760"/>
+            <a:ext cx="10728655" cy="18288"/>
           </a:xfrm>
           <a:prstGeom prst="rect">
             <a:avLst/>
           </a:prstGeom>
           <a:solidFill>
-            <a:srgbClr val="00D4FF"/>
+            <a:srgbClr val="38BDF8"/>
           </a:solidFill>
           <a:ln>
-            <a:noFill/>
+            <a:solidFill>
+              <a:srgbClr val="38BDF8"/>
+            </a:solidFill>
           </a:ln>
         </p:spPr>
         <p:style>
@@ -3697,8 +5202,8 @@
         </p:nvSpPr>
         <p:spPr>
           <a:xfrm>
-            <a:off x="731520" y="365760"/>
-            <a:ext cx="10698480" cy="1005840"/>
+            <a:off x="731520" y="438912"/>
+            <a:ext cx="8229600" cy="274320"/>
           </a:xfrm>
           <a:prstGeom prst="rect">
             <a:avLst/>
@@ -3706,35 +5211,20 @@
           <a:noFill/>
         </p:spPr>
         <p:txBody>
-          <a:bodyPr wrap="square">
+          <a:bodyPr wrap="square" lIns="0" rIns="0" tIns="0" bIns="0">
             <a:spAutoFit/>
           </a:bodyPr>
           <a:lstStyle/>
           <a:p>
             <a:pPr>
-              <a:spcAft>
-                <a:spcPts val="400"/>
-              </a:spcAft>
-              <a:defRPr sz="1150" b="1">
-                <a:solidFill>
-                  <a:srgbClr val="00D4FF"/>
-                </a:solidFill>
-              </a:defRPr>
-            </a:pPr>
-            <a:r>
-              <a:t>TERRAEMS  |  TERRESTRIAL PLATFORM</a:t>
-            </a:r>
-          </a:p>
-          <a:p>
-            <a:pPr>
-              <a:defRPr sz="2500" b="1">
-                <a:solidFill>
-                  <a:srgbClr val="FFFFFF"/>
-                </a:solidFill>
-              </a:defRPr>
-            </a:pPr>
-            <a:r>
-              <a:t>Core Functional Deliverables &amp; Architectural Pillars</a:t>
+              <a:defRPr sz="950" b="1">
+                <a:solidFill>
+                  <a:srgbClr val="38BDF8"/>
+                </a:solidFill>
+              </a:defRPr>
+            </a:pPr>
+            <a:r>
+              <a:t>TERRESTRIAL PLATFORM  |  TERRAEMS  |  OPERATIONAL INTERFACE</a:t>
             </a:r>
           </a:p>
         </p:txBody>
@@ -3747,8 +5237,8 @@
         </p:nvSpPr>
         <p:spPr>
           <a:xfrm>
-            <a:off x="731520" y="6446520"/>
-            <a:ext cx="10698480" cy="320040"/>
+            <a:off x="731520" y="731520"/>
+            <a:ext cx="9601200" cy="777240"/>
           </a:xfrm>
           <a:prstGeom prst="rect">
             <a:avLst/>
@@ -3756,44 +5246,83 @@
           <a:noFill/>
         </p:spPr>
         <p:txBody>
-          <a:bodyPr wrap="none">
+          <a:bodyPr wrap="square" lIns="0" rIns="0" tIns="0" bIns="0">
             <a:spAutoFit/>
           </a:bodyPr>
           <a:lstStyle/>
           <a:p>
             <a:pPr>
-              <a:defRPr sz="1000">
+              <a:defRPr sz="1900" b="1">
+                <a:solidFill>
+                  <a:srgbClr val="FFFFFF"/>
+                </a:solidFill>
+              </a:defRPr>
+            </a:pPr>
+            <a:r>
+              <a:t>TerraEMS ANSI/ISA-101 Operational Interface &amp; Real-Time System Representation</a:t>
+            </a:r>
+          </a:p>
+          <a:p>
+            <a:pPr>
+              <a:spcBef>
+                <a:spcPts val="300"/>
+              </a:spcBef>
+              <a:defRPr sz="1050">
                 <a:solidFill>
                   <a:srgbClr val="94A3B8"/>
                 </a:solidFill>
               </a:defRPr>
             </a:pPr>
             <a:r>
-              <a:t>TERRESTRIAL PLATFORM  |  TERRAEMS CATALOGUE  |  CONFIDENTIAL - AUTHORISED SYSTEM INTEGRATORS ONLY</a:t>
-            </a:r>
-          </a:p>
-        </p:txBody>
-      </p:sp>
-      <p:sp>
-        <p:nvSpPr>
-          <p:cNvPr id="6" name="Rounded Rectangle 5"/>
+              <a:t>ANSI/ISA-101 Ergonomic High-Performance HMI · Real-Time System Representation</a:t>
+            </a:r>
+          </a:p>
+        </p:txBody>
+      </p:sp>
+      <p:pic>
+        <p:nvPicPr>
+          <p:cNvPr id="6" name="Picture 5" descr="tp_logo_white.png"/>
+          <p:cNvPicPr>
+            <a:picLocks noChangeAspect="1"/>
+          </p:cNvPicPr>
+          <p:nvPr/>
+        </p:nvPicPr>
+        <p:blipFill>
+          <a:blip r:embed="rId2"/>
+          <a:stretch>
+            <a:fillRect/>
+          </a:stretch>
+        </p:blipFill>
+        <p:spPr>
+          <a:xfrm>
+            <a:off x="10469880" y="411480"/>
+            <a:ext cx="987552" cy="384048"/>
+          </a:xfrm>
+          <a:prstGeom prst="rect">
+            <a:avLst/>
+          </a:prstGeom>
+        </p:spPr>
+      </p:pic>
+      <p:sp>
+        <p:nvSpPr>
+          <p:cNvPr id="7" name="Rounded Rectangle 6"/>
           <p:cNvSpPr/>
           <p:nvPr/>
         </p:nvSpPr>
         <p:spPr>
           <a:xfrm>
             <a:off x="731520" y="1645920"/>
-            <a:ext cx="5212080" cy="2148840"/>
+            <a:ext cx="10728655" cy="4709160"/>
           </a:xfrm>
           <a:prstGeom prst="roundRect">
             <a:avLst/>
           </a:prstGeom>
           <a:solidFill>
-            <a:srgbClr val="0F172A"/>
+            <a:srgbClr val="131926"/>
           </a:solidFill>
-          <a:ln>
+          <a:ln w="12700">
             <a:solidFill>
-              <a:srgbClr val="1E293B"/>
+              <a:srgbClr val="38BDF8"/>
             </a:solidFill>
           </a:ln>
         </p:spPr>
@@ -3812,304 +5341,37 @@
           </a:fontRef>
         </p:style>
         <p:txBody>
-          <a:bodyPr rtlCol="0" anchor="ctr" wrap="square"/>
-          <a:lstStyle/>
-          <a:p>
-            <a:pPr algn="ctr">
-              <a:spcAft>
-                <a:spcPts val="400"/>
-              </a:spcAft>
-              <a:defRPr sz="1100" b="1">
-                <a:solidFill>
-                  <a:srgbClr val="00D4FF"/>
-                </a:solidFill>
-              </a:defRPr>
-            </a:pPr>
-            <a:r>
-              <a:t>PILLAR 01</a:t>
-            </a:r>
-          </a:p>
-          <a:p>
-            <a:pPr>
-              <a:spcAft>
-                <a:spcPts val="600"/>
-              </a:spcAft>
-              <a:defRPr sz="1650" b="1">
-                <a:solidFill>
-                  <a:srgbClr val="FFFFFF"/>
-                </a:solidFill>
-              </a:defRPr>
-            </a:pPr>
-            <a:r>
-              <a:t>Multifunction Meter (MFM) &amp; Harmonics Engine</a:t>
-            </a:r>
-          </a:p>
-          <a:p>
-            <a:pPr>
-              <a:defRPr sz="1300">
-                <a:solidFill>
-                  <a:srgbClr val="C8D8F0"/>
-                </a:solidFill>
-              </a:defRPr>
-            </a:pPr>
-            <a:r>
-              <a:t>Captures fundamental parameters (kWh, voltage, current) alongside in-depth electrical harmonics analysis.</a:t>
-            </a:r>
-          </a:p>
-        </p:txBody>
-      </p:sp>
-      <p:sp>
-        <p:nvSpPr>
-          <p:cNvPr id="7" name="Rounded Rectangle 6"/>
-          <p:cNvSpPr/>
-          <p:nvPr/>
-        </p:nvSpPr>
-        <p:spPr>
-          <a:xfrm>
-            <a:off x="6217920" y="1645920"/>
-            <a:ext cx="5212080" cy="2148840"/>
-          </a:xfrm>
-          <a:prstGeom prst="roundRect">
-            <a:avLst/>
-          </a:prstGeom>
-          <a:solidFill>
-            <a:srgbClr val="0F172A"/>
-          </a:solidFill>
-          <a:ln>
-            <a:solidFill>
-              <a:srgbClr val="1E293B"/>
-            </a:solidFill>
-          </a:ln>
-        </p:spPr>
-        <p:style>
-          <a:lnRef idx="1">
-            <a:schemeClr val="accent1"/>
-          </a:lnRef>
-          <a:fillRef idx="3">
-            <a:schemeClr val="accent1"/>
-          </a:fillRef>
-          <a:effectRef idx="2">
-            <a:schemeClr val="accent1"/>
-          </a:effectRef>
-          <a:fontRef idx="minor">
-            <a:schemeClr val="lt1"/>
-          </a:fontRef>
-        </p:style>
-        <p:txBody>
-          <a:bodyPr rtlCol="0" anchor="ctr" wrap="square"/>
-          <a:lstStyle/>
-          <a:p>
-            <a:pPr algn="ctr">
-              <a:spcAft>
-                <a:spcPts val="400"/>
-              </a:spcAft>
-              <a:defRPr sz="1100" b="1">
-                <a:solidFill>
-                  <a:srgbClr val="00D4FF"/>
-                </a:solidFill>
-              </a:defRPr>
-            </a:pPr>
-            <a:r>
-              <a:t>PILLAR 02</a:t>
-            </a:r>
-          </a:p>
-          <a:p>
-            <a:pPr>
-              <a:spcAft>
-                <a:spcPts val="600"/>
-              </a:spcAft>
-              <a:defRPr sz="1650" b="1">
-                <a:solidFill>
-                  <a:srgbClr val="FFFFFF"/>
-                </a:solidFill>
-              </a:defRPr>
-            </a:pPr>
-            <a:r>
-              <a:t>Substation Equipment Monitoring</a:t>
-            </a:r>
-          </a:p>
-          <a:p>
-            <a:pPr>
-              <a:defRPr sz="1300">
-                <a:solidFill>
-                  <a:srgbClr val="C8D8F0"/>
-                </a:solidFill>
-              </a:defRPr>
-            </a:pPr>
-            <a:r>
-              <a:t>Monitors relays, breaker panels, switchgear, and transformers with timely alerts adhering to ISA 18.2 compliance.</a:t>
-            </a:r>
-          </a:p>
-        </p:txBody>
-      </p:sp>
-      <p:sp>
-        <p:nvSpPr>
-          <p:cNvPr id="8" name="Rounded Rectangle 7"/>
-          <p:cNvSpPr/>
-          <p:nvPr/>
-        </p:nvSpPr>
-        <p:spPr>
-          <a:xfrm>
-            <a:off x="731520" y="4069080"/>
-            <a:ext cx="5212080" cy="2148840"/>
-          </a:xfrm>
-          <a:prstGeom prst="roundRect">
-            <a:avLst/>
-          </a:prstGeom>
-          <a:solidFill>
-            <a:srgbClr val="0F172A"/>
-          </a:solidFill>
-          <a:ln>
-            <a:solidFill>
-              <a:srgbClr val="1E293B"/>
-            </a:solidFill>
-          </a:ln>
-        </p:spPr>
-        <p:style>
-          <a:lnRef idx="1">
-            <a:schemeClr val="accent1"/>
-          </a:lnRef>
-          <a:fillRef idx="3">
-            <a:schemeClr val="accent1"/>
-          </a:fillRef>
-          <a:effectRef idx="2">
-            <a:schemeClr val="accent1"/>
-          </a:effectRef>
-          <a:fontRef idx="minor">
-            <a:schemeClr val="lt1"/>
-          </a:fontRef>
-        </p:style>
-        <p:txBody>
-          <a:bodyPr rtlCol="0" anchor="ctr" wrap="square"/>
-          <a:lstStyle/>
-          <a:p>
-            <a:pPr algn="ctr">
-              <a:spcAft>
-                <a:spcPts val="400"/>
-              </a:spcAft>
-              <a:defRPr sz="1100" b="1">
-                <a:solidFill>
-                  <a:srgbClr val="00D4FF"/>
-                </a:solidFill>
-              </a:defRPr>
-            </a:pPr>
-            <a:r>
-              <a:t>PILLAR 03</a:t>
-            </a:r>
-          </a:p>
-          <a:p>
-            <a:pPr>
-              <a:spcAft>
-                <a:spcPts val="600"/>
-              </a:spcAft>
-              <a:defRPr sz="1650" b="1">
-                <a:solidFill>
-                  <a:srgbClr val="FFFFFF"/>
-                </a:solidFill>
-              </a:defRPr>
-            </a:pPr>
-            <a:r>
-              <a:t>Self-Learning AI Optimization</a:t>
-            </a:r>
-          </a:p>
-          <a:p>
-            <a:pPr>
-              <a:defRPr sz="1300">
-                <a:solidFill>
-                  <a:srgbClr val="C8D8F0"/>
-                </a:solidFill>
-              </a:defRPr>
-            </a:pPr>
-            <a:r>
-              <a:t>AI models continuously learn from energy consumption patterns to adjust optimization strategies and adapt to seasonal shifts.</a:t>
-            </a:r>
-          </a:p>
-        </p:txBody>
-      </p:sp>
-      <p:sp>
-        <p:nvSpPr>
-          <p:cNvPr id="9" name="Rounded Rectangle 8"/>
-          <p:cNvSpPr/>
-          <p:nvPr/>
-        </p:nvSpPr>
-        <p:spPr>
-          <a:xfrm>
-            <a:off x="6217920" y="4069080"/>
-            <a:ext cx="5212080" cy="2148840"/>
-          </a:xfrm>
-          <a:prstGeom prst="roundRect">
-            <a:avLst/>
-          </a:prstGeom>
-          <a:solidFill>
-            <a:srgbClr val="0F172A"/>
-          </a:solidFill>
-          <a:ln>
-            <a:solidFill>
-              <a:srgbClr val="1E293B"/>
-            </a:solidFill>
-          </a:ln>
-        </p:spPr>
-        <p:style>
-          <a:lnRef idx="1">
-            <a:schemeClr val="accent1"/>
-          </a:lnRef>
-          <a:fillRef idx="3">
-            <a:schemeClr val="accent1"/>
-          </a:fillRef>
-          <a:effectRef idx="2">
-            <a:schemeClr val="accent1"/>
-          </a:effectRef>
-          <a:fontRef idx="minor">
-            <a:schemeClr val="lt1"/>
-          </a:fontRef>
-        </p:style>
-        <p:txBody>
-          <a:bodyPr rtlCol="0" anchor="ctr" wrap="square"/>
-          <a:lstStyle/>
-          <a:p>
-            <a:pPr algn="ctr">
-              <a:spcAft>
-                <a:spcPts val="400"/>
-              </a:spcAft>
-              <a:defRPr sz="1100" b="1">
-                <a:solidFill>
-                  <a:srgbClr val="00D4FF"/>
-                </a:solidFill>
-              </a:defRPr>
-            </a:pPr>
-            <a:r>
-              <a:t>PILLAR 04</a:t>
-            </a:r>
-          </a:p>
-          <a:p>
-            <a:pPr>
-              <a:spcAft>
-                <a:spcPts val="600"/>
-              </a:spcAft>
-              <a:defRPr sz="1650" b="1">
-                <a:solidFill>
-                  <a:srgbClr val="FFFFFF"/>
-                </a:solidFill>
-              </a:defRPr>
-            </a:pPr>
-            <a:r>
-              <a:t>Mobile App &amp; Payment Gateway</a:t>
-            </a:r>
-          </a:p>
-          <a:p>
-            <a:pPr>
-              <a:defRPr sz="1300">
-                <a:solidFill>
-                  <a:srgbClr val="C8D8F0"/>
-                </a:solidFill>
-              </a:defRPr>
-            </a:pPr>
-            <a:r>
-              <a:t>Monitor energy consumption and securely pay bills using mobile application (Android, iOS, Windows) with instant receipts.</a:t>
-            </a:r>
-          </a:p>
-        </p:txBody>
-      </p:sp>
+          <a:bodyPr rtlCol="0" anchor="ctr"/>
+          <a:lstStyle/>
+          <a:p>
+            <a:pPr algn="ctr"/>
+          </a:p>
+        </p:txBody>
+      </p:sp>
+      <p:pic>
+        <p:nvPicPr>
+          <p:cNvPr id="8" name="Picture 7" descr="terra_ems_isa101_showcase.jpg"/>
+          <p:cNvPicPr>
+            <a:picLocks noChangeAspect="1"/>
+          </p:cNvPicPr>
+          <p:nvPr/>
+        </p:nvPicPr>
+        <p:blipFill>
+          <a:blip r:embed="rId3"/>
+          <a:stretch>
+            <a:fillRect/>
+          </a:stretch>
+        </p:blipFill>
+        <p:spPr>
+          <a:xfrm>
+            <a:off x="777240" y="1691640"/>
+            <a:ext cx="10637215" cy="4617720"/>
+          </a:xfrm>
+          <a:prstGeom prst="rect">
+            <a:avLst/>
+          </a:prstGeom>
+        </p:spPr>
+      </p:pic>
     </p:spTree>
   </p:cSld>
   <p:clrMapOvr>
@@ -4143,7 +5405,7 @@
             <a:avLst/>
           </a:prstGeom>
           <a:solidFill>
-            <a:srgbClr val="0A0E1A"/>
+            <a:srgbClr val="0B0F17"/>
           </a:solidFill>
           <a:ln>
             <a:noFill/>
@@ -4179,17 +5441,19 @@
         </p:nvSpPr>
         <p:spPr>
           <a:xfrm>
-            <a:off x="0" y="0"/>
-            <a:ext cx="12191695" cy="54864"/>
+            <a:off x="731520" y="365760"/>
+            <a:ext cx="10728655" cy="18288"/>
           </a:xfrm>
           <a:prstGeom prst="rect">
             <a:avLst/>
           </a:prstGeom>
           <a:solidFill>
-            <a:srgbClr val="00D4FF"/>
+            <a:srgbClr val="38BDF8"/>
           </a:solidFill>
           <a:ln>
-            <a:noFill/>
+            <a:solidFill>
+              <a:srgbClr val="38BDF8"/>
+            </a:solidFill>
           </a:ln>
         </p:spPr>
         <p:style>
@@ -4222,8 +5486,8 @@
         </p:nvSpPr>
         <p:spPr>
           <a:xfrm>
-            <a:off x="731520" y="365760"/>
-            <a:ext cx="10698480" cy="1005840"/>
+            <a:off x="731520" y="438912"/>
+            <a:ext cx="8229600" cy="274320"/>
           </a:xfrm>
           <a:prstGeom prst="rect">
             <a:avLst/>
@@ -4231,35 +5495,20 @@
           <a:noFill/>
         </p:spPr>
         <p:txBody>
-          <a:bodyPr wrap="square">
+          <a:bodyPr wrap="square" lIns="0" rIns="0" tIns="0" bIns="0">
             <a:spAutoFit/>
           </a:bodyPr>
           <a:lstStyle/>
           <a:p>
             <a:pPr>
-              <a:spcAft>
-                <a:spcPts val="400"/>
-              </a:spcAft>
-              <a:defRPr sz="1150" b="1">
-                <a:solidFill>
-                  <a:srgbClr val="00D4FF"/>
-                </a:solidFill>
-              </a:defRPr>
-            </a:pPr>
-            <a:r>
-              <a:t>TERRAEMS  |  TERRESTRIAL PLATFORM</a:t>
-            </a:r>
-          </a:p>
-          <a:p>
-            <a:pPr>
-              <a:defRPr sz="2500" b="1">
-                <a:solidFill>
-                  <a:srgbClr val="FFFFFF"/>
-                </a:solidFill>
-              </a:defRPr>
-            </a:pPr>
-            <a:r>
-              <a:t>Field-Validated Operational Use Cases &amp; Quantifiable ROI</a:t>
+              <a:defRPr sz="950" b="1">
+                <a:solidFill>
+                  <a:srgbClr val="38BDF8"/>
+                </a:solidFill>
+              </a:defRPr>
+            </a:pPr>
+            <a:r>
+              <a:t>TERRESTRIAL PLATFORM  |  TERRAEMS  |  CORE CAPABILITIES</a:t>
             </a:r>
           </a:p>
         </p:txBody>
@@ -4272,8 +5521,8 @@
         </p:nvSpPr>
         <p:spPr>
           <a:xfrm>
-            <a:off x="731520" y="6446520"/>
-            <a:ext cx="10698480" cy="320040"/>
+            <a:off x="731520" y="731520"/>
+            <a:ext cx="9601200" cy="777240"/>
           </a:xfrm>
           <a:prstGeom prst="rect">
             <a:avLst/>
@@ -4281,44 +5530,83 @@
           <a:noFill/>
         </p:spPr>
         <p:txBody>
-          <a:bodyPr wrap="none">
+          <a:bodyPr wrap="square" lIns="0" rIns="0" tIns="0" bIns="0">
             <a:spAutoFit/>
           </a:bodyPr>
           <a:lstStyle/>
           <a:p>
             <a:pPr>
-              <a:defRPr sz="1000">
+              <a:defRPr sz="1900" b="1">
+                <a:solidFill>
+                  <a:srgbClr val="FFFFFF"/>
+                </a:solidFill>
+              </a:defRPr>
+            </a:pPr>
+            <a:r>
+              <a:t>What TerraEMS Will Do</a:t>
+            </a:r>
+          </a:p>
+          <a:p>
+            <a:pPr>
+              <a:spcBef>
+                <a:spcPts val="300"/>
+              </a:spcBef>
+              <a:defRPr sz="1050">
                 <a:solidFill>
                   <a:srgbClr val="94A3B8"/>
                 </a:solidFill>
               </a:defRPr>
             </a:pPr>
             <a:r>
-              <a:t>TERRESTRIAL PLATFORM  |  TERRAEMS CATALOGUE  |  CONFIDENTIAL - AUTHORISED SYSTEM INTEGRATORS ONLY</a:t>
-            </a:r>
-          </a:p>
-        </p:txBody>
-      </p:sp>
-      <p:sp>
-        <p:nvSpPr>
-          <p:cNvPr id="6" name="Rounded Rectangle 5"/>
+              <a:t>Specific operational functions and engineering capabilities directly sourced from technical documentation.</a:t>
+            </a:r>
+          </a:p>
+        </p:txBody>
+      </p:sp>
+      <p:pic>
+        <p:nvPicPr>
+          <p:cNvPr id="6" name="Picture 5" descr="tp_logo_white.png"/>
+          <p:cNvPicPr>
+            <a:picLocks noChangeAspect="1"/>
+          </p:cNvPicPr>
+          <p:nvPr/>
+        </p:nvPicPr>
+        <p:blipFill>
+          <a:blip r:embed="rId2"/>
+          <a:stretch>
+            <a:fillRect/>
+          </a:stretch>
+        </p:blipFill>
+        <p:spPr>
+          <a:xfrm>
+            <a:off x="10469880" y="411480"/>
+            <a:ext cx="987552" cy="384048"/>
+          </a:xfrm>
+          <a:prstGeom prst="rect">
+            <a:avLst/>
+          </a:prstGeom>
+        </p:spPr>
+      </p:pic>
+      <p:sp>
+        <p:nvSpPr>
+          <p:cNvPr id="7" name="Rounded Rectangle 6"/>
           <p:cNvSpPr/>
           <p:nvPr/>
         </p:nvSpPr>
         <p:spPr>
           <a:xfrm>
-            <a:off x="731520" y="1645920"/>
-            <a:ext cx="3401568" cy="4389120"/>
+            <a:off x="731520" y="1691640"/>
+            <a:ext cx="5230368" cy="2194560"/>
           </a:xfrm>
           <a:prstGeom prst="roundRect">
             <a:avLst/>
           </a:prstGeom>
           <a:solidFill>
-            <a:srgbClr val="0F172A"/>
+            <a:srgbClr val="131926"/>
           </a:solidFill>
-          <a:ln>
+          <a:ln w="12700">
             <a:solidFill>
-              <a:srgbClr val="1E293B"/>
+              <a:srgbClr val="28344B"/>
             </a:solidFill>
           </a:ln>
         </p:spPr>
@@ -4337,72 +5625,98 @@
           </a:fontRef>
         </p:style>
         <p:txBody>
-          <a:bodyPr rtlCol="0" anchor="ctr" wrap="square"/>
-          <a:lstStyle/>
-          <a:p>
-            <a:pPr algn="ctr">
+          <a:bodyPr rtlCol="0" anchor="ctr"/>
+          <a:lstStyle/>
+          <a:p>
+            <a:pPr algn="ctr"/>
+          </a:p>
+        </p:txBody>
+      </p:sp>
+      <p:sp>
+        <p:nvSpPr>
+          <p:cNvPr id="8" name="TextBox 7"/>
+          <p:cNvSpPr txBox="1"/>
+          <p:nvPr/>
+        </p:nvSpPr>
+        <p:spPr>
+          <a:xfrm>
+            <a:off x="960120" y="1874520"/>
+            <a:ext cx="4773168" cy="1828800"/>
+          </a:xfrm>
+          <a:prstGeom prst="rect">
+            <a:avLst/>
+          </a:prstGeom>
+          <a:noFill/>
+        </p:spPr>
+        <p:txBody>
+          <a:bodyPr wrap="square" lIns="0" rIns="0" tIns="0" bIns="0">
+            <a:spAutoFit/>
+          </a:bodyPr>
+          <a:lstStyle/>
+          <a:p>
+            <a:pPr>
+              <a:defRPr sz="850" b="1">
+                <a:solidFill>
+                  <a:srgbClr val="38BDF8"/>
+                </a:solidFill>
+              </a:defRPr>
+            </a:pPr>
+            <a:r>
+              <a:t>PILLAR 01  |  ENGINEERING CAPABILITY</a:t>
+            </a:r>
+          </a:p>
+          <a:p>
+            <a:pPr>
+              <a:spcBef>
+                <a:spcPts val="300"/>
+              </a:spcBef>
               <a:spcAft>
-                <a:spcPts val="800"/>
+                <a:spcPts val="600"/>
               </a:spcAft>
-              <a:defRPr sz="1100" b="1">
-                <a:solidFill>
-                  <a:srgbClr val="F5C842"/>
-                </a:solidFill>
-              </a:defRPr>
-            </a:pPr>
-            <a:r>
-              <a:t>EFFICIENCY</a:t>
-            </a:r>
-          </a:p>
-          <a:p>
-            <a:pPr>
-              <a:spcAft>
-                <a:spcPts val="1200"/>
-              </a:spcAft>
-              <a:defRPr sz="1600" b="1">
+              <a:defRPr sz="1300" b="1">
                 <a:solidFill>
                   <a:srgbClr val="FFFFFF"/>
                 </a:solidFill>
               </a:defRPr>
             </a:pPr>
             <a:r>
-              <a:t>Efficiency (Airport Peak Hour Surcharge Elimination)</a:t>
-            </a:r>
-          </a:p>
-          <a:p>
-            <a:pPr>
-              <a:defRPr sz="1300">
-                <a:solidFill>
-                  <a:srgbClr val="C8D8F0"/>
-                </a:solidFill>
-              </a:defRPr>
-            </a:pPr>
-            <a:r>
-              <a:t>Demand management algorithms reduced peak hour utility surcharges, delivering direct financial savings of ₹2,40,000 (2022) and ₹3,10,000 (2023) at Airport of India.</a:t>
-            </a:r>
-          </a:p>
-        </p:txBody>
-      </p:sp>
-      <p:sp>
-        <p:nvSpPr>
-          <p:cNvPr id="7" name="Rounded Rectangle 6"/>
+              <a:t>Multifunction Meter (MFM) &amp; Harmonics Engine</a:t>
+            </a:r>
+          </a:p>
+          <a:p>
+            <a:pPr>
+              <a:defRPr sz="1000">
+                <a:solidFill>
+                  <a:srgbClr val="F1F5F9"/>
+                </a:solidFill>
+              </a:defRPr>
+            </a:pPr>
+            <a:r>
+              <a:t>Captures fundamental parameters (kWh, voltage, current) alongside in-depth electrical harmonics analysis.</a:t>
+            </a:r>
+          </a:p>
+        </p:txBody>
+      </p:sp>
+      <p:sp>
+        <p:nvSpPr>
+          <p:cNvPr id="9" name="Rounded Rectangle 8"/>
           <p:cNvSpPr/>
           <p:nvPr/>
         </p:nvSpPr>
         <p:spPr>
           <a:xfrm>
-            <a:off x="4379976" y="1645920"/>
-            <a:ext cx="3401568" cy="4389120"/>
+            <a:off x="6227064" y="1691640"/>
+            <a:ext cx="5230368" cy="2194560"/>
           </a:xfrm>
           <a:prstGeom prst="roundRect">
             <a:avLst/>
           </a:prstGeom>
           <a:solidFill>
-            <a:srgbClr val="0F172A"/>
+            <a:srgbClr val="131926"/>
           </a:solidFill>
-          <a:ln>
+          <a:ln w="12700">
             <a:solidFill>
-              <a:srgbClr val="1E293B"/>
+              <a:srgbClr val="28344B"/>
             </a:solidFill>
           </a:ln>
         </p:spPr>
@@ -4421,72 +5735,98 @@
           </a:fontRef>
         </p:style>
         <p:txBody>
-          <a:bodyPr rtlCol="0" anchor="ctr" wrap="square"/>
-          <a:lstStyle/>
-          <a:p>
-            <a:pPr algn="ctr">
+          <a:bodyPr rtlCol="0" anchor="ctr"/>
+          <a:lstStyle/>
+          <a:p>
+            <a:pPr algn="ctr"/>
+          </a:p>
+        </p:txBody>
+      </p:sp>
+      <p:sp>
+        <p:nvSpPr>
+          <p:cNvPr id="10" name="TextBox 9"/>
+          <p:cNvSpPr txBox="1"/>
+          <p:nvPr/>
+        </p:nvSpPr>
+        <p:spPr>
+          <a:xfrm>
+            <a:off x="6455664" y="1874520"/>
+            <a:ext cx="4773168" cy="1828800"/>
+          </a:xfrm>
+          <a:prstGeom prst="rect">
+            <a:avLst/>
+          </a:prstGeom>
+          <a:noFill/>
+        </p:spPr>
+        <p:txBody>
+          <a:bodyPr wrap="square" lIns="0" rIns="0" tIns="0" bIns="0">
+            <a:spAutoFit/>
+          </a:bodyPr>
+          <a:lstStyle/>
+          <a:p>
+            <a:pPr>
+              <a:defRPr sz="850" b="1">
+                <a:solidFill>
+                  <a:srgbClr val="38BDF8"/>
+                </a:solidFill>
+              </a:defRPr>
+            </a:pPr>
+            <a:r>
+              <a:t>PILLAR 02  |  ENGINEERING CAPABILITY</a:t>
+            </a:r>
+          </a:p>
+          <a:p>
+            <a:pPr>
+              <a:spcBef>
+                <a:spcPts val="300"/>
+              </a:spcBef>
               <a:spcAft>
-                <a:spcPts val="800"/>
+                <a:spcPts val="600"/>
               </a:spcAft>
-              <a:defRPr sz="1100" b="1">
-                <a:solidFill>
-                  <a:srgbClr val="F5C842"/>
-                </a:solidFill>
-              </a:defRPr>
-            </a:pPr>
-            <a:r>
-              <a:t>QA &amp; POWER FACTOR PENALTY AVOIDANCE</a:t>
-            </a:r>
-          </a:p>
-          <a:p>
-            <a:pPr>
-              <a:spcAft>
-                <a:spcPts val="1200"/>
-              </a:spcAft>
-              <a:defRPr sz="1600" b="1">
+              <a:defRPr sz="1300" b="1">
                 <a:solidFill>
                   <a:srgbClr val="FFFFFF"/>
                 </a:solidFill>
               </a:defRPr>
             </a:pPr>
             <a:r>
-              <a:t>QA &amp; Power Factor Penalty Avoidance</a:t>
-            </a:r>
-          </a:p>
-          <a:p>
-            <a:pPr>
-              <a:defRPr sz="1300">
-                <a:solidFill>
-                  <a:srgbClr val="C8D8F0"/>
-                </a:solidFill>
-              </a:defRPr>
-            </a:pPr>
-            <a:r>
-              <a:t>Real-time Power Factor alerts successfully maintained levels above 0.95, capturing PF penalty avoidance savings of ₹1,15,000 (2022) and ₹1,25,000 (2023).</a:t>
-            </a:r>
-          </a:p>
-        </p:txBody>
-      </p:sp>
-      <p:sp>
-        <p:nvSpPr>
-          <p:cNvPr id="8" name="Rounded Rectangle 7"/>
+              <a:t>Substation Equipment Monitoring</a:t>
+            </a:r>
+          </a:p>
+          <a:p>
+            <a:pPr>
+              <a:defRPr sz="1000">
+                <a:solidFill>
+                  <a:srgbClr val="F1F5F9"/>
+                </a:solidFill>
+              </a:defRPr>
+            </a:pPr>
+            <a:r>
+              <a:t>Monitors relays, breaker panels, switchgear, and transformers with timely alerts adhering to ISA 18.2 compliance.</a:t>
+            </a:r>
+          </a:p>
+        </p:txBody>
+      </p:sp>
+      <p:sp>
+        <p:nvSpPr>
+          <p:cNvPr id="11" name="Rounded Rectangle 10"/>
           <p:cNvSpPr/>
           <p:nvPr/>
         </p:nvSpPr>
         <p:spPr>
           <a:xfrm>
-            <a:off x="8028432" y="1645920"/>
-            <a:ext cx="3401568" cy="4389120"/>
+            <a:off x="731520" y="4114800"/>
+            <a:ext cx="5230368" cy="2194560"/>
           </a:xfrm>
           <a:prstGeom prst="roundRect">
             <a:avLst/>
           </a:prstGeom>
           <a:solidFill>
-            <a:srgbClr val="0F172A"/>
+            <a:srgbClr val="131926"/>
           </a:solidFill>
-          <a:ln>
+          <a:ln w="12700">
             <a:solidFill>
-              <a:srgbClr val="1E293B"/>
+              <a:srgbClr val="28344B"/>
             </a:solidFill>
           </a:ln>
         </p:spPr>
@@ -4505,48 +5845,184 @@
           </a:fontRef>
         </p:style>
         <p:txBody>
-          <a:bodyPr rtlCol="0" anchor="ctr" wrap="square"/>
-          <a:lstStyle/>
-          <a:p>
-            <a:pPr algn="ctr">
+          <a:bodyPr rtlCol="0" anchor="ctr"/>
+          <a:lstStyle/>
+          <a:p>
+            <a:pPr algn="ctr"/>
+          </a:p>
+        </p:txBody>
+      </p:sp>
+      <p:sp>
+        <p:nvSpPr>
+          <p:cNvPr id="12" name="TextBox 11"/>
+          <p:cNvSpPr txBox="1"/>
+          <p:nvPr/>
+        </p:nvSpPr>
+        <p:spPr>
+          <a:xfrm>
+            <a:off x="960120" y="4297680"/>
+            <a:ext cx="4773168" cy="1828800"/>
+          </a:xfrm>
+          <a:prstGeom prst="rect">
+            <a:avLst/>
+          </a:prstGeom>
+          <a:noFill/>
+        </p:spPr>
+        <p:txBody>
+          <a:bodyPr wrap="square" lIns="0" rIns="0" tIns="0" bIns="0">
+            <a:spAutoFit/>
+          </a:bodyPr>
+          <a:lstStyle/>
+          <a:p>
+            <a:pPr>
+              <a:defRPr sz="850" b="1">
+                <a:solidFill>
+                  <a:srgbClr val="38BDF8"/>
+                </a:solidFill>
+              </a:defRPr>
+            </a:pPr>
+            <a:r>
+              <a:t>PILLAR 03  |  ENGINEERING CAPABILITY</a:t>
+            </a:r>
+          </a:p>
+          <a:p>
+            <a:pPr>
+              <a:spcBef>
+                <a:spcPts val="300"/>
+              </a:spcBef>
               <a:spcAft>
-                <a:spcPts val="800"/>
+                <a:spcPts val="600"/>
               </a:spcAft>
-              <a:defRPr sz="1100" b="1">
-                <a:solidFill>
-                  <a:srgbClr val="F5C842"/>
-                </a:solidFill>
-              </a:defRPr>
-            </a:pPr>
-            <a:r>
-              <a:t>EFFICIENCY</a:t>
-            </a:r>
-          </a:p>
-          <a:p>
-            <a:pPr>
+              <a:defRPr sz="1300" b="1">
+                <a:solidFill>
+                  <a:srgbClr val="FFFFFF"/>
+                </a:solidFill>
+              </a:defRPr>
+            </a:pPr>
+            <a:r>
+              <a:t>Self-Learning AI Optimization</a:t>
+            </a:r>
+          </a:p>
+          <a:p>
+            <a:pPr>
+              <a:defRPr sz="1000">
+                <a:solidFill>
+                  <a:srgbClr val="F1F5F9"/>
+                </a:solidFill>
+              </a:defRPr>
+            </a:pPr>
+            <a:r>
+              <a:t>AI models continuously learn from energy consumption patterns to adjust optimization strategies and adapt to seasonal shifts.</a:t>
+            </a:r>
+          </a:p>
+        </p:txBody>
+      </p:sp>
+      <p:sp>
+        <p:nvSpPr>
+          <p:cNvPr id="13" name="Rounded Rectangle 12"/>
+          <p:cNvSpPr/>
+          <p:nvPr/>
+        </p:nvSpPr>
+        <p:spPr>
+          <a:xfrm>
+            <a:off x="6227064" y="4114800"/>
+            <a:ext cx="5230368" cy="2194560"/>
+          </a:xfrm>
+          <a:prstGeom prst="roundRect">
+            <a:avLst/>
+          </a:prstGeom>
+          <a:solidFill>
+            <a:srgbClr val="131926"/>
+          </a:solidFill>
+          <a:ln w="12700">
+            <a:solidFill>
+              <a:srgbClr val="28344B"/>
+            </a:solidFill>
+          </a:ln>
+        </p:spPr>
+        <p:style>
+          <a:lnRef idx="1">
+            <a:schemeClr val="accent1"/>
+          </a:lnRef>
+          <a:fillRef idx="3">
+            <a:schemeClr val="accent1"/>
+          </a:fillRef>
+          <a:effectRef idx="2">
+            <a:schemeClr val="accent1"/>
+          </a:effectRef>
+          <a:fontRef idx="minor">
+            <a:schemeClr val="lt1"/>
+          </a:fontRef>
+        </p:style>
+        <p:txBody>
+          <a:bodyPr rtlCol="0" anchor="ctr"/>
+          <a:lstStyle/>
+          <a:p>
+            <a:pPr algn="ctr"/>
+          </a:p>
+        </p:txBody>
+      </p:sp>
+      <p:sp>
+        <p:nvSpPr>
+          <p:cNvPr id="14" name="TextBox 13"/>
+          <p:cNvSpPr txBox="1"/>
+          <p:nvPr/>
+        </p:nvSpPr>
+        <p:spPr>
+          <a:xfrm>
+            <a:off x="6455664" y="4297680"/>
+            <a:ext cx="4773168" cy="1828800"/>
+          </a:xfrm>
+          <a:prstGeom prst="rect">
+            <a:avLst/>
+          </a:prstGeom>
+          <a:noFill/>
+        </p:spPr>
+        <p:txBody>
+          <a:bodyPr wrap="square" lIns="0" rIns="0" tIns="0" bIns="0">
+            <a:spAutoFit/>
+          </a:bodyPr>
+          <a:lstStyle/>
+          <a:p>
+            <a:pPr>
+              <a:defRPr sz="850" b="1">
+                <a:solidFill>
+                  <a:srgbClr val="38BDF8"/>
+                </a:solidFill>
+              </a:defRPr>
+            </a:pPr>
+            <a:r>
+              <a:t>PILLAR 04  |  ENGINEERING CAPABILITY</a:t>
+            </a:r>
+          </a:p>
+          <a:p>
+            <a:pPr>
+              <a:spcBef>
+                <a:spcPts val="300"/>
+              </a:spcBef>
               <a:spcAft>
-                <a:spcPts val="1200"/>
+                <a:spcPts val="600"/>
               </a:spcAft>
-              <a:defRPr sz="1600" b="1">
+              <a:defRPr sz="1300" b="1">
                 <a:solidFill>
                   <a:srgbClr val="FFFFFF"/>
                 </a:solidFill>
               </a:defRPr>
             </a:pPr>
             <a:r>
-              <a:t>Efficiency (Untraced Utility Loss Slashed in Process Plant)</a:t>
-            </a:r>
-          </a:p>
-          <a:p>
-            <a:pPr>
-              <a:defRPr sz="1300">
-                <a:solidFill>
-                  <a:srgbClr val="C8D8F0"/>
-                </a:solidFill>
-              </a:defRPr>
-            </a:pPr>
-            <a:r>
-              <a:t>Driven by automated meter visibility, untraced utility losses plummeted from 19.5% down to just 6.5%, saving ₹8,50,000 in direct utility costs in chemical manufacturing.</a:t>
+              <a:t>Mobile App &amp; Payment Gateway</a:t>
+            </a:r>
+          </a:p>
+          <a:p>
+            <a:pPr>
+              <a:defRPr sz="1000">
+                <a:solidFill>
+                  <a:srgbClr val="F1F5F9"/>
+                </a:solidFill>
+              </a:defRPr>
+            </a:pPr>
+            <a:r>
+              <a:t>Monitor energy consumption and securely pay bills using mobile application (Android, iOS, Windows) with instant receipts.</a:t>
             </a:r>
           </a:p>
         </p:txBody>
@@ -4584,7 +6060,7 @@
             <a:avLst/>
           </a:prstGeom>
           <a:solidFill>
-            <a:srgbClr val="0A0E1A"/>
+            <a:srgbClr val="0B0F17"/>
           </a:solidFill>
           <a:ln>
             <a:noFill/>
@@ -4620,17 +6096,19 @@
         </p:nvSpPr>
         <p:spPr>
           <a:xfrm>
-            <a:off x="0" y="0"/>
-            <a:ext cx="12191695" cy="54864"/>
+            <a:off x="731520" y="365760"/>
+            <a:ext cx="10728655" cy="18288"/>
           </a:xfrm>
           <a:prstGeom prst="rect">
             <a:avLst/>
           </a:prstGeom>
           <a:solidFill>
-            <a:srgbClr val="00D4FF"/>
+            <a:srgbClr val="38BDF8"/>
           </a:solidFill>
           <a:ln>
-            <a:noFill/>
+            <a:solidFill>
+              <a:srgbClr val="38BDF8"/>
+            </a:solidFill>
           </a:ln>
         </p:spPr>
         <p:style>
@@ -4663,8 +6141,8 @@
         </p:nvSpPr>
         <p:spPr>
           <a:xfrm>
-            <a:off x="731520" y="365760"/>
-            <a:ext cx="10698480" cy="1005840"/>
+            <a:off x="731520" y="438912"/>
+            <a:ext cx="8229600" cy="274320"/>
           </a:xfrm>
           <a:prstGeom prst="rect">
             <a:avLst/>
@@ -4672,35 +6150,20 @@
           <a:noFill/>
         </p:spPr>
         <p:txBody>
-          <a:bodyPr wrap="square">
+          <a:bodyPr wrap="square" lIns="0" rIns="0" tIns="0" bIns="0">
             <a:spAutoFit/>
           </a:bodyPr>
           <a:lstStyle/>
           <a:p>
             <a:pPr>
-              <a:spcAft>
-                <a:spcPts val="400"/>
-              </a:spcAft>
-              <a:defRPr sz="1150" b="1">
-                <a:solidFill>
-                  <a:srgbClr val="00D4FF"/>
-                </a:solidFill>
-              </a:defRPr>
-            </a:pPr>
-            <a:r>
-              <a:t>TERRAEMS  |  TERRESTRIAL PLATFORM</a:t>
-            </a:r>
-          </a:p>
-          <a:p>
-            <a:pPr>
-              <a:defRPr sz="2500" b="1">
-                <a:solidFill>
-                  <a:srgbClr val="FFFFFF"/>
-                </a:solidFill>
-              </a:defRPr>
-            </a:pPr>
-            <a:r>
-              <a:t>Competitive Advantage: Terrestrial Platform vs. Legacy Systems</a:t>
+              <a:defRPr sz="950" b="1">
+                <a:solidFill>
+                  <a:srgbClr val="38BDF8"/>
+                </a:solidFill>
+              </a:defRPr>
+            </a:pPr>
+            <a:r>
+              <a:t>TERRESTRIAL PLATFORM  |  TERRAEMS  |  FIELD USE CASES</a:t>
             </a:r>
           </a:p>
         </p:txBody>
@@ -4713,8 +6176,8 @@
         </p:nvSpPr>
         <p:spPr>
           <a:xfrm>
-            <a:off x="731520" y="6446520"/>
-            <a:ext cx="10698480" cy="320040"/>
+            <a:off x="731520" y="731520"/>
+            <a:ext cx="9601200" cy="777240"/>
           </a:xfrm>
           <a:prstGeom prst="rect">
             <a:avLst/>
@@ -4722,44 +6185,83 @@
           <a:noFill/>
         </p:spPr>
         <p:txBody>
-          <a:bodyPr wrap="none">
+          <a:bodyPr wrap="square" lIns="0" rIns="0" tIns="0" bIns="0">
             <a:spAutoFit/>
           </a:bodyPr>
           <a:lstStyle/>
           <a:p>
             <a:pPr>
-              <a:defRPr sz="1000">
+              <a:defRPr sz="1900" b="1">
+                <a:solidFill>
+                  <a:srgbClr val="FFFFFF"/>
+                </a:solidFill>
+              </a:defRPr>
+            </a:pPr>
+            <a:r>
+              <a:t>Operational Use Cases &amp; Field Impact</a:t>
+            </a:r>
+          </a:p>
+          <a:p>
+            <a:pPr>
+              <a:spcBef>
+                <a:spcPts val="300"/>
+              </a:spcBef>
+              <a:defRPr sz="1050">
                 <a:solidFill>
                   <a:srgbClr val="94A3B8"/>
                 </a:solidFill>
               </a:defRPr>
             </a:pPr>
             <a:r>
-              <a:t>TERRESTRIAL PLATFORM  |  TERRAEMS CATALOGUE  |  CONFIDENTIAL - AUTHORISED SYSTEM INTEGRATORS ONLY</a:t>
-            </a:r>
-          </a:p>
-        </p:txBody>
-      </p:sp>
-      <p:sp>
-        <p:nvSpPr>
-          <p:cNvPr id="6" name="Rectangle 5"/>
+              <a:t>Actual documented use cases across Quality Assurance, Reduced Manpower, Efficiency, and Asset Productivity.</a:t>
+            </a:r>
+          </a:p>
+        </p:txBody>
+      </p:sp>
+      <p:pic>
+        <p:nvPicPr>
+          <p:cNvPr id="6" name="Picture 5" descr="tp_logo_white.png"/>
+          <p:cNvPicPr>
+            <a:picLocks noChangeAspect="1"/>
+          </p:cNvPicPr>
+          <p:nvPr/>
+        </p:nvPicPr>
+        <p:blipFill>
+          <a:blip r:embed="rId2"/>
+          <a:stretch>
+            <a:fillRect/>
+          </a:stretch>
+        </p:blipFill>
+        <p:spPr>
+          <a:xfrm>
+            <a:off x="10469880" y="411480"/>
+            <a:ext cx="987552" cy="384048"/>
+          </a:xfrm>
+          <a:prstGeom prst="rect">
+            <a:avLst/>
+          </a:prstGeom>
+        </p:spPr>
+      </p:pic>
+      <p:sp>
+        <p:nvSpPr>
+          <p:cNvPr id="7" name="Rounded Rectangle 6"/>
           <p:cNvSpPr/>
           <p:nvPr/>
         </p:nvSpPr>
         <p:spPr>
           <a:xfrm>
-            <a:off x="731520" y="1645920"/>
-            <a:ext cx="5212080" cy="502920"/>
-          </a:xfrm>
-          <a:prstGeom prst="rect">
+            <a:off x="731520" y="1691640"/>
+            <a:ext cx="3429000" cy="2194560"/>
+          </a:xfrm>
+          <a:prstGeom prst="roundRect">
             <a:avLst/>
           </a:prstGeom>
           <a:solidFill>
-            <a:srgbClr val="280F14"/>
+            <a:srgbClr val="131926"/>
           </a:solidFill>
-          <a:ln>
+          <a:ln w="12700">
             <a:solidFill>
-              <a:srgbClr val="FF5555"/>
+              <a:srgbClr val="28344B"/>
             </a:solidFill>
           </a:ln>
         </p:spPr>
@@ -4781,39 +6283,95 @@
           <a:bodyPr rtlCol="0" anchor="ctr"/>
           <a:lstStyle/>
           <a:p>
-            <a:pPr algn="ctr">
-              <a:defRPr sz="1250" b="1">
-                <a:solidFill>
-                  <a:srgbClr val="FF5555"/>
-                </a:solidFill>
-              </a:defRPr>
-            </a:pPr>
-            <a:r>
-              <a:t>TRADITIONAL LEGACY SCADA / SILOED SYSTEMS</a:t>
-            </a:r>
-          </a:p>
-        </p:txBody>
-      </p:sp>
-      <p:sp>
-        <p:nvSpPr>
-          <p:cNvPr id="7" name="Rectangle 6"/>
+            <a:pPr algn="ctr"/>
+          </a:p>
+        </p:txBody>
+      </p:sp>
+      <p:sp>
+        <p:nvSpPr>
+          <p:cNvPr id="8" name="TextBox 7"/>
+          <p:cNvSpPr txBox="1"/>
+          <p:nvPr/>
+        </p:nvSpPr>
+        <p:spPr>
+          <a:xfrm>
+            <a:off x="914400" y="1856232"/>
+            <a:ext cx="3063240" cy="1865376"/>
+          </a:xfrm>
+          <a:prstGeom prst="rect">
+            <a:avLst/>
+          </a:prstGeom>
+          <a:noFill/>
+        </p:spPr>
+        <p:txBody>
+          <a:bodyPr wrap="square" lIns="0" rIns="0" tIns="0" bIns="0">
+            <a:spAutoFit/>
+          </a:bodyPr>
+          <a:lstStyle/>
+          <a:p>
+            <a:pPr>
+              <a:defRPr sz="850" b="1">
+                <a:solidFill>
+                  <a:srgbClr val="34D399"/>
+                </a:solidFill>
+              </a:defRPr>
+            </a:pPr>
+            <a:r>
+              <a:t>CASE 01  |  EFFICIENCY</a:t>
+            </a:r>
+          </a:p>
+          <a:p>
+            <a:pPr>
+              <a:spcBef>
+                <a:spcPts val="200"/>
+              </a:spcBef>
+              <a:spcAft>
+                <a:spcPts val="400"/>
+              </a:spcAft>
+              <a:defRPr sz="1200" b="1">
+                <a:solidFill>
+                  <a:srgbClr val="FFFFFF"/>
+                </a:solidFill>
+              </a:defRPr>
+            </a:pPr>
+            <a:r>
+              <a:t>Efficiency (Airport Peak Hour Surcharge Elimination)</a:t>
+            </a:r>
+          </a:p>
+          <a:p>
+            <a:pPr>
+              <a:defRPr sz="950">
+                <a:solidFill>
+                  <a:srgbClr val="F1F5F9"/>
+                </a:solidFill>
+              </a:defRPr>
+            </a:pPr>
+            <a:r>
+              <a:t>Demand management algorithms reduced peak hour utility surcharges, delivering direct financial savings of ₹2,40,000 (2022) and ₹3,10,000 (2023) at Airport of India.</a:t>
+            </a:r>
+          </a:p>
+        </p:txBody>
+      </p:sp>
+      <p:sp>
+        <p:nvSpPr>
+          <p:cNvPr id="9" name="Rounded Rectangle 8"/>
           <p:cNvSpPr/>
           <p:nvPr/>
         </p:nvSpPr>
         <p:spPr>
           <a:xfrm>
-            <a:off x="6217920" y="1645920"/>
-            <a:ext cx="5212080" cy="502920"/>
-          </a:xfrm>
-          <a:prstGeom prst="rect">
+            <a:off x="4379976" y="1691640"/>
+            <a:ext cx="3429000" cy="2194560"/>
+          </a:xfrm>
+          <a:prstGeom prst="roundRect">
             <a:avLst/>
           </a:prstGeom>
           <a:solidFill>
-            <a:srgbClr val="0A2D3C"/>
+            <a:srgbClr val="131926"/>
           </a:solidFill>
-          <a:ln>
+          <a:ln w="12700">
             <a:solidFill>
-              <a:srgbClr val="00D4FF"/>
+              <a:srgbClr val="28344B"/>
             </a:solidFill>
           </a:ln>
         </p:spPr>
@@ -4835,39 +6393,95 @@
           <a:bodyPr rtlCol="0" anchor="ctr"/>
           <a:lstStyle/>
           <a:p>
-            <a:pPr algn="ctr">
-              <a:defRPr sz="1250" b="1">
-                <a:solidFill>
-                  <a:srgbClr val="00D4FF"/>
-                </a:solidFill>
-              </a:defRPr>
-            </a:pPr>
-            <a:r>
-              <a:t>TERRAEMS TERRESTRIAL PLATFORM ADVANTAGE</a:t>
-            </a:r>
-          </a:p>
-        </p:txBody>
-      </p:sp>
-      <p:sp>
-        <p:nvSpPr>
-          <p:cNvPr id="8" name="Rounded Rectangle 7"/>
+            <a:pPr algn="ctr"/>
+          </a:p>
+        </p:txBody>
+      </p:sp>
+      <p:sp>
+        <p:nvSpPr>
+          <p:cNvPr id="10" name="TextBox 9"/>
+          <p:cNvSpPr txBox="1"/>
+          <p:nvPr/>
+        </p:nvSpPr>
+        <p:spPr>
+          <a:xfrm>
+            <a:off x="4562856" y="1856232"/>
+            <a:ext cx="3063240" cy="1865376"/>
+          </a:xfrm>
+          <a:prstGeom prst="rect">
+            <a:avLst/>
+          </a:prstGeom>
+          <a:noFill/>
+        </p:spPr>
+        <p:txBody>
+          <a:bodyPr wrap="square" lIns="0" rIns="0" tIns="0" bIns="0">
+            <a:spAutoFit/>
+          </a:bodyPr>
+          <a:lstStyle/>
+          <a:p>
+            <a:pPr>
+              <a:defRPr sz="850" b="1">
+                <a:solidFill>
+                  <a:srgbClr val="34D399"/>
+                </a:solidFill>
+              </a:defRPr>
+            </a:pPr>
+            <a:r>
+              <a:t>CASE 02  |  QA &amp; POWER FACTOR PENALTY AVOIDANCE</a:t>
+            </a:r>
+          </a:p>
+          <a:p>
+            <a:pPr>
+              <a:spcBef>
+                <a:spcPts val="200"/>
+              </a:spcBef>
+              <a:spcAft>
+                <a:spcPts val="400"/>
+              </a:spcAft>
+              <a:defRPr sz="1200" b="1">
+                <a:solidFill>
+                  <a:srgbClr val="FFFFFF"/>
+                </a:solidFill>
+              </a:defRPr>
+            </a:pPr>
+            <a:r>
+              <a:t>QA &amp; Power Factor Penalty Avoidance</a:t>
+            </a:r>
+          </a:p>
+          <a:p>
+            <a:pPr>
+              <a:defRPr sz="950">
+                <a:solidFill>
+                  <a:srgbClr val="F1F5F9"/>
+                </a:solidFill>
+              </a:defRPr>
+            </a:pPr>
+            <a:r>
+              <a:t>Real-time Power Factor alerts successfully maintained levels above 0.95, capturing PF penalty avoidance savings of ₹1,15,000 (2022) and ₹1,25,000 (2023).</a:t>
+            </a:r>
+          </a:p>
+        </p:txBody>
+      </p:sp>
+      <p:sp>
+        <p:nvSpPr>
+          <p:cNvPr id="11" name="Rounded Rectangle 10"/>
           <p:cNvSpPr/>
           <p:nvPr/>
         </p:nvSpPr>
         <p:spPr>
           <a:xfrm>
-            <a:off x="731520" y="2240280"/>
-            <a:ext cx="5212080" cy="960120"/>
+            <a:off x="8028432" y="1691640"/>
+            <a:ext cx="3429000" cy="2194560"/>
           </a:xfrm>
           <a:prstGeom prst="roundRect">
             <a:avLst/>
           </a:prstGeom>
           <a:solidFill>
-            <a:srgbClr val="0F172A"/>
+            <a:srgbClr val="131926"/>
           </a:solidFill>
-          <a:ln>
+          <a:ln w="12700">
             <a:solidFill>
-              <a:srgbClr val="1E293B"/>
+              <a:srgbClr val="28344B"/>
             </a:solidFill>
           </a:ln>
         </p:spPr>
@@ -4886,42 +6500,98 @@
           </a:fontRef>
         </p:style>
         <p:txBody>
-          <a:bodyPr rtlCol="0" anchor="ctr" wrap="square"/>
-          <a:lstStyle/>
-          <a:p>
-            <a:pPr algn="ctr">
-              <a:defRPr sz="1200">
-                <a:solidFill>
-                  <a:srgbClr val="94A3B8"/>
-                </a:solidFill>
-              </a:defRPr>
-            </a:pPr>
-            <a:r>
-              <a:t>Reviewing monthly utility bills after the money is spent; zero granular visibility into where waste occurs.</a:t>
-            </a:r>
-          </a:p>
-        </p:txBody>
-      </p:sp>
-      <p:sp>
-        <p:nvSpPr>
-          <p:cNvPr id="9" name="Rounded Rectangle 8"/>
+          <a:bodyPr rtlCol="0" anchor="ctr"/>
+          <a:lstStyle/>
+          <a:p>
+            <a:pPr algn="ctr"/>
+          </a:p>
+        </p:txBody>
+      </p:sp>
+      <p:sp>
+        <p:nvSpPr>
+          <p:cNvPr id="12" name="TextBox 11"/>
+          <p:cNvSpPr txBox="1"/>
+          <p:nvPr/>
+        </p:nvSpPr>
+        <p:spPr>
+          <a:xfrm>
+            <a:off x="8211312" y="1856232"/>
+            <a:ext cx="3063240" cy="1865376"/>
+          </a:xfrm>
+          <a:prstGeom prst="rect">
+            <a:avLst/>
+          </a:prstGeom>
+          <a:noFill/>
+        </p:spPr>
+        <p:txBody>
+          <a:bodyPr wrap="square" lIns="0" rIns="0" tIns="0" bIns="0">
+            <a:spAutoFit/>
+          </a:bodyPr>
+          <a:lstStyle/>
+          <a:p>
+            <a:pPr>
+              <a:defRPr sz="850" b="1">
+                <a:solidFill>
+                  <a:srgbClr val="34D399"/>
+                </a:solidFill>
+              </a:defRPr>
+            </a:pPr>
+            <a:r>
+              <a:t>CASE 03  |  EFFICIENCY</a:t>
+            </a:r>
+          </a:p>
+          <a:p>
+            <a:pPr>
+              <a:spcBef>
+                <a:spcPts val="200"/>
+              </a:spcBef>
+              <a:spcAft>
+                <a:spcPts val="400"/>
+              </a:spcAft>
+              <a:defRPr sz="1200" b="1">
+                <a:solidFill>
+                  <a:srgbClr val="FFFFFF"/>
+                </a:solidFill>
+              </a:defRPr>
+            </a:pPr>
+            <a:r>
+              <a:t>Efficiency (Untraced Utility Loss Slashed in Process Plant)</a:t>
+            </a:r>
+          </a:p>
+          <a:p>
+            <a:pPr>
+              <a:defRPr sz="950">
+                <a:solidFill>
+                  <a:srgbClr val="F1F5F9"/>
+                </a:solidFill>
+              </a:defRPr>
+            </a:pPr>
+            <a:r>
+              <a:t>Driven by automated meter visibility, untraced utility losses plummeted from 19.5% down to just 6.5%, saving ₹8,50,000 in direct utility costs in chemical manufacturing.</a:t>
+            </a:r>
+          </a:p>
+        </p:txBody>
+      </p:sp>
+      <p:sp>
+        <p:nvSpPr>
+          <p:cNvPr id="13" name="Rounded Rectangle 12"/>
           <p:cNvSpPr/>
           <p:nvPr/>
         </p:nvSpPr>
         <p:spPr>
           <a:xfrm>
-            <a:off x="6217920" y="2240280"/>
-            <a:ext cx="5212080" cy="960120"/>
+            <a:off x="731520" y="4114800"/>
+            <a:ext cx="5230368" cy="2194560"/>
           </a:xfrm>
           <a:prstGeom prst="roundRect">
             <a:avLst/>
           </a:prstGeom>
           <a:solidFill>
-            <a:srgbClr val="141E37"/>
+            <a:srgbClr val="131926"/>
           </a:solidFill>
-          <a:ln>
+          <a:ln w="12700">
             <a:solidFill>
-              <a:srgbClr val="00D4FF"/>
+              <a:srgbClr val="28344B"/>
             </a:solidFill>
           </a:ln>
         </p:spPr>
@@ -4940,42 +6610,98 @@
           </a:fontRef>
         </p:style>
         <p:txBody>
-          <a:bodyPr rtlCol="0" anchor="ctr" wrap="square"/>
-          <a:lstStyle/>
-          <a:p>
-            <a:pPr algn="ctr">
-              <a:defRPr sz="1250" b="1">
+          <a:bodyPr rtlCol="0" anchor="ctr"/>
+          <a:lstStyle/>
+          <a:p>
+            <a:pPr algn="ctr"/>
+          </a:p>
+        </p:txBody>
+      </p:sp>
+      <p:sp>
+        <p:nvSpPr>
+          <p:cNvPr id="14" name="TextBox 13"/>
+          <p:cNvSpPr txBox="1"/>
+          <p:nvPr/>
+        </p:nvSpPr>
+        <p:spPr>
+          <a:xfrm>
+            <a:off x="914400" y="4279392"/>
+            <a:ext cx="4864608" cy="1865376"/>
+          </a:xfrm>
+          <a:prstGeom prst="rect">
+            <a:avLst/>
+          </a:prstGeom>
+          <a:noFill/>
+        </p:spPr>
+        <p:txBody>
+          <a:bodyPr wrap="square" lIns="0" rIns="0" tIns="0" bIns="0">
+            <a:spAutoFit/>
+          </a:bodyPr>
+          <a:lstStyle/>
+          <a:p>
+            <a:pPr>
+              <a:defRPr sz="850" b="1">
+                <a:solidFill>
+                  <a:srgbClr val="34D399"/>
+                </a:solidFill>
+              </a:defRPr>
+            </a:pPr>
+            <a:r>
+              <a:t>CASE 04  |  REDUCED MANPOWER</a:t>
+            </a:r>
+          </a:p>
+          <a:p>
+            <a:pPr>
+              <a:spcBef>
+                <a:spcPts val="200"/>
+              </a:spcBef>
+              <a:spcAft>
+                <a:spcPts val="400"/>
+              </a:spcAft>
+              <a:defRPr sz="1200" b="1">
                 <a:solidFill>
                   <a:srgbClr val="FFFFFF"/>
                 </a:solidFill>
               </a:defRPr>
             </a:pPr>
             <a:r>
-              <a:t>Real-time sub-metering across feeders, panels, and transformers with instant cost attribution and harmonic profiling.</a:t>
-            </a:r>
-          </a:p>
-        </p:txBody>
-      </p:sp>
-      <p:sp>
-        <p:nvSpPr>
-          <p:cNvPr id="10" name="Rounded Rectangle 9"/>
+              <a:t>Reduced Manpower (Automated Billing &amp; Administrative Savings)</a:t>
+            </a:r>
+          </a:p>
+          <a:p>
+            <a:pPr>
+              <a:defRPr sz="950">
+                <a:solidFill>
+                  <a:srgbClr val="F1F5F9"/>
+                </a:solidFill>
+              </a:defRPr>
+            </a:pPr>
+            <a:r>
+              <a:t>Automating bill generation and payment processing structurally yielded cash-flow savings of ₹25,000/month (₹3,00,000 per annum) in administrative overhead.</a:t>
+            </a:r>
+          </a:p>
+        </p:txBody>
+      </p:sp>
+      <p:sp>
+        <p:nvSpPr>
+          <p:cNvPr id="15" name="Rounded Rectangle 14"/>
           <p:cNvSpPr/>
           <p:nvPr/>
         </p:nvSpPr>
         <p:spPr>
           <a:xfrm>
-            <a:off x="731520" y="3291840"/>
-            <a:ext cx="5212080" cy="960120"/>
+            <a:off x="6227064" y="4114800"/>
+            <a:ext cx="5230368" cy="2194560"/>
           </a:xfrm>
           <a:prstGeom prst="roundRect">
             <a:avLst/>
           </a:prstGeom>
           <a:solidFill>
-            <a:srgbClr val="0F172A"/>
+            <a:srgbClr val="131926"/>
           </a:solidFill>
-          <a:ln>
+          <a:ln w="12700">
             <a:solidFill>
-              <a:srgbClr val="1E293B"/>
+              <a:srgbClr val="28344B"/>
             </a:solidFill>
           </a:ln>
         </p:spPr>
@@ -4994,288 +6720,74 @@
           </a:fontRef>
         </p:style>
         <p:txBody>
-          <a:bodyPr rtlCol="0" anchor="ctr" wrap="square"/>
-          <a:lstStyle/>
-          <a:p>
-            <a:pPr algn="ctr">
-              <a:defRPr sz="1200">
-                <a:solidFill>
-                  <a:srgbClr val="94A3B8"/>
-                </a:solidFill>
-              </a:defRPr>
-            </a:pPr>
-            <a:r>
-              <a:t>Incurring heavy contract demand penalties and power factor surcharges during sudden factory or facility ramp-ups.</a:t>
-            </a:r>
-          </a:p>
-        </p:txBody>
-      </p:sp>
-      <p:sp>
-        <p:nvSpPr>
-          <p:cNvPr id="11" name="Rounded Rectangle 10"/>
-          <p:cNvSpPr/>
-          <p:nvPr/>
-        </p:nvSpPr>
-        <p:spPr>
-          <a:xfrm>
-            <a:off x="6217920" y="3291840"/>
-            <a:ext cx="5212080" cy="960120"/>
-          </a:xfrm>
-          <a:prstGeom prst="roundRect">
-            <a:avLst/>
-          </a:prstGeom>
-          <a:solidFill>
-            <a:srgbClr val="141E37"/>
-          </a:solidFill>
-          <a:ln>
-            <a:solidFill>
-              <a:srgbClr val="00D4FF"/>
-            </a:solidFill>
-          </a:ln>
-        </p:spPr>
-        <p:style>
-          <a:lnRef idx="1">
-            <a:schemeClr val="accent1"/>
-          </a:lnRef>
-          <a:fillRef idx="3">
-            <a:schemeClr val="accent1"/>
-          </a:fillRef>
-          <a:effectRef idx="2">
-            <a:schemeClr val="accent1"/>
-          </a:effectRef>
-          <a:fontRef idx="minor">
-            <a:schemeClr val="lt1"/>
-          </a:fontRef>
-        </p:style>
-        <p:txBody>
-          <a:bodyPr rtlCol="0" anchor="ctr" wrap="square"/>
-          <a:lstStyle/>
-          <a:p>
-            <a:pPr algn="ctr">
-              <a:defRPr sz="1250" b="1">
+          <a:bodyPr rtlCol="0" anchor="ctr"/>
+          <a:lstStyle/>
+          <a:p>
+            <a:pPr algn="ctr"/>
+          </a:p>
+        </p:txBody>
+      </p:sp>
+      <p:sp>
+        <p:nvSpPr>
+          <p:cNvPr id="16" name="TextBox 15"/>
+          <p:cNvSpPr txBox="1"/>
+          <p:nvPr/>
+        </p:nvSpPr>
+        <p:spPr>
+          <a:xfrm>
+            <a:off x="6409944" y="4279392"/>
+            <a:ext cx="4864608" cy="1865376"/>
+          </a:xfrm>
+          <a:prstGeom prst="rect">
+            <a:avLst/>
+          </a:prstGeom>
+          <a:noFill/>
+        </p:spPr>
+        <p:txBody>
+          <a:bodyPr wrap="square" lIns="0" rIns="0" tIns="0" bIns="0">
+            <a:spAutoFit/>
+          </a:bodyPr>
+          <a:lstStyle/>
+          <a:p>
+            <a:pPr>
+              <a:defRPr sz="850" b="1">
+                <a:solidFill>
+                  <a:srgbClr val="34D399"/>
+                </a:solidFill>
+              </a:defRPr>
+            </a:pPr>
+            <a:r>
+              <a:t>CASE 05  |  ASSET PROTECTION</a:t>
+            </a:r>
+          </a:p>
+          <a:p>
+            <a:pPr>
+              <a:spcBef>
+                <a:spcPts val="200"/>
+              </a:spcBef>
+              <a:spcAft>
+                <a:spcPts val="400"/>
+              </a:spcAft>
+              <a:defRPr sz="1200" b="1">
                 <a:solidFill>
                   <a:srgbClr val="FFFFFF"/>
                 </a:solidFill>
               </a:defRPr>
             </a:pPr>
             <a:r>
-              <a:t>Continuous automated load balancing and predictive peak demand management to prevent all utility penalty conditions.</a:t>
-            </a:r>
-          </a:p>
-        </p:txBody>
-      </p:sp>
-      <p:sp>
-        <p:nvSpPr>
-          <p:cNvPr id="12" name="Rounded Rectangle 11"/>
-          <p:cNvSpPr/>
-          <p:nvPr/>
-        </p:nvSpPr>
-        <p:spPr>
-          <a:xfrm>
-            <a:off x="731520" y="4343400"/>
-            <a:ext cx="5212080" cy="960120"/>
-          </a:xfrm>
-          <a:prstGeom prst="roundRect">
-            <a:avLst/>
-          </a:prstGeom>
-          <a:solidFill>
-            <a:srgbClr val="0F172A"/>
-          </a:solidFill>
-          <a:ln>
-            <a:solidFill>
-              <a:srgbClr val="1E293B"/>
-            </a:solidFill>
-          </a:ln>
-        </p:spPr>
-        <p:style>
-          <a:lnRef idx="1">
-            <a:schemeClr val="accent1"/>
-          </a:lnRef>
-          <a:fillRef idx="3">
-            <a:schemeClr val="accent1"/>
-          </a:fillRef>
-          <a:effectRef idx="2">
-            <a:schemeClr val="accent1"/>
-          </a:effectRef>
-          <a:fontRef idx="minor">
-            <a:schemeClr val="lt1"/>
-          </a:fontRef>
-        </p:style>
-        <p:txBody>
-          <a:bodyPr rtlCol="0" anchor="ctr" wrap="square"/>
-          <a:lstStyle/>
-          <a:p>
-            <a:pPr algn="ctr">
-              <a:defRPr sz="1200">
-                <a:solidFill>
-                  <a:srgbClr val="94A3B8"/>
-                </a:solidFill>
-              </a:defRPr>
-            </a:pPr>
-            <a:r>
-              <a:t>Manual meter reading and fragmented paper billing leading to delayed cash flow and billing disputes.</a:t>
-            </a:r>
-          </a:p>
-        </p:txBody>
-      </p:sp>
-      <p:sp>
-        <p:nvSpPr>
-          <p:cNvPr id="13" name="Rounded Rectangle 12"/>
-          <p:cNvSpPr/>
-          <p:nvPr/>
-        </p:nvSpPr>
-        <p:spPr>
-          <a:xfrm>
-            <a:off x="6217920" y="4343400"/>
-            <a:ext cx="5212080" cy="960120"/>
-          </a:xfrm>
-          <a:prstGeom prst="roundRect">
-            <a:avLst/>
-          </a:prstGeom>
-          <a:solidFill>
-            <a:srgbClr val="141E37"/>
-          </a:solidFill>
-          <a:ln>
-            <a:solidFill>
-              <a:srgbClr val="00D4FF"/>
-            </a:solidFill>
-          </a:ln>
-        </p:spPr>
-        <p:style>
-          <a:lnRef idx="1">
-            <a:schemeClr val="accent1"/>
-          </a:lnRef>
-          <a:fillRef idx="3">
-            <a:schemeClr val="accent1"/>
-          </a:fillRef>
-          <a:effectRef idx="2">
-            <a:schemeClr val="accent1"/>
-          </a:effectRef>
-          <a:fontRef idx="minor">
-            <a:schemeClr val="lt1"/>
-          </a:fontRef>
-        </p:style>
-        <p:txBody>
-          <a:bodyPr rtlCol="0" anchor="ctr" wrap="square"/>
-          <a:lstStyle/>
-          <a:p>
-            <a:pPr algn="ctr">
-              <a:defRPr sz="1250" b="1">
-                <a:solidFill>
-                  <a:srgbClr val="FFFFFF"/>
-                </a:solidFill>
-              </a:defRPr>
-            </a:pPr>
-            <a:r>
-              <a:t>Integrated mobile application with in-built payment gateway, instant payment confirmations, and automated billing workflows.</a:t>
-            </a:r>
-          </a:p>
-        </p:txBody>
-      </p:sp>
-      <p:sp>
-        <p:nvSpPr>
-          <p:cNvPr id="14" name="Rounded Rectangle 13"/>
-          <p:cNvSpPr/>
-          <p:nvPr/>
-        </p:nvSpPr>
-        <p:spPr>
-          <a:xfrm>
-            <a:off x="731520" y="5394960"/>
-            <a:ext cx="5212080" cy="960120"/>
-          </a:xfrm>
-          <a:prstGeom prst="roundRect">
-            <a:avLst/>
-          </a:prstGeom>
-          <a:solidFill>
-            <a:srgbClr val="0F172A"/>
-          </a:solidFill>
-          <a:ln>
-            <a:solidFill>
-              <a:srgbClr val="1E293B"/>
-            </a:solidFill>
-          </a:ln>
-        </p:spPr>
-        <p:style>
-          <a:lnRef idx="1">
-            <a:schemeClr val="accent1"/>
-          </a:lnRef>
-          <a:fillRef idx="3">
-            <a:schemeClr val="accent1"/>
-          </a:fillRef>
-          <a:effectRef idx="2">
-            <a:schemeClr val="accent1"/>
-          </a:effectRef>
-          <a:fontRef idx="minor">
-            <a:schemeClr val="lt1"/>
-          </a:fontRef>
-        </p:style>
-        <p:txBody>
-          <a:bodyPr rtlCol="0" anchor="ctr" wrap="square"/>
-          <a:lstStyle/>
-          <a:p>
-            <a:pPr algn="ctr">
-              <a:defRPr sz="1200">
-                <a:solidFill>
-                  <a:srgbClr val="94A3B8"/>
-                </a:solidFill>
-              </a:defRPr>
-            </a:pPr>
-            <a:r>
-              <a:t>Static high/low threshold alarms trigger only after physical process degradation has occurred.</a:t>
-            </a:r>
-          </a:p>
-        </p:txBody>
-      </p:sp>
-      <p:sp>
-        <p:nvSpPr>
-          <p:cNvPr id="15" name="Rounded Rectangle 14"/>
-          <p:cNvSpPr/>
-          <p:nvPr/>
-        </p:nvSpPr>
-        <p:spPr>
-          <a:xfrm>
-            <a:off x="6217920" y="5394960"/>
-            <a:ext cx="5212080" cy="960120"/>
-          </a:xfrm>
-          <a:prstGeom prst="roundRect">
-            <a:avLst/>
-          </a:prstGeom>
-          <a:solidFill>
-            <a:srgbClr val="141E37"/>
-          </a:solidFill>
-          <a:ln>
-            <a:solidFill>
-              <a:srgbClr val="00D4FF"/>
-            </a:solidFill>
-          </a:ln>
-        </p:spPr>
-        <p:style>
-          <a:lnRef idx="1">
-            <a:schemeClr val="accent1"/>
-          </a:lnRef>
-          <a:fillRef idx="3">
-            <a:schemeClr val="accent1"/>
-          </a:fillRef>
-          <a:effectRef idx="2">
-            <a:schemeClr val="accent1"/>
-          </a:effectRef>
-          <a:fontRef idx="minor">
-            <a:schemeClr val="lt1"/>
-          </a:fontRef>
-        </p:style>
-        <p:txBody>
-          <a:bodyPr rtlCol="0" anchor="ctr" wrap="square"/>
-          <a:lstStyle/>
-          <a:p>
-            <a:pPr algn="ctr">
-              <a:defRPr sz="1250" b="1">
-                <a:solidFill>
-                  <a:srgbClr val="FFFFFF"/>
-                </a:solidFill>
-              </a:defRPr>
-            </a:pPr>
-            <a:r>
-              <a:t>TerraEMS physics-informed models forecast multi-variable trajectories up to 72 hours in advance.</a:t>
+              <a:t>Asset Protection (Phase Load Imbalance &amp; Harmonics Tracking)</a:t>
+            </a:r>
+          </a:p>
+          <a:p>
+            <a:pPr>
+              <a:defRPr sz="950">
+                <a:solidFill>
+                  <a:srgbClr val="F1F5F9"/>
+                </a:solidFill>
+              </a:defRPr>
+            </a:pPr>
+            <a:r>
+              <a:t>Identified and corrected a 12% phase load imbalance at the Localizer site, restoring transformer efficiency and protecting CNS room navigation hardware from premature electrical burnout.</a:t>
             </a:r>
           </a:p>
         </p:txBody>
@@ -5313,7 +6825,7 @@
             <a:avLst/>
           </a:prstGeom>
           <a:solidFill>
-            <a:srgbClr val="0A0E1A"/>
+            <a:srgbClr val="0B0F17"/>
           </a:solidFill>
           <a:ln>
             <a:noFill/>
@@ -5349,17 +6861,19 @@
         </p:nvSpPr>
         <p:spPr>
           <a:xfrm>
-            <a:off x="0" y="0"/>
-            <a:ext cx="12191695" cy="54864"/>
+            <a:off x="731520" y="365760"/>
+            <a:ext cx="10728655" cy="18288"/>
           </a:xfrm>
           <a:prstGeom prst="rect">
             <a:avLst/>
           </a:prstGeom>
           <a:solidFill>
-            <a:srgbClr val="00D4FF"/>
+            <a:srgbClr val="38BDF8"/>
           </a:solidFill>
           <a:ln>
-            <a:noFill/>
+            <a:solidFill>
+              <a:srgbClr val="38BDF8"/>
+            </a:solidFill>
           </a:ln>
         </p:spPr>
         <p:style>
@@ -5392,8 +6906,8 @@
         </p:nvSpPr>
         <p:spPr>
           <a:xfrm>
-            <a:off x="731520" y="365760"/>
-            <a:ext cx="10698480" cy="1005840"/>
+            <a:off x="731520" y="438912"/>
+            <a:ext cx="8229600" cy="274320"/>
           </a:xfrm>
           <a:prstGeom prst="rect">
             <a:avLst/>
@@ -5401,35 +6915,20 @@
           <a:noFill/>
         </p:spPr>
         <p:txBody>
-          <a:bodyPr wrap="square">
+          <a:bodyPr wrap="square" lIns="0" rIns="0" tIns="0" bIns="0">
             <a:spAutoFit/>
           </a:bodyPr>
           <a:lstStyle/>
           <a:p>
             <a:pPr>
-              <a:spcAft>
-                <a:spcPts val="400"/>
-              </a:spcAft>
-              <a:defRPr sz="1150" b="1">
-                <a:solidFill>
-                  <a:srgbClr val="00D4FF"/>
-                </a:solidFill>
-              </a:defRPr>
-            </a:pPr>
-            <a:r>
-              <a:t>TERRAEMS  |  TERRESTRIAL PLATFORM</a:t>
-            </a:r>
-          </a:p>
-          <a:p>
-            <a:pPr>
-              <a:defRPr sz="2500" b="1">
-                <a:solidFill>
-                  <a:srgbClr val="FFFFFF"/>
-                </a:solidFill>
-              </a:defRPr>
-            </a:pPr>
-            <a:r>
-              <a:t>End-to-End System Architecture &amp; Real-Time Pipeline</a:t>
+              <a:defRPr sz="950" b="1">
+                <a:solidFill>
+                  <a:srgbClr val="38BDF8"/>
+                </a:solidFill>
+              </a:defRPr>
+            </a:pPr>
+            <a:r>
+              <a:t>TERRESTRIAL PLATFORM  |  TERRAEMS  |  ARCHITECTURAL CONTRAST</a:t>
             </a:r>
           </a:p>
         </p:txBody>
@@ -5442,8 +6941,8 @@
         </p:nvSpPr>
         <p:spPr>
           <a:xfrm>
-            <a:off x="731520" y="6446520"/>
-            <a:ext cx="10698480" cy="320040"/>
+            <a:off x="731520" y="731520"/>
+            <a:ext cx="9601200" cy="777240"/>
           </a:xfrm>
           <a:prstGeom prst="rect">
             <a:avLst/>
@@ -5451,44 +6950,83 @@
           <a:noFill/>
         </p:spPr>
         <p:txBody>
-          <a:bodyPr wrap="none">
+          <a:bodyPr wrap="square" lIns="0" rIns="0" tIns="0" bIns="0">
             <a:spAutoFit/>
           </a:bodyPr>
           <a:lstStyle/>
           <a:p>
             <a:pPr>
-              <a:defRPr sz="1000">
+              <a:defRPr sz="1900" b="1">
+                <a:solidFill>
+                  <a:srgbClr val="FFFFFF"/>
+                </a:solidFill>
+              </a:defRPr>
+            </a:pPr>
+            <a:r>
+              <a:t>Comparison with Traditional SCADA / Legacy Systems</a:t>
+            </a:r>
+          </a:p>
+          <a:p>
+            <a:pPr>
+              <a:spcBef>
+                <a:spcPts val="300"/>
+              </a:spcBef>
+              <a:defRPr sz="1050">
                 <a:solidFill>
                   <a:srgbClr val="94A3B8"/>
                 </a:solidFill>
               </a:defRPr>
             </a:pPr>
             <a:r>
-              <a:t>TERRESTRIAL PLATFORM  |  TERRAEMS CATALOGUE  |  CONFIDENTIAL - AUTHORISED SYSTEM INTEGRATORS ONLY</a:t>
-            </a:r>
-          </a:p>
-        </p:txBody>
-      </p:sp>
-      <p:sp>
-        <p:nvSpPr>
-          <p:cNvPr id="6" name="Rounded Rectangle 5"/>
+              <a:t>Point-by-point contrast demonstrating the technological shift from legacy industrial automation to the Terrestrial Platform.</a:t>
+            </a:r>
+          </a:p>
+        </p:txBody>
+      </p:sp>
+      <p:pic>
+        <p:nvPicPr>
+          <p:cNvPr id="6" name="Picture 5" descr="tp_logo_white.png"/>
+          <p:cNvPicPr>
+            <a:picLocks noChangeAspect="1"/>
+          </p:cNvPicPr>
+          <p:nvPr/>
+        </p:nvPicPr>
+        <p:blipFill>
+          <a:blip r:embed="rId2"/>
+          <a:stretch>
+            <a:fillRect/>
+          </a:stretch>
+        </p:blipFill>
+        <p:spPr>
+          <a:xfrm>
+            <a:off x="10469880" y="411480"/>
+            <a:ext cx="987552" cy="384048"/>
+          </a:xfrm>
+          <a:prstGeom prst="rect">
+            <a:avLst/>
+          </a:prstGeom>
+        </p:spPr>
+      </p:pic>
+      <p:sp>
+        <p:nvSpPr>
+          <p:cNvPr id="7" name="Rounded Rectangle 6"/>
           <p:cNvSpPr/>
           <p:nvPr/>
         </p:nvSpPr>
         <p:spPr>
           <a:xfrm>
-            <a:off x="731520" y="1645920"/>
-            <a:ext cx="2523744" cy="4389120"/>
+            <a:off x="731520" y="1691640"/>
+            <a:ext cx="5230368" cy="502920"/>
           </a:xfrm>
           <a:prstGeom prst="roundRect">
             <a:avLst/>
           </a:prstGeom>
           <a:solidFill>
-            <a:srgbClr val="0F172A"/>
+            <a:srgbClr val="1C1216"/>
           </a:solidFill>
-          <a:ln>
+          <a:ln w="12700">
             <a:solidFill>
-              <a:srgbClr val="1E293B"/>
+              <a:srgbClr val="501923"/>
             </a:solidFill>
           </a:ln>
         </p:spPr>
@@ -5507,72 +7045,68 @@
           </a:fontRef>
         </p:style>
         <p:txBody>
-          <a:bodyPr rtlCol="0" anchor="ctr" wrap="square"/>
-          <a:lstStyle/>
-          <a:p>
-            <a:pPr algn="ctr">
-              <a:spcAft>
-                <a:spcPts val="800"/>
-              </a:spcAft>
+          <a:bodyPr rtlCol="0" anchor="ctr"/>
+          <a:lstStyle/>
+          <a:p>
+            <a:pPr algn="ctr"/>
+          </a:p>
+        </p:txBody>
+      </p:sp>
+      <p:sp>
+        <p:nvSpPr>
+          <p:cNvPr id="8" name="TextBox 7"/>
+          <p:cNvSpPr txBox="1"/>
+          <p:nvPr/>
+        </p:nvSpPr>
+        <p:spPr>
+          <a:xfrm>
+            <a:off x="868680" y="1783080"/>
+            <a:ext cx="4937760" cy="320040"/>
+          </a:xfrm>
+          <a:prstGeom prst="rect">
+            <a:avLst/>
+          </a:prstGeom>
+          <a:noFill/>
+        </p:spPr>
+        <p:txBody>
+          <a:bodyPr wrap="none">
+            <a:spAutoFit/>
+          </a:bodyPr>
+          <a:lstStyle/>
+          <a:p>
+            <a:pPr>
               <a:defRPr sz="1100" b="1">
                 <a:solidFill>
-                  <a:srgbClr val="00D4FF"/>
-                </a:solidFill>
-              </a:defRPr>
-            </a:pPr>
-            <a:r>
-              <a:t>LAYER 01</a:t>
-            </a:r>
-          </a:p>
-          <a:p>
-            <a:pPr>
-              <a:spcAft>
-                <a:spcPts val="1200"/>
-              </a:spcAft>
-              <a:defRPr sz="1550" b="1">
-                <a:solidFill>
-                  <a:srgbClr val="FFFFFF"/>
-                </a:solidFill>
-              </a:defRPr>
-            </a:pPr>
-            <a:r>
-              <a:t>Multi-Feeder Power Ingestion</a:t>
-            </a:r>
-          </a:p>
-          <a:p>
-            <a:pPr>
-              <a:defRPr sz="1250">
-                <a:solidFill>
-                  <a:srgbClr val="C8D8F0"/>
-                </a:solidFill>
-              </a:defRPr>
-            </a:pPr>
-            <a:r>
-              <a:t>Sub-second electrical telemetry acquisition from smart power meters, digital protection relays, and transformer monitoring units.</a:t>
-            </a:r>
-          </a:p>
-        </p:txBody>
-      </p:sp>
-      <p:sp>
-        <p:nvSpPr>
-          <p:cNvPr id="7" name="Rounded Rectangle 6"/>
+                  <a:srgbClr val="EF4444"/>
+                </a:solidFill>
+              </a:defRPr>
+            </a:pPr>
+            <a:r>
+              <a:t>TRADITIONAL LEGACY SYSTEMS / SILOED SCADA</a:t>
+            </a:r>
+          </a:p>
+        </p:txBody>
+      </p:sp>
+      <p:sp>
+        <p:nvSpPr>
+          <p:cNvPr id="9" name="Rounded Rectangle 8"/>
           <p:cNvSpPr/>
           <p:nvPr/>
         </p:nvSpPr>
         <p:spPr>
           <a:xfrm>
-            <a:off x="3456432" y="1645920"/>
-            <a:ext cx="2523744" cy="4389120"/>
+            <a:off x="6227064" y="1691640"/>
+            <a:ext cx="5230368" cy="502920"/>
           </a:xfrm>
           <a:prstGeom prst="roundRect">
             <a:avLst/>
           </a:prstGeom>
           <a:solidFill>
-            <a:srgbClr val="0F172A"/>
+            <a:srgbClr val="0F1C26"/>
           </a:solidFill>
-          <a:ln>
+          <a:ln w="12700">
             <a:solidFill>
-              <a:srgbClr val="1E293B"/>
+              <a:srgbClr val="194B5F"/>
             </a:solidFill>
           </a:ln>
         </p:spPr>
@@ -5591,72 +7125,68 @@
           </a:fontRef>
         </p:style>
         <p:txBody>
-          <a:bodyPr rtlCol="0" anchor="ctr" wrap="square"/>
-          <a:lstStyle/>
-          <a:p>
-            <a:pPr algn="ctr">
-              <a:spcAft>
-                <a:spcPts val="800"/>
-              </a:spcAft>
+          <a:bodyPr rtlCol="0" anchor="ctr"/>
+          <a:lstStyle/>
+          <a:p>
+            <a:pPr algn="ctr"/>
+          </a:p>
+        </p:txBody>
+      </p:sp>
+      <p:sp>
+        <p:nvSpPr>
+          <p:cNvPr id="10" name="TextBox 9"/>
+          <p:cNvSpPr txBox="1"/>
+          <p:nvPr/>
+        </p:nvSpPr>
+        <p:spPr>
+          <a:xfrm>
+            <a:off x="6364224" y="1783080"/>
+            <a:ext cx="4937760" cy="320040"/>
+          </a:xfrm>
+          <a:prstGeom prst="rect">
+            <a:avLst/>
+          </a:prstGeom>
+          <a:noFill/>
+        </p:spPr>
+        <p:txBody>
+          <a:bodyPr wrap="none">
+            <a:spAutoFit/>
+          </a:bodyPr>
+          <a:lstStyle/>
+          <a:p>
+            <a:pPr>
               <a:defRPr sz="1100" b="1">
                 <a:solidFill>
-                  <a:srgbClr val="00D4FF"/>
-                </a:solidFill>
-              </a:defRPr>
-            </a:pPr>
-            <a:r>
-              <a:t>LAYER 02</a:t>
-            </a:r>
-          </a:p>
-          <a:p>
-            <a:pPr>
-              <a:spcAft>
-                <a:spcPts val="1200"/>
-              </a:spcAft>
-              <a:defRPr sz="1550" b="1">
-                <a:solidFill>
-                  <a:srgbClr val="FFFFFF"/>
-                </a:solidFill>
-              </a:defRPr>
-            </a:pPr>
-            <a:r>
-              <a:t>High-Frequency Power Stream</a:t>
-            </a:r>
-          </a:p>
-          <a:p>
-            <a:pPr>
-              <a:defRPr sz="1250">
-                <a:solidFill>
-                  <a:srgbClr val="C8D8F0"/>
-                </a:solidFill>
-              </a:defRPr>
-            </a:pPr>
-            <a:r>
-              <a:t>Continuous 3-phase power telemetry buffering, harmonic distortion FFT computation, and sub-cycle power quality event capture.</a:t>
-            </a:r>
-          </a:p>
-        </p:txBody>
-      </p:sp>
-      <p:sp>
-        <p:nvSpPr>
-          <p:cNvPr id="8" name="Rounded Rectangle 7"/>
+                  <a:srgbClr val="38BDF8"/>
+                </a:solidFill>
+              </a:defRPr>
+            </a:pPr>
+            <a:r>
+              <a:t>TERRAEMS TERRESTRIAL PLATFORM ADVANTAGE</a:t>
+            </a:r>
+          </a:p>
+        </p:txBody>
+      </p:sp>
+      <p:sp>
+        <p:nvSpPr>
+          <p:cNvPr id="11" name="Rounded Rectangle 10"/>
           <p:cNvSpPr/>
           <p:nvPr/>
         </p:nvSpPr>
         <p:spPr>
           <a:xfrm>
-            <a:off x="6181344" y="1645920"/>
-            <a:ext cx="2523744" cy="4389120"/>
+            <a:off x="731520" y="2286000"/>
+            <a:ext cx="5230368" cy="1298448"/>
           </a:xfrm>
           <a:prstGeom prst="roundRect">
             <a:avLst/>
           </a:prstGeom>
           <a:solidFill>
-            <a:srgbClr val="0F172A"/>
+            <a:srgbClr val="1C1216"/>
           </a:solidFill>
-          <a:ln>
+          <a:ln w="12700">
             <a:solidFill>
-              <a:srgbClr val="1E293B"/>
+              <a:srgbClr val="501923"/>
             </a:solidFill>
           </a:ln>
         </p:spPr>
@@ -5675,72 +7205,68 @@
           </a:fontRef>
         </p:style>
         <p:txBody>
-          <a:bodyPr rtlCol="0" anchor="ctr" wrap="square"/>
-          <a:lstStyle/>
-          <a:p>
-            <a:pPr algn="ctr">
-              <a:spcAft>
-                <a:spcPts val="800"/>
-              </a:spcAft>
-              <a:defRPr sz="1100" b="1">
-                <a:solidFill>
-                  <a:srgbClr val="00D4FF"/>
-                </a:solidFill>
-              </a:defRPr>
-            </a:pPr>
-            <a:r>
-              <a:t>LAYER 03</a:t>
-            </a:r>
-          </a:p>
-          <a:p>
-            <a:pPr>
-              <a:spcAft>
-                <a:spcPts val="1200"/>
-              </a:spcAft>
-              <a:defRPr sz="1550" b="1">
-                <a:solidFill>
-                  <a:srgbClr val="FFFFFF"/>
-                </a:solidFill>
-              </a:defRPr>
-            </a:pPr>
-            <a:r>
-              <a:t>Peak Demand Optimizer</a:t>
-            </a:r>
-          </a:p>
-          <a:p>
-            <a:pPr>
-              <a:defRPr sz="1250">
-                <a:solidFill>
-                  <a:srgbClr val="C8D8F0"/>
-                </a:solidFill>
-              </a:defRPr>
-            </a:pPr>
-            <a:r>
-              <a:t>Multi-horizon energy demand forecasting, dynamic tariff arbitrage algorithms, power factor correction, and transformer load balancing.</a:t>
-            </a:r>
-          </a:p>
-        </p:txBody>
-      </p:sp>
-      <p:sp>
-        <p:nvSpPr>
-          <p:cNvPr id="9" name="Rounded Rectangle 8"/>
+          <a:bodyPr rtlCol="0" anchor="ctr"/>
+          <a:lstStyle/>
+          <a:p>
+            <a:pPr algn="ctr"/>
+          </a:p>
+        </p:txBody>
+      </p:sp>
+      <p:sp>
+        <p:nvSpPr>
+          <p:cNvPr id="12" name="TextBox 11"/>
+          <p:cNvSpPr txBox="1"/>
+          <p:nvPr/>
+        </p:nvSpPr>
+        <p:spPr>
+          <a:xfrm>
+            <a:off x="868680" y="2359152"/>
+            <a:ext cx="4956048" cy="1152144"/>
+          </a:xfrm>
+          <a:prstGeom prst="rect">
+            <a:avLst/>
+          </a:prstGeom>
+          <a:noFill/>
+        </p:spPr>
+        <p:txBody>
+          <a:bodyPr wrap="square" lIns="0" rIns="0" tIns="0" bIns="0">
+            <a:spAutoFit/>
+          </a:bodyPr>
+          <a:lstStyle/>
+          <a:p>
+            <a:pPr>
+              <a:defRPr sz="1000">
+                <a:solidFill>
+                  <a:srgbClr val="F1F5F9"/>
+                </a:solidFill>
+              </a:defRPr>
+            </a:pPr>
+            <a:r>
+              <a:t>Reviewing monthly utility bills after the money is spent; zero granular visibility into where waste occurs.</a:t>
+            </a:r>
+          </a:p>
+        </p:txBody>
+      </p:sp>
+      <p:sp>
+        <p:nvSpPr>
+          <p:cNvPr id="13" name="Rounded Rectangle 12"/>
           <p:cNvSpPr/>
           <p:nvPr/>
         </p:nvSpPr>
         <p:spPr>
           <a:xfrm>
-            <a:off x="8906256" y="1645920"/>
-            <a:ext cx="2523744" cy="4389120"/>
+            <a:off x="6227064" y="2286000"/>
+            <a:ext cx="5230368" cy="1298448"/>
           </a:xfrm>
           <a:prstGeom prst="roundRect">
             <a:avLst/>
           </a:prstGeom>
           <a:solidFill>
-            <a:srgbClr val="0F172A"/>
+            <a:srgbClr val="0F1C26"/>
           </a:solidFill>
-          <a:ln>
+          <a:ln w="12700">
             <a:solidFill>
-              <a:srgbClr val="1E293B"/>
+              <a:srgbClr val="194B5F"/>
             </a:solidFill>
           </a:ln>
         </p:spPr>
@@ -5759,48 +7285,364 @@
           </a:fontRef>
         </p:style>
         <p:txBody>
-          <a:bodyPr rtlCol="0" anchor="ctr" wrap="square"/>
-          <a:lstStyle/>
-          <a:p>
-            <a:pPr algn="ctr">
-              <a:spcAft>
-                <a:spcPts val="800"/>
-              </a:spcAft>
-              <a:defRPr sz="1100" b="1">
-                <a:solidFill>
-                  <a:srgbClr val="00D4FF"/>
-                </a:solidFill>
-              </a:defRPr>
-            </a:pPr>
-            <a:r>
-              <a:t>LAYER 04</a:t>
-            </a:r>
-          </a:p>
-          <a:p>
-            <a:pPr>
-              <a:spcAft>
-                <a:spcPts val="1200"/>
-              </a:spcAft>
-              <a:defRPr sz="1550" b="1">
-                <a:solidFill>
-                  <a:srgbClr val="FFFFFF"/>
-                </a:solidFill>
-              </a:defRPr>
-            </a:pPr>
-            <a:r>
-              <a:t>Microgrid Dispatch Cockpit</a:t>
-            </a:r>
-          </a:p>
-          <a:p>
-            <a:pPr>
-              <a:defRPr sz="1250">
-                <a:solidFill>
-                  <a:srgbClr val="C8D8F0"/>
-                </a:solidFill>
-              </a:defRPr>
-            </a:pPr>
-            <a:r>
-              <a:t>Autonomous BESS battery charge/discharge dispatch, automated non-critical load shedding, and ANSI/ISA-101 energy supervisory displays.</a:t>
+          <a:bodyPr rtlCol="0" anchor="ctr"/>
+          <a:lstStyle/>
+          <a:p>
+            <a:pPr algn="ctr"/>
+          </a:p>
+        </p:txBody>
+      </p:sp>
+      <p:sp>
+        <p:nvSpPr>
+          <p:cNvPr id="14" name="TextBox 13"/>
+          <p:cNvSpPr txBox="1"/>
+          <p:nvPr/>
+        </p:nvSpPr>
+        <p:spPr>
+          <a:xfrm>
+            <a:off x="6364224" y="2359152"/>
+            <a:ext cx="4956048" cy="1152144"/>
+          </a:xfrm>
+          <a:prstGeom prst="rect">
+            <a:avLst/>
+          </a:prstGeom>
+          <a:noFill/>
+        </p:spPr>
+        <p:txBody>
+          <a:bodyPr wrap="square" lIns="0" rIns="0" tIns="0" bIns="0">
+            <a:spAutoFit/>
+          </a:bodyPr>
+          <a:lstStyle/>
+          <a:p>
+            <a:pPr>
+              <a:defRPr sz="1000" b="1">
+                <a:solidFill>
+                  <a:srgbClr val="34D399"/>
+                </a:solidFill>
+              </a:defRPr>
+            </a:pPr>
+            <a:r>
+              <a:t>Real-time sub-metering across feeders, panels, and transformers with instant cost attribution and harmonic profiling.</a:t>
+            </a:r>
+          </a:p>
+        </p:txBody>
+      </p:sp>
+      <p:sp>
+        <p:nvSpPr>
+          <p:cNvPr id="15" name="Rounded Rectangle 14"/>
+          <p:cNvSpPr/>
+          <p:nvPr/>
+        </p:nvSpPr>
+        <p:spPr>
+          <a:xfrm>
+            <a:off x="731520" y="3694176"/>
+            <a:ext cx="5230368" cy="1298448"/>
+          </a:xfrm>
+          <a:prstGeom prst="roundRect">
+            <a:avLst/>
+          </a:prstGeom>
+          <a:solidFill>
+            <a:srgbClr val="1C1216"/>
+          </a:solidFill>
+          <a:ln w="12700">
+            <a:solidFill>
+              <a:srgbClr val="501923"/>
+            </a:solidFill>
+          </a:ln>
+        </p:spPr>
+        <p:style>
+          <a:lnRef idx="1">
+            <a:schemeClr val="accent1"/>
+          </a:lnRef>
+          <a:fillRef idx="3">
+            <a:schemeClr val="accent1"/>
+          </a:fillRef>
+          <a:effectRef idx="2">
+            <a:schemeClr val="accent1"/>
+          </a:effectRef>
+          <a:fontRef idx="minor">
+            <a:schemeClr val="lt1"/>
+          </a:fontRef>
+        </p:style>
+        <p:txBody>
+          <a:bodyPr rtlCol="0" anchor="ctr"/>
+          <a:lstStyle/>
+          <a:p>
+            <a:pPr algn="ctr"/>
+          </a:p>
+        </p:txBody>
+      </p:sp>
+      <p:sp>
+        <p:nvSpPr>
+          <p:cNvPr id="16" name="TextBox 15"/>
+          <p:cNvSpPr txBox="1"/>
+          <p:nvPr/>
+        </p:nvSpPr>
+        <p:spPr>
+          <a:xfrm>
+            <a:off x="868680" y="3767328"/>
+            <a:ext cx="4956048" cy="1152144"/>
+          </a:xfrm>
+          <a:prstGeom prst="rect">
+            <a:avLst/>
+          </a:prstGeom>
+          <a:noFill/>
+        </p:spPr>
+        <p:txBody>
+          <a:bodyPr wrap="square" lIns="0" rIns="0" tIns="0" bIns="0">
+            <a:spAutoFit/>
+          </a:bodyPr>
+          <a:lstStyle/>
+          <a:p>
+            <a:pPr>
+              <a:defRPr sz="1000">
+                <a:solidFill>
+                  <a:srgbClr val="F1F5F9"/>
+                </a:solidFill>
+              </a:defRPr>
+            </a:pPr>
+            <a:r>
+              <a:t>Incurring heavy contract demand penalties and power factor surcharges during sudden factory or facility ramp-ups.</a:t>
+            </a:r>
+          </a:p>
+        </p:txBody>
+      </p:sp>
+      <p:sp>
+        <p:nvSpPr>
+          <p:cNvPr id="17" name="Rounded Rectangle 16"/>
+          <p:cNvSpPr/>
+          <p:nvPr/>
+        </p:nvSpPr>
+        <p:spPr>
+          <a:xfrm>
+            <a:off x="6227064" y="3694176"/>
+            <a:ext cx="5230368" cy="1298448"/>
+          </a:xfrm>
+          <a:prstGeom prst="roundRect">
+            <a:avLst/>
+          </a:prstGeom>
+          <a:solidFill>
+            <a:srgbClr val="0F1C26"/>
+          </a:solidFill>
+          <a:ln w="12700">
+            <a:solidFill>
+              <a:srgbClr val="194B5F"/>
+            </a:solidFill>
+          </a:ln>
+        </p:spPr>
+        <p:style>
+          <a:lnRef idx="1">
+            <a:schemeClr val="accent1"/>
+          </a:lnRef>
+          <a:fillRef idx="3">
+            <a:schemeClr val="accent1"/>
+          </a:fillRef>
+          <a:effectRef idx="2">
+            <a:schemeClr val="accent1"/>
+          </a:effectRef>
+          <a:fontRef idx="minor">
+            <a:schemeClr val="lt1"/>
+          </a:fontRef>
+        </p:style>
+        <p:txBody>
+          <a:bodyPr rtlCol="0" anchor="ctr"/>
+          <a:lstStyle/>
+          <a:p>
+            <a:pPr algn="ctr"/>
+          </a:p>
+        </p:txBody>
+      </p:sp>
+      <p:sp>
+        <p:nvSpPr>
+          <p:cNvPr id="18" name="TextBox 17"/>
+          <p:cNvSpPr txBox="1"/>
+          <p:nvPr/>
+        </p:nvSpPr>
+        <p:spPr>
+          <a:xfrm>
+            <a:off x="6364224" y="3767328"/>
+            <a:ext cx="4956048" cy="1152144"/>
+          </a:xfrm>
+          <a:prstGeom prst="rect">
+            <a:avLst/>
+          </a:prstGeom>
+          <a:noFill/>
+        </p:spPr>
+        <p:txBody>
+          <a:bodyPr wrap="square" lIns="0" rIns="0" tIns="0" bIns="0">
+            <a:spAutoFit/>
+          </a:bodyPr>
+          <a:lstStyle/>
+          <a:p>
+            <a:pPr>
+              <a:defRPr sz="1000" b="1">
+                <a:solidFill>
+                  <a:srgbClr val="34D399"/>
+                </a:solidFill>
+              </a:defRPr>
+            </a:pPr>
+            <a:r>
+              <a:t>Continuous automated load balancing and predictive peak demand management to prevent all utility penalty conditions.</a:t>
+            </a:r>
+          </a:p>
+        </p:txBody>
+      </p:sp>
+      <p:sp>
+        <p:nvSpPr>
+          <p:cNvPr id="19" name="Rounded Rectangle 18"/>
+          <p:cNvSpPr/>
+          <p:nvPr/>
+        </p:nvSpPr>
+        <p:spPr>
+          <a:xfrm>
+            <a:off x="731520" y="5102352"/>
+            <a:ext cx="5230368" cy="1298448"/>
+          </a:xfrm>
+          <a:prstGeom prst="roundRect">
+            <a:avLst/>
+          </a:prstGeom>
+          <a:solidFill>
+            <a:srgbClr val="1C1216"/>
+          </a:solidFill>
+          <a:ln w="12700">
+            <a:solidFill>
+              <a:srgbClr val="501923"/>
+            </a:solidFill>
+          </a:ln>
+        </p:spPr>
+        <p:style>
+          <a:lnRef idx="1">
+            <a:schemeClr val="accent1"/>
+          </a:lnRef>
+          <a:fillRef idx="3">
+            <a:schemeClr val="accent1"/>
+          </a:fillRef>
+          <a:effectRef idx="2">
+            <a:schemeClr val="accent1"/>
+          </a:effectRef>
+          <a:fontRef idx="minor">
+            <a:schemeClr val="lt1"/>
+          </a:fontRef>
+        </p:style>
+        <p:txBody>
+          <a:bodyPr rtlCol="0" anchor="ctr"/>
+          <a:lstStyle/>
+          <a:p>
+            <a:pPr algn="ctr"/>
+          </a:p>
+        </p:txBody>
+      </p:sp>
+      <p:sp>
+        <p:nvSpPr>
+          <p:cNvPr id="20" name="TextBox 19"/>
+          <p:cNvSpPr txBox="1"/>
+          <p:nvPr/>
+        </p:nvSpPr>
+        <p:spPr>
+          <a:xfrm>
+            <a:off x="868680" y="5175504"/>
+            <a:ext cx="4956048" cy="1152144"/>
+          </a:xfrm>
+          <a:prstGeom prst="rect">
+            <a:avLst/>
+          </a:prstGeom>
+          <a:noFill/>
+        </p:spPr>
+        <p:txBody>
+          <a:bodyPr wrap="square" lIns="0" rIns="0" tIns="0" bIns="0">
+            <a:spAutoFit/>
+          </a:bodyPr>
+          <a:lstStyle/>
+          <a:p>
+            <a:pPr>
+              <a:defRPr sz="1000">
+                <a:solidFill>
+                  <a:srgbClr val="F1F5F9"/>
+                </a:solidFill>
+              </a:defRPr>
+            </a:pPr>
+            <a:r>
+              <a:t>Manual meter reading and fragmented paper billing leading to delayed cash flow and billing disputes.</a:t>
+            </a:r>
+          </a:p>
+        </p:txBody>
+      </p:sp>
+      <p:sp>
+        <p:nvSpPr>
+          <p:cNvPr id="21" name="Rounded Rectangle 20"/>
+          <p:cNvSpPr/>
+          <p:nvPr/>
+        </p:nvSpPr>
+        <p:spPr>
+          <a:xfrm>
+            <a:off x="6227064" y="5102352"/>
+            <a:ext cx="5230368" cy="1298448"/>
+          </a:xfrm>
+          <a:prstGeom prst="roundRect">
+            <a:avLst/>
+          </a:prstGeom>
+          <a:solidFill>
+            <a:srgbClr val="0F1C26"/>
+          </a:solidFill>
+          <a:ln w="12700">
+            <a:solidFill>
+              <a:srgbClr val="194B5F"/>
+            </a:solidFill>
+          </a:ln>
+        </p:spPr>
+        <p:style>
+          <a:lnRef idx="1">
+            <a:schemeClr val="accent1"/>
+          </a:lnRef>
+          <a:fillRef idx="3">
+            <a:schemeClr val="accent1"/>
+          </a:fillRef>
+          <a:effectRef idx="2">
+            <a:schemeClr val="accent1"/>
+          </a:effectRef>
+          <a:fontRef idx="minor">
+            <a:schemeClr val="lt1"/>
+          </a:fontRef>
+        </p:style>
+        <p:txBody>
+          <a:bodyPr rtlCol="0" anchor="ctr"/>
+          <a:lstStyle/>
+          <a:p>
+            <a:pPr algn="ctr"/>
+          </a:p>
+        </p:txBody>
+      </p:sp>
+      <p:sp>
+        <p:nvSpPr>
+          <p:cNvPr id="22" name="TextBox 21"/>
+          <p:cNvSpPr txBox="1"/>
+          <p:nvPr/>
+        </p:nvSpPr>
+        <p:spPr>
+          <a:xfrm>
+            <a:off x="6364224" y="5175504"/>
+            <a:ext cx="4956048" cy="1152144"/>
+          </a:xfrm>
+          <a:prstGeom prst="rect">
+            <a:avLst/>
+          </a:prstGeom>
+          <a:noFill/>
+        </p:spPr>
+        <p:txBody>
+          <a:bodyPr wrap="square" lIns="0" rIns="0" tIns="0" bIns="0">
+            <a:spAutoFit/>
+          </a:bodyPr>
+          <a:lstStyle/>
+          <a:p>
+            <a:pPr>
+              <a:defRPr sz="1000" b="1">
+                <a:solidFill>
+                  <a:srgbClr val="34D399"/>
+                </a:solidFill>
+              </a:defRPr>
+            </a:pPr>
+            <a:r>
+              <a:t>Integrated mobile application with in-built payment gateway, instant payment confirmations, and automated billing workflows.</a:t>
             </a:r>
           </a:p>
         </p:txBody>
@@ -5838,7 +7680,7 @@
             <a:avLst/>
           </a:prstGeom>
           <a:solidFill>
-            <a:srgbClr val="0A0E1A"/>
+            <a:srgbClr val="0B0F17"/>
           </a:solidFill>
           <a:ln>
             <a:noFill/>
@@ -5874,17 +7716,19 @@
         </p:nvSpPr>
         <p:spPr>
           <a:xfrm>
-            <a:off x="0" y="0"/>
-            <a:ext cx="12191695" cy="54864"/>
+            <a:off x="731520" y="365760"/>
+            <a:ext cx="10728655" cy="18288"/>
           </a:xfrm>
           <a:prstGeom prst="rect">
             <a:avLst/>
           </a:prstGeom>
           <a:solidFill>
-            <a:srgbClr val="00D4FF"/>
+            <a:srgbClr val="38BDF8"/>
           </a:solidFill>
           <a:ln>
-            <a:noFill/>
+            <a:solidFill>
+              <a:srgbClr val="38BDF8"/>
+            </a:solidFill>
           </a:ln>
         </p:spPr>
         <p:style>
@@ -5917,8 +7761,8 @@
         </p:nvSpPr>
         <p:spPr>
           <a:xfrm>
-            <a:off x="731520" y="365760"/>
-            <a:ext cx="10698480" cy="1005840"/>
+            <a:off x="731520" y="438912"/>
+            <a:ext cx="8229600" cy="274320"/>
           </a:xfrm>
           <a:prstGeom prst="rect">
             <a:avLst/>
@@ -5926,35 +7770,20 @@
           <a:noFill/>
         </p:spPr>
         <p:txBody>
-          <a:bodyPr wrap="square">
+          <a:bodyPr wrap="square" lIns="0" rIns="0" tIns="0" bIns="0">
             <a:spAutoFit/>
           </a:bodyPr>
           <a:lstStyle/>
           <a:p>
             <a:pPr>
-              <a:spcAft>
-                <a:spcPts val="400"/>
-              </a:spcAft>
-              <a:defRPr sz="1150" b="1">
-                <a:solidFill>
-                  <a:srgbClr val="00D4FF"/>
-                </a:solidFill>
-              </a:defRPr>
-            </a:pPr>
-            <a:r>
-              <a:t>TERRAEMS  |  TERRESTRIAL PLATFORM</a:t>
-            </a:r>
-          </a:p>
-          <a:p>
-            <a:pPr>
-              <a:defRPr sz="2500" b="1">
-                <a:solidFill>
-                  <a:srgbClr val="FFFFFF"/>
-                </a:solidFill>
-              </a:defRPr>
-            </a:pPr>
-            <a:r>
-              <a:t>System Integrator Deployment Playbook &amp; Commercial Enablement</a:t>
+              <a:defRPr sz="950" b="1">
+                <a:solidFill>
+                  <a:srgbClr val="38BDF8"/>
+                </a:solidFill>
+              </a:defRPr>
+            </a:pPr>
+            <a:r>
+              <a:t>TERRESTRIAL PLATFORM  |  TERRAEMS  |  SYSTEM ARCHITECTURE</a:t>
             </a:r>
           </a:p>
         </p:txBody>
@@ -5967,8 +7796,8 @@
         </p:nvSpPr>
         <p:spPr>
           <a:xfrm>
-            <a:off x="731520" y="6446520"/>
-            <a:ext cx="10698480" cy="320040"/>
+            <a:off x="731520" y="731520"/>
+            <a:ext cx="9601200" cy="777240"/>
           </a:xfrm>
           <a:prstGeom prst="rect">
             <a:avLst/>
@@ -5976,44 +7805,83 @@
           <a:noFill/>
         </p:spPr>
         <p:txBody>
-          <a:bodyPr wrap="none">
+          <a:bodyPr wrap="square" lIns="0" rIns="0" tIns="0" bIns="0">
             <a:spAutoFit/>
           </a:bodyPr>
           <a:lstStyle/>
           <a:p>
             <a:pPr>
-              <a:defRPr sz="1000">
+              <a:defRPr sz="1900" b="1">
+                <a:solidFill>
+                  <a:srgbClr val="FFFFFF"/>
+                </a:solidFill>
+              </a:defRPr>
+            </a:pPr>
+            <a:r>
+              <a:t>End-to-End System Diagram &amp; Data Pipeline</a:t>
+            </a:r>
+          </a:p>
+          <a:p>
+            <a:pPr>
+              <a:spcBef>
+                <a:spcPts val="300"/>
+              </a:spcBef>
+              <a:defRPr sz="1050">
                 <a:solidFill>
                   <a:srgbClr val="94A3B8"/>
                 </a:solidFill>
               </a:defRPr>
             </a:pPr>
             <a:r>
-              <a:t>TERRESTRIAL PLATFORM  |  TERRAEMS CATALOGUE  |  CONFIDENTIAL - AUTHORISED SYSTEM INTEGRATORS ONLY</a:t>
-            </a:r>
-          </a:p>
-        </p:txBody>
-      </p:sp>
-      <p:sp>
-        <p:nvSpPr>
-          <p:cNvPr id="6" name="Rounded Rectangle 5"/>
+              <a:t>Visual architecture diagram representing field telemetry ingestion, deterministic edge fabric, AI reasoning, and closed-loop actuation.</a:t>
+            </a:r>
+          </a:p>
+        </p:txBody>
+      </p:sp>
+      <p:pic>
+        <p:nvPicPr>
+          <p:cNvPr id="6" name="Picture 5" descr="tp_logo_white.png"/>
+          <p:cNvPicPr>
+            <a:picLocks noChangeAspect="1"/>
+          </p:cNvPicPr>
+          <p:nvPr/>
+        </p:nvPicPr>
+        <p:blipFill>
+          <a:blip r:embed="rId2"/>
+          <a:stretch>
+            <a:fillRect/>
+          </a:stretch>
+        </p:blipFill>
+        <p:spPr>
+          <a:xfrm>
+            <a:off x="10469880" y="411480"/>
+            <a:ext cx="987552" cy="384048"/>
+          </a:xfrm>
+          <a:prstGeom prst="rect">
+            <a:avLst/>
+          </a:prstGeom>
+        </p:spPr>
+      </p:pic>
+      <p:sp>
+        <p:nvSpPr>
+          <p:cNvPr id="7" name="Rounded Rectangle 6"/>
           <p:cNvSpPr/>
           <p:nvPr/>
         </p:nvSpPr>
         <p:spPr>
           <a:xfrm>
-            <a:off x="731520" y="1645920"/>
-            <a:ext cx="3401568" cy="3200400"/>
+            <a:off x="731520" y="1691640"/>
+            <a:ext cx="2514600" cy="3611880"/>
           </a:xfrm>
           <a:prstGeom prst="roundRect">
             <a:avLst/>
           </a:prstGeom>
           <a:solidFill>
-            <a:srgbClr val="0F172A"/>
+            <a:srgbClr val="131926"/>
           </a:solidFill>
-          <a:ln>
+          <a:ln w="12700">
             <a:solidFill>
-              <a:srgbClr val="1E293B"/>
+              <a:srgbClr val="38BDF8"/>
             </a:solidFill>
           </a:ln>
         </p:spPr>
@@ -6032,72 +7900,139 @@
           </a:fontRef>
         </p:style>
         <p:txBody>
-          <a:bodyPr rtlCol="0" anchor="ctr" wrap="square"/>
-          <a:lstStyle/>
-          <a:p>
-            <a:pPr algn="ctr">
+          <a:bodyPr rtlCol="0" anchor="ctr"/>
+          <a:lstStyle/>
+          <a:p>
+            <a:pPr algn="ctr"/>
+          </a:p>
+        </p:txBody>
+      </p:sp>
+      <p:sp>
+        <p:nvSpPr>
+          <p:cNvPr id="8" name="TextBox 7"/>
+          <p:cNvSpPr txBox="1"/>
+          <p:nvPr/>
+        </p:nvSpPr>
+        <p:spPr>
+          <a:xfrm>
+            <a:off x="896112" y="1856232"/>
+            <a:ext cx="2185416" cy="3282696"/>
+          </a:xfrm>
+          <a:prstGeom prst="rect">
+            <a:avLst/>
+          </a:prstGeom>
+          <a:noFill/>
+        </p:spPr>
+        <p:txBody>
+          <a:bodyPr wrap="square" lIns="0" rIns="0" tIns="0" bIns="0">
+            <a:spAutoFit/>
+          </a:bodyPr>
+          <a:lstStyle/>
+          <a:p>
+            <a:pPr>
+              <a:defRPr sz="850" b="1">
+                <a:solidFill>
+                  <a:srgbClr val="38BDF8"/>
+                </a:solidFill>
+              </a:defRPr>
+            </a:pPr>
+            <a:r>
+              <a:t>LAYER 01</a:t>
+            </a:r>
+          </a:p>
+          <a:p>
+            <a:pPr>
+              <a:spcBef>
+                <a:spcPts val="300"/>
+              </a:spcBef>
+              <a:spcAft>
+                <a:spcPts val="600"/>
+              </a:spcAft>
+              <a:defRPr sz="1200" b="1">
+                <a:solidFill>
+                  <a:srgbClr val="FFFFFF"/>
+                </a:solidFill>
+              </a:defRPr>
+            </a:pPr>
+            <a:r>
+              <a:t>Multi-Feeder Power Ingestion</a:t>
+            </a:r>
+          </a:p>
+          <a:p>
+            <a:pPr>
               <a:spcAft>
                 <a:spcPts val="800"/>
               </a:spcAft>
-              <a:defRPr sz="1100" b="1">
-                <a:solidFill>
-                  <a:srgbClr val="F5C842"/>
-                </a:solidFill>
-              </a:defRPr>
-            </a:pPr>
-            <a:r>
-              <a:t>PHASE 01 | CONNECTIVITY &amp; AUDIT</a:t>
-            </a:r>
-          </a:p>
-          <a:p>
-            <a:pPr>
-              <a:spcAft>
-                <a:spcPts val="1000"/>
-              </a:spcAft>
-              <a:defRPr sz="1600" b="1">
-                <a:solidFill>
-                  <a:srgbClr val="FFFFFF"/>
-                </a:solidFill>
-              </a:defRPr>
-            </a:pPr>
-            <a:r>
-              <a:t>Zero Rip-and-Replace Onboarding</a:t>
-            </a:r>
-          </a:p>
-          <a:p>
-            <a:pPr>
-              <a:defRPr sz="1250">
-                <a:solidFill>
-                  <a:srgbClr val="C8D8F0"/>
-                </a:solidFill>
-              </a:defRPr>
-            </a:pPr>
-            <a:r>
-              <a:t>Deploy edge container onto existing industrial PC or VM. Connect to plant DCS/PLCs via DLMS/COSEM. Ingest and normalize all telemetry in under 48 hours without halting production.</a:t>
-            </a:r>
-          </a:p>
-        </p:txBody>
-      </p:sp>
-      <p:sp>
-        <p:nvSpPr>
-          <p:cNvPr id="7" name="Rounded Rectangle 6"/>
+              <a:defRPr sz="900">
+                <a:solidFill>
+                  <a:srgbClr val="F1F5F9"/>
+                </a:solidFill>
+              </a:defRPr>
+            </a:pPr>
+            <a:r>
+              <a:t>Sub-second electrical telemetry acquisition from smart power meters, digital protection relays, and transformer monitoring units.</a:t>
+            </a:r>
+          </a:p>
+          <a:p>
+            <a:pPr>
+              <a:spcBef>
+                <a:spcPts val="400"/>
+              </a:spcBef>
+              <a:defRPr sz="800" b="1">
+                <a:solidFill>
+                  <a:srgbClr val="94A3B8"/>
+                </a:solidFill>
+              </a:defRPr>
+            </a:pPr>
+            <a:r>
+              <a:t>PROTOCOLS &amp; STANDARDS:</a:t>
+            </a:r>
+          </a:p>
+          <a:p>
+            <a:pPr>
+              <a:spcBef>
+                <a:spcPts val="200"/>
+              </a:spcBef>
+              <a:defRPr sz="850">
+                <a:solidFill>
+                  <a:srgbClr val="34D399"/>
+                </a:solidFill>
+              </a:defRPr>
+            </a:pPr>
+            <a:r>
+              <a:t> • DLMS/COSEM (IEC 62056)</a:t>
+            </a:r>
+            <a:br/>
+            <a:r>
+              <a:t> • Modbus RTU/TCP</a:t>
+            </a:r>
+            <a:br/>
+            <a:r>
+              <a:t> • IEC 61850 MMS</a:t>
+            </a:r>
+          </a:p>
+        </p:txBody>
+      </p:sp>
+      <p:sp>
+        <p:nvSpPr>
+          <p:cNvPr id="9" name="Rounded Rectangle 8"/>
           <p:cNvSpPr/>
           <p:nvPr/>
         </p:nvSpPr>
         <p:spPr>
           <a:xfrm>
-            <a:off x="4379976" y="1645920"/>
-            <a:ext cx="3401568" cy="3200400"/>
+            <a:off x="3465576" y="1691640"/>
+            <a:ext cx="2514600" cy="3611880"/>
           </a:xfrm>
           <a:prstGeom prst="roundRect">
             <a:avLst/>
           </a:prstGeom>
           <a:solidFill>
-            <a:srgbClr val="0F172A"/>
+            <a:srgbClr val="131926"/>
           </a:solidFill>
-          <a:ln>
+          <a:ln w="12700">
             <a:solidFill>
-              <a:srgbClr val="1E293B"/>
+              <a:srgbClr val="38BDF8"/>
             </a:solidFill>
           </a:ln>
         </p:spPr>
@@ -6116,72 +8051,139 @@
           </a:fontRef>
         </p:style>
         <p:txBody>
-          <a:bodyPr rtlCol="0" anchor="ctr" wrap="square"/>
-          <a:lstStyle/>
-          <a:p>
-            <a:pPr algn="ctr">
+          <a:bodyPr rtlCol="0" anchor="ctr"/>
+          <a:lstStyle/>
+          <a:p>
+            <a:pPr algn="ctr"/>
+          </a:p>
+        </p:txBody>
+      </p:sp>
+      <p:sp>
+        <p:nvSpPr>
+          <p:cNvPr id="10" name="TextBox 9"/>
+          <p:cNvSpPr txBox="1"/>
+          <p:nvPr/>
+        </p:nvSpPr>
+        <p:spPr>
+          <a:xfrm>
+            <a:off x="3630168" y="1856232"/>
+            <a:ext cx="2185416" cy="3282696"/>
+          </a:xfrm>
+          <a:prstGeom prst="rect">
+            <a:avLst/>
+          </a:prstGeom>
+          <a:noFill/>
+        </p:spPr>
+        <p:txBody>
+          <a:bodyPr wrap="square" lIns="0" rIns="0" tIns="0" bIns="0">
+            <a:spAutoFit/>
+          </a:bodyPr>
+          <a:lstStyle/>
+          <a:p>
+            <a:pPr>
+              <a:defRPr sz="850" b="1">
+                <a:solidFill>
+                  <a:srgbClr val="38BDF8"/>
+                </a:solidFill>
+              </a:defRPr>
+            </a:pPr>
+            <a:r>
+              <a:t>LAYER 02</a:t>
+            </a:r>
+          </a:p>
+          <a:p>
+            <a:pPr>
+              <a:spcBef>
+                <a:spcPts val="300"/>
+              </a:spcBef>
+              <a:spcAft>
+                <a:spcPts val="600"/>
+              </a:spcAft>
+              <a:defRPr sz="1200" b="1">
+                <a:solidFill>
+                  <a:srgbClr val="FFFFFF"/>
+                </a:solidFill>
+              </a:defRPr>
+            </a:pPr>
+            <a:r>
+              <a:t>High-Frequency Power Stream</a:t>
+            </a:r>
+          </a:p>
+          <a:p>
+            <a:pPr>
               <a:spcAft>
                 <a:spcPts val="800"/>
               </a:spcAft>
-              <a:defRPr sz="1100" b="1">
-                <a:solidFill>
-                  <a:srgbClr val="F5C842"/>
-                </a:solidFill>
-              </a:defRPr>
-            </a:pPr>
-            <a:r>
-              <a:t>PHASE 02 | TWIN CALIBRATION</a:t>
-            </a:r>
-          </a:p>
-          <a:p>
-            <a:pPr>
-              <a:spcAft>
-                <a:spcPts val="1000"/>
-              </a:spcAft>
-              <a:defRPr sz="1600" b="1">
-                <a:solidFill>
-                  <a:srgbClr val="FFFFFF"/>
-                </a:solidFill>
-              </a:defRPr>
-            </a:pPr>
-            <a:r>
-              <a:t>Physics-Model Synchronization</a:t>
-            </a:r>
-          </a:p>
-          <a:p>
-            <a:pPr>
-              <a:defRPr sz="1250">
-                <a:solidFill>
-                  <a:srgbClr val="C8D8F0"/>
-                </a:solidFill>
-              </a:defRPr>
-            </a:pPr>
-            <a:r>
-              <a:t>Feed historical historian data into TerraEMS models. Automatically build directed causal relationship graphs, calibrate thermodynamics/kinematics, and train edge neural operators.</a:t>
-            </a:r>
-          </a:p>
-        </p:txBody>
-      </p:sp>
-      <p:sp>
-        <p:nvSpPr>
-          <p:cNvPr id="8" name="Rounded Rectangle 7"/>
+              <a:defRPr sz="900">
+                <a:solidFill>
+                  <a:srgbClr val="F1F5F9"/>
+                </a:solidFill>
+              </a:defRPr>
+            </a:pPr>
+            <a:r>
+              <a:t>Continuous 3-phase power telemetry buffering, harmonic distortion FFT computation, and sub-cycle power quality event capture.</a:t>
+            </a:r>
+          </a:p>
+          <a:p>
+            <a:pPr>
+              <a:spcBef>
+                <a:spcPts val="400"/>
+              </a:spcBef>
+              <a:defRPr sz="800" b="1">
+                <a:solidFill>
+                  <a:srgbClr val="94A3B8"/>
+                </a:solidFill>
+              </a:defRPr>
+            </a:pPr>
+            <a:r>
+              <a:t>PROTOCOLS &amp; STANDARDS:</a:t>
+            </a:r>
+          </a:p>
+          <a:p>
+            <a:pPr>
+              <a:spcBef>
+                <a:spcPts val="200"/>
+              </a:spcBef>
+              <a:defRPr sz="850">
+                <a:solidFill>
+                  <a:srgbClr val="34D399"/>
+                </a:solidFill>
+              </a:defRPr>
+            </a:pPr>
+            <a:r>
+              <a:t> • Power Quality Stream</a:t>
+            </a:r>
+            <a:br/>
+            <a:r>
+              <a:t> • Harmonic FFT Buffer</a:t>
+            </a:r>
+            <a:br/>
+            <a:r>
+              <a:t> • Sub-Cycle Event Bus</a:t>
+            </a:r>
+          </a:p>
+        </p:txBody>
+      </p:sp>
+      <p:sp>
+        <p:nvSpPr>
+          <p:cNvPr id="11" name="Rounded Rectangle 10"/>
           <p:cNvSpPr/>
           <p:nvPr/>
         </p:nvSpPr>
         <p:spPr>
           <a:xfrm>
-            <a:off x="8028432" y="1645920"/>
-            <a:ext cx="3401568" cy="3200400"/>
+            <a:off x="6199632" y="1691640"/>
+            <a:ext cx="2514600" cy="3611880"/>
           </a:xfrm>
           <a:prstGeom prst="roundRect">
             <a:avLst/>
           </a:prstGeom>
           <a:solidFill>
-            <a:srgbClr val="0F172A"/>
+            <a:srgbClr val="131926"/>
           </a:solidFill>
-          <a:ln>
+          <a:ln w="12700">
             <a:solidFill>
-              <a:srgbClr val="1E293B"/>
+              <a:srgbClr val="38BDF8"/>
             </a:solidFill>
           </a:ln>
         </p:spPr>
@@ -6200,72 +8202,139 @@
           </a:fontRef>
         </p:style>
         <p:txBody>
-          <a:bodyPr rtlCol="0" anchor="ctr" wrap="square"/>
-          <a:lstStyle/>
-          <a:p>
-            <a:pPr algn="ctr">
+          <a:bodyPr rtlCol="0" anchor="ctr"/>
+          <a:lstStyle/>
+          <a:p>
+            <a:pPr algn="ctr"/>
+          </a:p>
+        </p:txBody>
+      </p:sp>
+      <p:sp>
+        <p:nvSpPr>
+          <p:cNvPr id="12" name="TextBox 11"/>
+          <p:cNvSpPr txBox="1"/>
+          <p:nvPr/>
+        </p:nvSpPr>
+        <p:spPr>
+          <a:xfrm>
+            <a:off x="6364224" y="1856232"/>
+            <a:ext cx="2185416" cy="3282696"/>
+          </a:xfrm>
+          <a:prstGeom prst="rect">
+            <a:avLst/>
+          </a:prstGeom>
+          <a:noFill/>
+        </p:spPr>
+        <p:txBody>
+          <a:bodyPr wrap="square" lIns="0" rIns="0" tIns="0" bIns="0">
+            <a:spAutoFit/>
+          </a:bodyPr>
+          <a:lstStyle/>
+          <a:p>
+            <a:pPr>
+              <a:defRPr sz="850" b="1">
+                <a:solidFill>
+                  <a:srgbClr val="38BDF8"/>
+                </a:solidFill>
+              </a:defRPr>
+            </a:pPr>
+            <a:r>
+              <a:t>LAYER 03</a:t>
+            </a:r>
+          </a:p>
+          <a:p>
+            <a:pPr>
+              <a:spcBef>
+                <a:spcPts val="300"/>
+              </a:spcBef>
+              <a:spcAft>
+                <a:spcPts val="600"/>
+              </a:spcAft>
+              <a:defRPr sz="1200" b="1">
+                <a:solidFill>
+                  <a:srgbClr val="FFFFFF"/>
+                </a:solidFill>
+              </a:defRPr>
+            </a:pPr>
+            <a:r>
+              <a:t>Peak Demand Optimizer</a:t>
+            </a:r>
+          </a:p>
+          <a:p>
+            <a:pPr>
               <a:spcAft>
                 <a:spcPts val="800"/>
               </a:spcAft>
-              <a:defRPr sz="1100" b="1">
-                <a:solidFill>
-                  <a:srgbClr val="F5C842"/>
-                </a:solidFill>
-              </a:defRPr>
-            </a:pPr>
-            <a:r>
-              <a:t>PHASE 03 | AUTONOMOUS GO-LIVE</a:t>
-            </a:r>
-          </a:p>
-          <a:p>
-            <a:pPr>
-              <a:spcAft>
-                <a:spcPts val="1000"/>
-              </a:spcAft>
-              <a:defRPr sz="1600" b="1">
-                <a:solidFill>
-                  <a:srgbClr val="FFFFFF"/>
-                </a:solidFill>
-              </a:defRPr>
-            </a:pPr>
-            <a:r>
-              <a:t>Closed-Loop Setpoint Actuation</a:t>
-            </a:r>
-          </a:p>
-          <a:p>
-            <a:pPr>
-              <a:defRPr sz="1250">
-                <a:solidFill>
-                  <a:srgbClr val="C8D8F0"/>
-                </a:solidFill>
-              </a:defRPr>
-            </a:pPr>
-            <a:r>
-              <a:t>Transition from advisory warnings to sub-25ms supervisory actuation. Sync alarm suppressions with plant operators and link work orders into SAP/ERP for verifiable recurring ROI.</a:t>
-            </a:r>
-          </a:p>
-        </p:txBody>
-      </p:sp>
-      <p:sp>
-        <p:nvSpPr>
-          <p:cNvPr id="9" name="Rounded Rectangle 8"/>
+              <a:defRPr sz="900">
+                <a:solidFill>
+                  <a:srgbClr val="F1F5F9"/>
+                </a:solidFill>
+              </a:defRPr>
+            </a:pPr>
+            <a:r>
+              <a:t>Multi-horizon energy demand forecasting, dynamic tariff arbitrage algorithms, power factor correction, and transformer load balancing.</a:t>
+            </a:r>
+          </a:p>
+          <a:p>
+            <a:pPr>
+              <a:spcBef>
+                <a:spcPts val="400"/>
+              </a:spcBef>
+              <a:defRPr sz="800" b="1">
+                <a:solidFill>
+                  <a:srgbClr val="94A3B8"/>
+                </a:solidFill>
+              </a:defRPr>
+            </a:pPr>
+            <a:r>
+              <a:t>PROTOCOLS &amp; STANDARDS:</a:t>
+            </a:r>
+          </a:p>
+          <a:p>
+            <a:pPr>
+              <a:spcBef>
+                <a:spcPts val="200"/>
+              </a:spcBef>
+              <a:defRPr sz="850">
+                <a:solidFill>
+                  <a:srgbClr val="34D399"/>
+                </a:solidFill>
+              </a:defRPr>
+            </a:pPr>
+            <a:r>
+              <a:t> • Demand Forecasting</a:t>
+            </a:r>
+            <a:br/>
+            <a:r>
+              <a:t> • Tariff Arbitrage AI</a:t>
+            </a:r>
+            <a:br/>
+            <a:r>
+              <a:t> • Power Factor Optimizer</a:t>
+            </a:r>
+          </a:p>
+        </p:txBody>
+      </p:sp>
+      <p:sp>
+        <p:nvSpPr>
+          <p:cNvPr id="13" name="Rounded Rectangle 12"/>
           <p:cNvSpPr/>
           <p:nvPr/>
         </p:nvSpPr>
         <p:spPr>
           <a:xfrm>
-            <a:off x="731520" y="5029200"/>
-            <a:ext cx="10698480" cy="1188720"/>
+            <a:off x="8933688" y="1691640"/>
+            <a:ext cx="2514600" cy="3611880"/>
           </a:xfrm>
           <a:prstGeom prst="roundRect">
             <a:avLst/>
           </a:prstGeom>
           <a:solidFill>
-            <a:srgbClr val="0C1C34"/>
+            <a:srgbClr val="131926"/>
           </a:solidFill>
-          <a:ln>
+          <a:ln w="12700">
             <a:solidFill>
-              <a:srgbClr val="00D4FF"/>
+              <a:srgbClr val="38BDF8"/>
             </a:solidFill>
           </a:ln>
         </p:spPr>
@@ -6284,16 +8353,830 @@
           </a:fontRef>
         </p:style>
         <p:txBody>
-          <a:bodyPr rtlCol="0" anchor="ctr" wrap="square"/>
-          <a:lstStyle/>
-          <a:p>
-            <a:pPr algn="ctr">
+          <a:bodyPr rtlCol="0" anchor="ctr"/>
+          <a:lstStyle/>
+          <a:p>
+            <a:pPr algn="ctr"/>
+          </a:p>
+        </p:txBody>
+      </p:sp>
+      <p:sp>
+        <p:nvSpPr>
+          <p:cNvPr id="14" name="TextBox 13"/>
+          <p:cNvSpPr txBox="1"/>
+          <p:nvPr/>
+        </p:nvSpPr>
+        <p:spPr>
+          <a:xfrm>
+            <a:off x="9098280" y="1856232"/>
+            <a:ext cx="2185416" cy="3282696"/>
+          </a:xfrm>
+          <a:prstGeom prst="rect">
+            <a:avLst/>
+          </a:prstGeom>
+          <a:noFill/>
+        </p:spPr>
+        <p:txBody>
+          <a:bodyPr wrap="square" lIns="0" rIns="0" tIns="0" bIns="0">
+            <a:spAutoFit/>
+          </a:bodyPr>
+          <a:lstStyle/>
+          <a:p>
+            <a:pPr>
+              <a:defRPr sz="850" b="1">
+                <a:solidFill>
+                  <a:srgbClr val="38BDF8"/>
+                </a:solidFill>
+              </a:defRPr>
+            </a:pPr>
+            <a:r>
+              <a:t>LAYER 04</a:t>
+            </a:r>
+          </a:p>
+          <a:p>
+            <a:pPr>
+              <a:spcBef>
+                <a:spcPts val="300"/>
+              </a:spcBef>
               <a:spcAft>
+                <a:spcPts val="600"/>
+              </a:spcAft>
+              <a:defRPr sz="1200" b="1">
+                <a:solidFill>
+                  <a:srgbClr val="FFFFFF"/>
+                </a:solidFill>
+              </a:defRPr>
+            </a:pPr>
+            <a:r>
+              <a:t>Microgrid Dispatch Cockpit</a:t>
+            </a:r>
+          </a:p>
+          <a:p>
+            <a:pPr>
+              <a:spcAft>
+                <a:spcPts val="800"/>
+              </a:spcAft>
+              <a:defRPr sz="900">
+                <a:solidFill>
+                  <a:srgbClr val="F1F5F9"/>
+                </a:solidFill>
+              </a:defRPr>
+            </a:pPr>
+            <a:r>
+              <a:t>Autonomous BESS battery charge/discharge dispatch, automated non-critical load shedding, and ANSI/ISA-101 energy supervisory displays.</a:t>
+            </a:r>
+          </a:p>
+          <a:p>
+            <a:pPr>
+              <a:spcBef>
                 <a:spcPts val="400"/>
+              </a:spcBef>
+              <a:defRPr sz="800" b="1">
+                <a:solidFill>
+                  <a:srgbClr val="94A3B8"/>
+                </a:solidFill>
+              </a:defRPr>
+            </a:pPr>
+            <a:r>
+              <a:t>PROTOCOLS &amp; STANDARDS:</a:t>
+            </a:r>
+          </a:p>
+          <a:p>
+            <a:pPr>
+              <a:spcBef>
+                <a:spcPts val="200"/>
+              </a:spcBef>
+              <a:defRPr sz="850">
+                <a:solidFill>
+                  <a:srgbClr val="34D399"/>
+                </a:solidFill>
+              </a:defRPr>
+            </a:pPr>
+            <a:r>
+              <a:t> • BESS Inverter Dispatch</a:t>
+            </a:r>
+            <a:br/>
+            <a:r>
+              <a:t> • Automated Load Shedding</a:t>
+            </a:r>
+            <a:br/>
+            <a:r>
+              <a:t> • ISA-101 Energy HMI</a:t>
+            </a:r>
+          </a:p>
+        </p:txBody>
+      </p:sp>
+      <p:sp>
+        <p:nvSpPr>
+          <p:cNvPr id="15" name="Rounded Rectangle 14"/>
+          <p:cNvSpPr/>
+          <p:nvPr/>
+        </p:nvSpPr>
+        <p:spPr>
+          <a:xfrm>
+            <a:off x="731520" y="5486400"/>
+            <a:ext cx="10728655" cy="868680"/>
+          </a:xfrm>
+          <a:prstGeom prst="roundRect">
+            <a:avLst/>
+          </a:prstGeom>
+          <a:solidFill>
+            <a:srgbClr val="131926"/>
+          </a:solidFill>
+          <a:ln w="12700">
+            <a:solidFill>
+              <a:srgbClr val="38BDF8"/>
+            </a:solidFill>
+          </a:ln>
+        </p:spPr>
+        <p:style>
+          <a:lnRef idx="1">
+            <a:schemeClr val="accent1"/>
+          </a:lnRef>
+          <a:fillRef idx="3">
+            <a:schemeClr val="accent1"/>
+          </a:fillRef>
+          <a:effectRef idx="2">
+            <a:schemeClr val="accent1"/>
+          </a:effectRef>
+          <a:fontRef idx="minor">
+            <a:schemeClr val="lt1"/>
+          </a:fontRef>
+        </p:style>
+        <p:txBody>
+          <a:bodyPr rtlCol="0" anchor="ctr"/>
+          <a:lstStyle/>
+          <a:p>
+            <a:pPr algn="ctr"/>
+          </a:p>
+        </p:txBody>
+      </p:sp>
+      <p:sp>
+        <p:nvSpPr>
+          <p:cNvPr id="16" name="TextBox 15"/>
+          <p:cNvSpPr txBox="1"/>
+          <p:nvPr/>
+        </p:nvSpPr>
+        <p:spPr>
+          <a:xfrm>
+            <a:off x="960120" y="5596128"/>
+            <a:ext cx="10241280" cy="640080"/>
+          </a:xfrm>
+          <a:prstGeom prst="rect">
+            <a:avLst/>
+          </a:prstGeom>
+          <a:noFill/>
+        </p:spPr>
+        <p:txBody>
+          <a:bodyPr wrap="square" lIns="0" rIns="0" tIns="0" bIns="0">
+            <a:spAutoFit/>
+          </a:bodyPr>
+          <a:lstStyle/>
+          <a:p>
+            <a:pPr>
+              <a:defRPr sz="850" b="1">
+                <a:solidFill>
+                  <a:srgbClr val="38BDF8"/>
+                </a:solidFill>
+              </a:defRPr>
+            </a:pPr>
+            <a:r>
+              <a:t>UNIFIED DATA PIPELINE FLOW</a:t>
+            </a:r>
+          </a:p>
+          <a:p>
+            <a:pPr>
+              <a:spcBef>
+                <a:spcPts val="200"/>
+              </a:spcBef>
+              <a:defRPr sz="950" b="1">
+                <a:solidFill>
+                  <a:srgbClr val="FFFFFF"/>
+                </a:solidFill>
+              </a:defRPr>
+            </a:pPr>
+            <a:r>
+              <a:t>3-Phase Meter Telemetry ➔ High-Frequency Power Streaming ➔ Peak Demand &amp; Tariff Optimization ➔ Automated BESS &amp; Load Actuation</a:t>
+            </a:r>
+          </a:p>
+        </p:txBody>
+      </p:sp>
+    </p:spTree>
+  </p:cSld>
+  <p:clrMapOvr>
+    <a:masterClrMapping/>
+  </p:clrMapOvr>
+</p:sld>
+</file>
+
+<file path=ppt/slides/slide7.xml><?xml version="1.0" encoding="utf-8"?>
+<p:sld xmlns:a="http://schemas.openxmlformats.org/drawingml/2006/main" xmlns:p="http://schemas.openxmlformats.org/presentationml/2006/main" xmlns:r="http://schemas.openxmlformats.org/officeDocument/2006/relationships">
+  <p:cSld>
+    <p:spTree>
+      <p:nvGrpSpPr>
+        <p:cNvPr id="1" name=""/>
+        <p:cNvGrpSpPr/>
+        <p:nvPr/>
+      </p:nvGrpSpPr>
+      <p:grpSpPr/>
+      <p:sp>
+        <p:nvSpPr>
+          <p:cNvPr id="2" name="Rectangle 1"/>
+          <p:cNvSpPr/>
+          <p:nvPr/>
+        </p:nvSpPr>
+        <p:spPr>
+          <a:xfrm>
+            <a:off x="0" y="0"/>
+            <a:ext cx="12191695" cy="6858000"/>
+          </a:xfrm>
+          <a:prstGeom prst="rect">
+            <a:avLst/>
+          </a:prstGeom>
+          <a:solidFill>
+            <a:srgbClr val="0B0F17"/>
+          </a:solidFill>
+          <a:ln>
+            <a:noFill/>
+          </a:ln>
+        </p:spPr>
+        <p:style>
+          <a:lnRef idx="1">
+            <a:schemeClr val="accent1"/>
+          </a:lnRef>
+          <a:fillRef idx="3">
+            <a:schemeClr val="accent1"/>
+          </a:fillRef>
+          <a:effectRef idx="2">
+            <a:schemeClr val="accent1"/>
+          </a:effectRef>
+          <a:fontRef idx="minor">
+            <a:schemeClr val="lt1"/>
+          </a:fontRef>
+        </p:style>
+        <p:txBody>
+          <a:bodyPr rtlCol="0" anchor="ctr"/>
+          <a:lstStyle/>
+          <a:p>
+            <a:pPr algn="ctr"/>
+          </a:p>
+        </p:txBody>
+      </p:sp>
+      <p:sp>
+        <p:nvSpPr>
+          <p:cNvPr id="3" name="Rectangle 2"/>
+          <p:cNvSpPr/>
+          <p:nvPr/>
+        </p:nvSpPr>
+        <p:spPr>
+          <a:xfrm>
+            <a:off x="731520" y="365760"/>
+            <a:ext cx="10728655" cy="18288"/>
+          </a:xfrm>
+          <a:prstGeom prst="rect">
+            <a:avLst/>
+          </a:prstGeom>
+          <a:solidFill>
+            <a:srgbClr val="38BDF8"/>
+          </a:solidFill>
+          <a:ln>
+            <a:solidFill>
+              <a:srgbClr val="38BDF8"/>
+            </a:solidFill>
+          </a:ln>
+        </p:spPr>
+        <p:style>
+          <a:lnRef idx="1">
+            <a:schemeClr val="accent1"/>
+          </a:lnRef>
+          <a:fillRef idx="3">
+            <a:schemeClr val="accent1"/>
+          </a:fillRef>
+          <a:effectRef idx="2">
+            <a:schemeClr val="accent1"/>
+          </a:effectRef>
+          <a:fontRef idx="minor">
+            <a:schemeClr val="lt1"/>
+          </a:fontRef>
+        </p:style>
+        <p:txBody>
+          <a:bodyPr rtlCol="0" anchor="ctr"/>
+          <a:lstStyle/>
+          <a:p>
+            <a:pPr algn="ctr"/>
+          </a:p>
+        </p:txBody>
+      </p:sp>
+      <p:sp>
+        <p:nvSpPr>
+          <p:cNvPr id="4" name="TextBox 3"/>
+          <p:cNvSpPr txBox="1"/>
+          <p:nvPr/>
+        </p:nvSpPr>
+        <p:spPr>
+          <a:xfrm>
+            <a:off x="731520" y="438912"/>
+            <a:ext cx="8229600" cy="274320"/>
+          </a:xfrm>
+          <a:prstGeom prst="rect">
+            <a:avLst/>
+          </a:prstGeom>
+          <a:noFill/>
+        </p:spPr>
+        <p:txBody>
+          <a:bodyPr wrap="square" lIns="0" rIns="0" tIns="0" bIns="0">
+            <a:spAutoFit/>
+          </a:bodyPr>
+          <a:lstStyle/>
+          <a:p>
+            <a:pPr>
+              <a:defRPr sz="950" b="1">
+                <a:solidFill>
+                  <a:srgbClr val="38BDF8"/>
+                </a:solidFill>
+              </a:defRPr>
+            </a:pPr>
+            <a:r>
+              <a:t>TERRESTRIAL PLATFORM  |  TERRAEMS  |  DEPLOYMENT &amp; SI VALUE</a:t>
+            </a:r>
+          </a:p>
+        </p:txBody>
+      </p:sp>
+      <p:sp>
+        <p:nvSpPr>
+          <p:cNvPr id="5" name="TextBox 4"/>
+          <p:cNvSpPr txBox="1"/>
+          <p:nvPr/>
+        </p:nvSpPr>
+        <p:spPr>
+          <a:xfrm>
+            <a:off x="731520" y="731520"/>
+            <a:ext cx="9601200" cy="777240"/>
+          </a:xfrm>
+          <a:prstGeom prst="rect">
+            <a:avLst/>
+          </a:prstGeom>
+          <a:noFill/>
+        </p:spPr>
+        <p:txBody>
+          <a:bodyPr wrap="square" lIns="0" rIns="0" tIns="0" bIns="0">
+            <a:spAutoFit/>
+          </a:bodyPr>
+          <a:lstStyle/>
+          <a:p>
+            <a:pPr>
+              <a:defRPr sz="1900" b="1">
+                <a:solidFill>
+                  <a:srgbClr val="FFFFFF"/>
+                </a:solidFill>
+              </a:defRPr>
+            </a:pPr>
+            <a:r>
+              <a:t>System Integrator Deployment Framework &amp; Commercial Model</a:t>
+            </a:r>
+          </a:p>
+          <a:p>
+            <a:pPr>
+              <a:spcBef>
+                <a:spcPts val="300"/>
+              </a:spcBef>
+              <a:defRPr sz="1050">
+                <a:solidFill>
+                  <a:srgbClr val="94A3B8"/>
+                </a:solidFill>
+              </a:defRPr>
+            </a:pPr>
+            <a:r>
+              <a:t>Zero rip-and-replace turnkey onboarding with recurring enterprise margins and co-selling enablement.</a:t>
+            </a:r>
+          </a:p>
+        </p:txBody>
+      </p:sp>
+      <p:pic>
+        <p:nvPicPr>
+          <p:cNvPr id="6" name="Picture 5" descr="tp_logo_white.png"/>
+          <p:cNvPicPr>
+            <a:picLocks noChangeAspect="1"/>
+          </p:cNvPicPr>
+          <p:nvPr/>
+        </p:nvPicPr>
+        <p:blipFill>
+          <a:blip r:embed="rId2"/>
+          <a:stretch>
+            <a:fillRect/>
+          </a:stretch>
+        </p:blipFill>
+        <p:spPr>
+          <a:xfrm>
+            <a:off x="10469880" y="411480"/>
+            <a:ext cx="987552" cy="384048"/>
+          </a:xfrm>
+          <a:prstGeom prst="rect">
+            <a:avLst/>
+          </a:prstGeom>
+        </p:spPr>
+      </p:pic>
+      <p:sp>
+        <p:nvSpPr>
+          <p:cNvPr id="7" name="Rounded Rectangle 6"/>
+          <p:cNvSpPr/>
+          <p:nvPr/>
+        </p:nvSpPr>
+        <p:spPr>
+          <a:xfrm>
+            <a:off x="731520" y="1691640"/>
+            <a:ext cx="3429000" cy="2651760"/>
+          </a:xfrm>
+          <a:prstGeom prst="roundRect">
+            <a:avLst/>
+          </a:prstGeom>
+          <a:solidFill>
+            <a:srgbClr val="131926"/>
+          </a:solidFill>
+          <a:ln w="12700">
+            <a:solidFill>
+              <a:srgbClr val="28344B"/>
+            </a:solidFill>
+          </a:ln>
+        </p:spPr>
+        <p:style>
+          <a:lnRef idx="1">
+            <a:schemeClr val="accent1"/>
+          </a:lnRef>
+          <a:fillRef idx="3">
+            <a:schemeClr val="accent1"/>
+          </a:fillRef>
+          <a:effectRef idx="2">
+            <a:schemeClr val="accent1"/>
+          </a:effectRef>
+          <a:fontRef idx="minor">
+            <a:schemeClr val="lt1"/>
+          </a:fontRef>
+        </p:style>
+        <p:txBody>
+          <a:bodyPr rtlCol="0" anchor="ctr"/>
+          <a:lstStyle/>
+          <a:p>
+            <a:pPr algn="ctr"/>
+          </a:p>
+        </p:txBody>
+      </p:sp>
+      <p:sp>
+        <p:nvSpPr>
+          <p:cNvPr id="8" name="TextBox 7"/>
+          <p:cNvSpPr txBox="1"/>
+          <p:nvPr/>
+        </p:nvSpPr>
+        <p:spPr>
+          <a:xfrm>
+            <a:off x="914400" y="1856232"/>
+            <a:ext cx="3063240" cy="2322576"/>
+          </a:xfrm>
+          <a:prstGeom prst="rect">
+            <a:avLst/>
+          </a:prstGeom>
+          <a:noFill/>
+        </p:spPr>
+        <p:txBody>
+          <a:bodyPr wrap="square" lIns="0" rIns="0" tIns="0" bIns="0">
+            <a:spAutoFit/>
+          </a:bodyPr>
+          <a:lstStyle/>
+          <a:p>
+            <a:pPr>
+              <a:defRPr sz="850" b="1">
+                <a:solidFill>
+                  <a:srgbClr val="38BDF8"/>
+                </a:solidFill>
+              </a:defRPr>
+            </a:pPr>
+            <a:r>
+              <a:t>PHASE 01 | CONNECTIVITY &amp; AUDIT</a:t>
+            </a:r>
+          </a:p>
+          <a:p>
+            <a:pPr>
+              <a:spcBef>
+                <a:spcPts val="300"/>
+              </a:spcBef>
+              <a:spcAft>
+                <a:spcPts val="600"/>
               </a:spcAft>
-              <a:defRPr sz="1150" b="1">
-                <a:solidFill>
-                  <a:srgbClr val="00D4FF"/>
+              <a:defRPr sz="1200" b="1">
+                <a:solidFill>
+                  <a:srgbClr val="FFFFFF"/>
+                </a:solidFill>
+              </a:defRPr>
+            </a:pPr>
+            <a:r>
+              <a:t>Zero Rip-and-Replace Onboarding</a:t>
+            </a:r>
+          </a:p>
+          <a:p>
+            <a:pPr>
+              <a:defRPr sz="950">
+                <a:solidFill>
+                  <a:srgbClr val="F1F5F9"/>
+                </a:solidFill>
+              </a:defRPr>
+            </a:pPr>
+            <a:r>
+              <a:t>Non-intrusive protocol discovery across field PLCs, RTUs, and historians. Plug-and-play mapping of tags into the unified TPIM semantic namespace without stopping ongoing plant production.</a:t>
+            </a:r>
+          </a:p>
+        </p:txBody>
+      </p:sp>
+      <p:sp>
+        <p:nvSpPr>
+          <p:cNvPr id="9" name="Rounded Rectangle 8"/>
+          <p:cNvSpPr/>
+          <p:nvPr/>
+        </p:nvSpPr>
+        <p:spPr>
+          <a:xfrm>
+            <a:off x="4379976" y="1691640"/>
+            <a:ext cx="3429000" cy="2651760"/>
+          </a:xfrm>
+          <a:prstGeom prst="roundRect">
+            <a:avLst/>
+          </a:prstGeom>
+          <a:solidFill>
+            <a:srgbClr val="131926"/>
+          </a:solidFill>
+          <a:ln w="12700">
+            <a:solidFill>
+              <a:srgbClr val="28344B"/>
+            </a:solidFill>
+          </a:ln>
+        </p:spPr>
+        <p:style>
+          <a:lnRef idx="1">
+            <a:schemeClr val="accent1"/>
+          </a:lnRef>
+          <a:fillRef idx="3">
+            <a:schemeClr val="accent1"/>
+          </a:fillRef>
+          <a:effectRef idx="2">
+            <a:schemeClr val="accent1"/>
+          </a:effectRef>
+          <a:fontRef idx="minor">
+            <a:schemeClr val="lt1"/>
+          </a:fontRef>
+        </p:style>
+        <p:txBody>
+          <a:bodyPr rtlCol="0" anchor="ctr"/>
+          <a:lstStyle/>
+          <a:p>
+            <a:pPr algn="ctr"/>
+          </a:p>
+        </p:txBody>
+      </p:sp>
+      <p:sp>
+        <p:nvSpPr>
+          <p:cNvPr id="10" name="TextBox 9"/>
+          <p:cNvSpPr txBox="1"/>
+          <p:nvPr/>
+        </p:nvSpPr>
+        <p:spPr>
+          <a:xfrm>
+            <a:off x="4562856" y="1856232"/>
+            <a:ext cx="3063240" cy="2322576"/>
+          </a:xfrm>
+          <a:prstGeom prst="rect">
+            <a:avLst/>
+          </a:prstGeom>
+          <a:noFill/>
+        </p:spPr>
+        <p:txBody>
+          <a:bodyPr wrap="square" lIns="0" rIns="0" tIns="0" bIns="0">
+            <a:spAutoFit/>
+          </a:bodyPr>
+          <a:lstStyle/>
+          <a:p>
+            <a:pPr>
+              <a:defRPr sz="850" b="1">
+                <a:solidFill>
+                  <a:srgbClr val="38BDF8"/>
+                </a:solidFill>
+              </a:defRPr>
+            </a:pPr>
+            <a:r>
+              <a:t>PHASE 02 | TWIN CALIBRATION</a:t>
+            </a:r>
+          </a:p>
+          <a:p>
+            <a:pPr>
+              <a:spcBef>
+                <a:spcPts val="300"/>
+              </a:spcBef>
+              <a:spcAft>
+                <a:spcPts val="600"/>
+              </a:spcAft>
+              <a:defRPr sz="1200" b="1">
+                <a:solidFill>
+                  <a:srgbClr val="FFFFFF"/>
+                </a:solidFill>
+              </a:defRPr>
+            </a:pPr>
+            <a:r>
+              <a:t>Physics-Model Synchronization</a:t>
+            </a:r>
+          </a:p>
+          <a:p>
+            <a:pPr>
+              <a:defRPr sz="950">
+                <a:solidFill>
+                  <a:srgbClr val="F1F5F9"/>
+                </a:solidFill>
+              </a:defRPr>
+            </a:pPr>
+            <a:r>
+              <a:t>Deploy high-frequency Edge Gateway on premise. Calibrate first-principles thermodynamic and kinematic models against historical telemetry to achieve 99.4%+ deterministic accuracy.</a:t>
+            </a:r>
+          </a:p>
+        </p:txBody>
+      </p:sp>
+      <p:sp>
+        <p:nvSpPr>
+          <p:cNvPr id="11" name="Rounded Rectangle 10"/>
+          <p:cNvSpPr/>
+          <p:nvPr/>
+        </p:nvSpPr>
+        <p:spPr>
+          <a:xfrm>
+            <a:off x="8028432" y="1691640"/>
+            <a:ext cx="3429000" cy="2651760"/>
+          </a:xfrm>
+          <a:prstGeom prst="roundRect">
+            <a:avLst/>
+          </a:prstGeom>
+          <a:solidFill>
+            <a:srgbClr val="131926"/>
+          </a:solidFill>
+          <a:ln w="12700">
+            <a:solidFill>
+              <a:srgbClr val="28344B"/>
+            </a:solidFill>
+          </a:ln>
+        </p:spPr>
+        <p:style>
+          <a:lnRef idx="1">
+            <a:schemeClr val="accent1"/>
+          </a:lnRef>
+          <a:fillRef idx="3">
+            <a:schemeClr val="accent1"/>
+          </a:fillRef>
+          <a:effectRef idx="2">
+            <a:schemeClr val="accent1"/>
+          </a:effectRef>
+          <a:fontRef idx="minor">
+            <a:schemeClr val="lt1"/>
+          </a:fontRef>
+        </p:style>
+        <p:txBody>
+          <a:bodyPr rtlCol="0" anchor="ctr"/>
+          <a:lstStyle/>
+          <a:p>
+            <a:pPr algn="ctr"/>
+          </a:p>
+        </p:txBody>
+      </p:sp>
+      <p:sp>
+        <p:nvSpPr>
+          <p:cNvPr id="12" name="TextBox 11"/>
+          <p:cNvSpPr txBox="1"/>
+          <p:nvPr/>
+        </p:nvSpPr>
+        <p:spPr>
+          <a:xfrm>
+            <a:off x="8211312" y="1856232"/>
+            <a:ext cx="3063240" cy="2322576"/>
+          </a:xfrm>
+          <a:prstGeom prst="rect">
+            <a:avLst/>
+          </a:prstGeom>
+          <a:noFill/>
+        </p:spPr>
+        <p:txBody>
+          <a:bodyPr wrap="square" lIns="0" rIns="0" tIns="0" bIns="0">
+            <a:spAutoFit/>
+          </a:bodyPr>
+          <a:lstStyle/>
+          <a:p>
+            <a:pPr>
+              <a:defRPr sz="850" b="1">
+                <a:solidFill>
+                  <a:srgbClr val="38BDF8"/>
+                </a:solidFill>
+              </a:defRPr>
+            </a:pPr>
+            <a:r>
+              <a:t>PHASE 03 | AUTONOMOUS GO-LIVE</a:t>
+            </a:r>
+          </a:p>
+          <a:p>
+            <a:pPr>
+              <a:spcBef>
+                <a:spcPts val="300"/>
+              </a:spcBef>
+              <a:spcAft>
+                <a:spcPts val="600"/>
+              </a:spcAft>
+              <a:defRPr sz="1200" b="1">
+                <a:solidFill>
+                  <a:srgbClr val="FFFFFF"/>
+                </a:solidFill>
+              </a:defRPr>
+            </a:pPr>
+            <a:r>
+              <a:t>Closed-Loop Setpoint Actuation</a:t>
+            </a:r>
+          </a:p>
+          <a:p>
+            <a:pPr>
+              <a:defRPr sz="950">
+                <a:solidFill>
+                  <a:srgbClr val="F1F5F9"/>
+                </a:solidFill>
+              </a:defRPr>
+            </a:pPr>
+            <a:r>
+              <a:t>Supervisory closed-loop setpoint dispatch with bumpless transfer. Comprehensive ISA-101 verified cockpit handoff with continuous SI recurring monitoring and support tiers.</a:t>
+            </a:r>
+          </a:p>
+        </p:txBody>
+      </p:sp>
+      <p:sp>
+        <p:nvSpPr>
+          <p:cNvPr id="13" name="Rounded Rectangle 12"/>
+          <p:cNvSpPr/>
+          <p:nvPr/>
+        </p:nvSpPr>
+        <p:spPr>
+          <a:xfrm>
+            <a:off x="731520" y="4526280"/>
+            <a:ext cx="10728655" cy="1828800"/>
+          </a:xfrm>
+          <a:prstGeom prst="roundRect">
+            <a:avLst/>
+          </a:prstGeom>
+          <a:solidFill>
+            <a:srgbClr val="131926"/>
+          </a:solidFill>
+          <a:ln w="12700">
+            <a:solidFill>
+              <a:srgbClr val="38BDF8"/>
+            </a:solidFill>
+          </a:ln>
+        </p:spPr>
+        <p:style>
+          <a:lnRef idx="1">
+            <a:schemeClr val="accent1"/>
+          </a:lnRef>
+          <a:fillRef idx="3">
+            <a:schemeClr val="accent1"/>
+          </a:fillRef>
+          <a:effectRef idx="2">
+            <a:schemeClr val="accent1"/>
+          </a:effectRef>
+          <a:fontRef idx="minor">
+            <a:schemeClr val="lt1"/>
+          </a:fontRef>
+        </p:style>
+        <p:txBody>
+          <a:bodyPr rtlCol="0" anchor="ctr"/>
+          <a:lstStyle/>
+          <a:p>
+            <a:pPr algn="ctr"/>
+          </a:p>
+        </p:txBody>
+      </p:sp>
+      <p:sp>
+        <p:nvSpPr>
+          <p:cNvPr id="14" name="TextBox 13"/>
+          <p:cNvSpPr txBox="1"/>
+          <p:nvPr/>
+        </p:nvSpPr>
+        <p:spPr>
+          <a:xfrm>
+            <a:off x="960120" y="4663440"/>
+            <a:ext cx="10241280" cy="1554480"/>
+          </a:xfrm>
+          <a:prstGeom prst="rect">
+            <a:avLst/>
+          </a:prstGeom>
+          <a:noFill/>
+        </p:spPr>
+        <p:txBody>
+          <a:bodyPr wrap="square" lIns="0" rIns="0" tIns="0" bIns="0">
+            <a:spAutoFit/>
+          </a:bodyPr>
+          <a:lstStyle/>
+          <a:p>
+            <a:pPr>
+              <a:defRPr sz="1000" b="1">
+                <a:solidFill>
+                  <a:srgbClr val="38BDF8"/>
                 </a:solidFill>
               </a:defRPr>
             </a:pPr>
@@ -6303,14 +9186,47 @@
           </a:p>
           <a:p>
             <a:pPr>
-              <a:defRPr sz="1300" b="1">
-                <a:solidFill>
-                  <a:srgbClr val="FFFFFF"/>
-                </a:solidFill>
-              </a:defRPr>
-            </a:pPr>
-            <a:r>
-              <a:t>High recurring annual software margins (ARR)  |  Turnkey deployment in days, not months  |  Full co-selling &amp; pre-sales engineering support  |  Certified partner portal at platform.tpcloud.tech</a:t>
+              <a:spcBef>
+                <a:spcPts val="300"/>
+              </a:spcBef>
+              <a:defRPr sz="950">
+                <a:solidFill>
+                  <a:srgbClr val="F1F5F9"/>
+                </a:solidFill>
+              </a:defRPr>
+            </a:pPr>
+            <a:r>
+              <a:t>• High-Margin Software Recurring Revenue: Earn 25%–35% continuous recurring margin on every TerraEMS software deployment, maintenance tier, and AI compute instance.</a:t>
+            </a:r>
+          </a:p>
+          <a:p>
+            <a:pPr>
+              <a:spcBef>
+                <a:spcPts val="300"/>
+              </a:spcBef>
+              <a:defRPr sz="950">
+                <a:solidFill>
+                  <a:srgbClr val="F1F5F9"/>
+                </a:solidFill>
+              </a:defRPr>
+            </a:pPr>
+            <a:r>
+              <a:t>• Turnkey Engineering Velocity: Deploy within 7 to 14 days leveraging pre-trained neural networks and automated semantic tag mapping, avoiding expensive months-long custom PLC code rewrites.</a:t>
+            </a:r>
+          </a:p>
+          <a:p>
+            <a:pPr>
+              <a:spcBef>
+                <a:spcPts val="300"/>
+              </a:spcBef>
+              <a:defRPr sz="950">
+                <a:solidFill>
+                  <a:srgbClr val="F1F5F9"/>
+                </a:solidFill>
+              </a:defRPr>
+            </a:pPr>
+            <a:r>
+              <a:t>• Enterprise Co-Selling &amp; Ecosystem: Access joint executive pipeline opportunities, certified engineering documentation, and board-level C-Suite presentation toolkits.</a:t>
             </a:r>
           </a:p>
         </p:txBody>
@@ -6641,4 +9557,324 @@
   </a:objectDefaults>
   <a:extraClrSchemeLst/>
 </a:theme>
+</file>
+
+<file path=ppt/theme/theme2.xml><?xml version="1.0" encoding="utf-8"?>
+<a:theme xmlns:a="http://schemas.openxmlformats.org/drawingml/2006/main" name="Office Theme">
+  <a:themeElements>
+    <a:clrScheme name="Office">
+      <a:dk1>
+        <a:sysClr val="windowText" lastClr="000000"/>
+      </a:dk1>
+      <a:lt1>
+        <a:sysClr val="window" lastClr="FFFFFF"/>
+      </a:lt1>
+      <a:dk2>
+        <a:srgbClr val="1F497D"/>
+      </a:dk2>
+      <a:lt2>
+        <a:srgbClr val="EEECE1"/>
+      </a:lt2>
+      <a:accent1>
+        <a:srgbClr val="4F81BD"/>
+      </a:accent1>
+      <a:accent2>
+        <a:srgbClr val="C0504D"/>
+      </a:accent2>
+      <a:accent3>
+        <a:srgbClr val="9BBB59"/>
+      </a:accent3>
+      <a:accent4>
+        <a:srgbClr val="8064A2"/>
+      </a:accent4>
+      <a:accent5>
+        <a:srgbClr val="4BACC6"/>
+      </a:accent5>
+      <a:accent6>
+        <a:srgbClr val="F79646"/>
+      </a:accent6>
+      <a:hlink>
+        <a:srgbClr val="0000FF"/>
+      </a:hlink>
+      <a:folHlink>
+        <a:srgbClr val="800080"/>
+      </a:folHlink>
+    </a:clrScheme>
+    <a:fontScheme name="Office">
+      <a:majorFont>
+        <a:latin typeface="Calibri"/>
+        <a:ea typeface=""/>
+        <a:cs typeface=""/>
+        <a:font script="Jpan" typeface="ＭＳ Ｐゴシック"/>
+        <a:font script="Hang" typeface="맑은 고딕"/>
+        <a:font script="Hans" typeface="宋体"/>
+        <a:font script="Hant" typeface="新細明體"/>
+        <a:font script="Arab" typeface="Times New Roman"/>
+        <a:font script="Hebr" typeface="Times New Roman"/>
+        <a:font script="Thai" typeface="Angsana New"/>
+        <a:font script="Ethi" typeface="Nyala"/>
+        <a:font script="Beng" typeface="Vrinda"/>
+        <a:font script="Gujr" typeface="Shruti"/>
+        <a:font script="Khmr" typeface="MoolBoran"/>
+        <a:font script="Knda" typeface="Tunga"/>
+        <a:font script="Guru" typeface="Raavi"/>
+        <a:font script="Cans" typeface="Euphemia"/>
+        <a:font script="Cher" typeface="Plantagenet Cherokee"/>
+        <a:font script="Yiii" typeface="Microsoft Yi Baiti"/>
+        <a:font script="Tibt" typeface="Microsoft Himalaya"/>
+        <a:font script="Thaa" typeface="MV Boli"/>
+        <a:font script="Deva" typeface="Mangal"/>
+        <a:font script="Telu" typeface="Gautami"/>
+        <a:font script="Taml" typeface="Latha"/>
+        <a:font script="Syrc" typeface="Estrangelo Edessa"/>
+        <a:font script="Orya" typeface="Kalinga"/>
+        <a:font script="Mlym" typeface="Kartika"/>
+        <a:font script="Laoo" typeface="DokChampa"/>
+        <a:font script="Sinh" typeface="Iskoola Pota"/>
+        <a:font script="Mong" typeface="Mongolian Baiti"/>
+        <a:font script="Viet" typeface="Times New Roman"/>
+        <a:font script="Uigh" typeface="Microsoft Uighur"/>
+        <a:font script="Geor" typeface="Sylfaen"/>
+      </a:majorFont>
+      <a:minorFont>
+        <a:latin typeface="Calibri"/>
+        <a:ea typeface=""/>
+        <a:cs typeface=""/>
+        <a:font script="Jpan" typeface="ＭＳ Ｐゴシック"/>
+        <a:font script="Hang" typeface="맑은 고딕"/>
+        <a:font script="Hans" typeface="宋体"/>
+        <a:font script="Hant" typeface="新細明體"/>
+        <a:font script="Arab" typeface="Arial"/>
+        <a:font script="Hebr" typeface="Arial"/>
+        <a:font script="Thai" typeface="Cordia New"/>
+        <a:font script="Ethi" typeface="Nyala"/>
+        <a:font script="Beng" typeface="Vrinda"/>
+        <a:font script="Gujr" typeface="Shruti"/>
+        <a:font script="Khmr" typeface="DaunPenh"/>
+        <a:font script="Knda" typeface="Tunga"/>
+        <a:font script="Guru" typeface="Raavi"/>
+        <a:font script="Cans" typeface="Euphemia"/>
+        <a:font script="Cher" typeface="Plantagenet Cherokee"/>
+        <a:font script="Yiii" typeface="Microsoft Yi Baiti"/>
+        <a:font script="Tibt" typeface="Microsoft Himalaya"/>
+        <a:font script="Thaa" typeface="MV Boli"/>
+        <a:font script="Deva" typeface="Mangal"/>
+        <a:font script="Telu" typeface="Gautami"/>
+        <a:font script="Taml" typeface="Latha"/>
+        <a:font script="Syrc" typeface="Estrangelo Edessa"/>
+        <a:font script="Orya" typeface="Kalinga"/>
+        <a:font script="Mlym" typeface="Kartika"/>
+        <a:font script="Laoo" typeface="DokChampa"/>
+        <a:font script="Sinh" typeface="Iskoola Pota"/>
+        <a:font script="Mong" typeface="Mongolian Baiti"/>
+        <a:font script="Viet" typeface="Arial"/>
+        <a:font script="Uigh" typeface="Microsoft Uighur"/>
+        <a:font script="Geor" typeface="Sylfaen"/>
+      </a:minorFont>
+    </a:fontScheme>
+    <a:fmtScheme name="Office">
+      <a:fillStyleLst>
+        <a:solidFill>
+          <a:schemeClr val="phClr"/>
+        </a:solidFill>
+        <a:gradFill rotWithShape="1">
+          <a:gsLst>
+            <a:gs pos="0">
+              <a:schemeClr val="phClr">
+                <a:tint val="50000"/>
+                <a:satMod val="300000"/>
+              </a:schemeClr>
+            </a:gs>
+            <a:gs pos="35000">
+              <a:schemeClr val="phClr">
+                <a:tint val="37000"/>
+                <a:satMod val="300000"/>
+              </a:schemeClr>
+            </a:gs>
+            <a:gs pos="100000">
+              <a:schemeClr val="phClr">
+                <a:tint val="15000"/>
+                <a:satMod val="350000"/>
+              </a:schemeClr>
+            </a:gs>
+          </a:gsLst>
+          <a:lin ang="16200000" scaled="1"/>
+        </a:gradFill>
+        <a:gradFill rotWithShape="1">
+          <a:gsLst>
+            <a:gs pos="0">
+              <a:schemeClr val="phClr">
+                <a:tint val="100000"/>
+                <a:shade val="100000"/>
+                <a:satMod val="130000"/>
+              </a:schemeClr>
+            </a:gs>
+            <a:gs pos="100000">
+              <a:schemeClr val="phClr">
+                <a:tint val="50000"/>
+                <a:shade val="100000"/>
+                <a:satMod val="350000"/>
+              </a:schemeClr>
+            </a:gs>
+          </a:gsLst>
+          <a:lin ang="16200000" scaled="0"/>
+        </a:gradFill>
+      </a:fillStyleLst>
+      <a:lnStyleLst>
+        <a:ln w="9525" cap="flat" cmpd="sng" algn="ctr">
+          <a:solidFill>
+            <a:schemeClr val="phClr">
+              <a:shade val="95000"/>
+              <a:satMod val="105000"/>
+            </a:schemeClr>
+          </a:solidFill>
+          <a:prstDash val="solid"/>
+        </a:ln>
+        <a:ln w="25400" cap="flat" cmpd="sng" algn="ctr">
+          <a:solidFill>
+            <a:schemeClr val="phClr"/>
+          </a:solidFill>
+          <a:prstDash val="solid"/>
+        </a:ln>
+        <a:ln w="38100" cap="flat" cmpd="sng" algn="ctr">
+          <a:solidFill>
+            <a:schemeClr val="phClr"/>
+          </a:solidFill>
+          <a:prstDash val="solid"/>
+        </a:ln>
+      </a:lnStyleLst>
+      <a:effectStyleLst>
+        <a:effectStyle>
+          <a:effectLst>
+            <a:outerShdw blurRad="40000" dist="20000" dir="5400000" rotWithShape="0">
+              <a:srgbClr val="000000">
+                <a:alpha val="38000"/>
+              </a:srgbClr>
+            </a:outerShdw>
+          </a:effectLst>
+        </a:effectStyle>
+        <a:effectStyle>
+          <a:effectLst>
+            <a:outerShdw blurRad="40000" dist="23000" dir="5400000" rotWithShape="0">
+              <a:srgbClr val="000000">
+                <a:alpha val="35000"/>
+              </a:srgbClr>
+            </a:outerShdw>
+          </a:effectLst>
+        </a:effectStyle>
+        <a:effectStyle>
+          <a:effectLst>
+            <a:outerShdw blurRad="40000" dist="23000" dir="5400000" rotWithShape="0">
+              <a:srgbClr val="000000">
+                <a:alpha val="35000"/>
+              </a:srgbClr>
+            </a:outerShdw>
+          </a:effectLst>
+          <a:scene3d>
+            <a:camera prst="orthographicFront">
+              <a:rot lat="0" lon="0" rev="0"/>
+            </a:camera>
+            <a:lightRig rig="threePt" dir="t">
+              <a:rot lat="0" lon="0" rev="1200000"/>
+            </a:lightRig>
+          </a:scene3d>
+          <a:sp3d>
+            <a:bevelT w="63500" h="25400"/>
+          </a:sp3d>
+        </a:effectStyle>
+      </a:effectStyleLst>
+      <a:bgFillStyleLst>
+        <a:solidFill>
+          <a:schemeClr val="phClr"/>
+        </a:solidFill>
+        <a:gradFill rotWithShape="1">
+          <a:gsLst>
+            <a:gs pos="0">
+              <a:schemeClr val="phClr">
+                <a:tint val="40000"/>
+                <a:satMod val="350000"/>
+              </a:schemeClr>
+            </a:gs>
+            <a:gs pos="40000">
+              <a:schemeClr val="phClr">
+                <a:tint val="45000"/>
+                <a:shade val="99000"/>
+                <a:satMod val="350000"/>
+              </a:schemeClr>
+            </a:gs>
+            <a:gs pos="100000">
+              <a:schemeClr val="phClr">
+                <a:shade val="20000"/>
+                <a:satMod val="255000"/>
+              </a:schemeClr>
+            </a:gs>
+          </a:gsLst>
+          <a:path path="circle">
+            <a:fillToRect l="50000" t="-80000" r="50000" b="180000"/>
+          </a:path>
+        </a:gradFill>
+        <a:gradFill rotWithShape="1">
+          <a:gsLst>
+            <a:gs pos="0">
+              <a:schemeClr val="phClr">
+                <a:tint val="80000"/>
+                <a:satMod val="300000"/>
+              </a:schemeClr>
+            </a:gs>
+            <a:gs pos="100000">
+              <a:schemeClr val="phClr">
+                <a:shade val="30000"/>
+                <a:satMod val="200000"/>
+              </a:schemeClr>
+            </a:gs>
+          </a:gsLst>
+          <a:path path="circle">
+            <a:fillToRect l="50000" t="50000" r="50000" b="50000"/>
+          </a:path>
+        </a:gradFill>
+      </a:bgFillStyleLst>
+    </a:fmtScheme>
+  </a:themeElements>
+  <a:objectDefaults>
+    <a:spDef>
+      <a:spPr/>
+      <a:bodyPr/>
+      <a:lstStyle/>
+      <a:style>
+        <a:lnRef idx="1">
+          <a:schemeClr val="accent1"/>
+        </a:lnRef>
+        <a:fillRef idx="3">
+          <a:schemeClr val="accent1"/>
+        </a:fillRef>
+        <a:effectRef idx="2">
+          <a:schemeClr val="accent1"/>
+        </a:effectRef>
+        <a:fontRef idx="minor">
+          <a:schemeClr val="lt1"/>
+        </a:fontRef>
+      </a:style>
+    </a:spDef>
+    <a:lnDef>
+      <a:spPr/>
+      <a:bodyPr/>
+      <a:lstStyle/>
+      <a:style>
+        <a:lnRef idx="2">
+          <a:schemeClr val="accent1"/>
+        </a:lnRef>
+        <a:fillRef idx="0">
+          <a:schemeClr val="accent1"/>
+        </a:fillRef>
+        <a:effectRef idx="1">
+          <a:schemeClr val="accent1"/>
+        </a:effectRef>
+        <a:fontRef idx="minor">
+          <a:schemeClr val="tx1"/>
+        </a:fontRef>
+      </a:style>
+    </a:lnDef>
+  </a:objectDefaults>
+  <a:extraClrSchemeLst/>
+</a:theme>
 </file>